--- a/presentation/HieraSync_Review_Seminar_I.pptx
+++ b/presentation/HieraSync_Review_Seminar_I.pptx
@@ -30,6 +30,11 @@
     <p:sldId id="278" r:id="rId30"/>
     <p:sldId id="279" r:id="rId31"/>
     <p:sldId id="280" r:id="rId32"/>
+    <p:sldId id="281" r:id="rId33"/>
+    <p:sldId id="282" r:id="rId34"/>
+    <p:sldId id="283" r:id="rId35"/>
+    <p:sldId id="284" r:id="rId36"/>
+    <p:sldId id="285" r:id="rId37"/>
   </p:sldIdLst>
   <p:sldSz cx="12191695" cy="6858000" type="screen4x3"/>
   <p:notesSz cx="6858000" cy="9144000"/>
@@ -1741,6 +1746,286 @@
 </p:notes>
 </file>
 
+<file path=ppt/notesSlides/notesSlide26.xml><?xml version="1.0" encoding="utf-8"?>
+<p:notes xmlns:a="http://schemas.openxmlformats.org/drawingml/2006/main" xmlns:p="http://schemas.openxmlformats.org/presentationml/2006/main" xmlns:r="http://schemas.openxmlformats.org/officeDocument/2006/relationships">
+  <p:cSld>
+    <p:spTree>
+      <p:nvGrpSpPr>
+        <p:cNvPr id="1" name=""/>
+        <p:cNvGrpSpPr/>
+        <p:nvPr/>
+      </p:nvGrpSpPr>
+      <p:grpSpPr>
+        <a:xfrm>
+          <a:off x="0" y="0"/>
+          <a:ext cx="0" cy="0"/>
+          <a:chOff x="0" y="0"/>
+          <a:chExt cx="0" cy="0"/>
+        </a:xfrm>
+      </p:grpSpPr>
+      <p:sp>
+        <p:nvSpPr>
+          <p:cNvPr id="2" name="Slide Image Placeholder 1"/>
+          <p:cNvSpPr>
+            <a:spLocks noGrp="1"/>
+          </p:cNvSpPr>
+          <p:nvPr>
+            <p:ph type="sldImg" idx="2"/>
+          </p:nvPr>
+        </p:nvSpPr>
+        <p:spPr/>
+      </p:sp>
+      <p:sp>
+        <p:nvSpPr>
+          <p:cNvPr id="3" name="Notes Placeholder 2"/>
+          <p:cNvSpPr>
+            <a:spLocks noGrp="1"/>
+          </p:cNvSpPr>
+          <p:nvPr>
+            <p:ph type="body" idx="3" sz="quarter"/>
+          </p:nvPr>
+        </p:nvSpPr>
+        <p:spPr/>
+        <p:txBody>
+          <a:bodyPr/>
+          <a:lstStyle/>
+          <a:p>
+            <a:r>
+              <a:t>Backup slide. The sequence shows a request flowing from the faculty browser to FastAPI to Firestore, then HOD and principal approvals, each persisting stage changes and fanning out notifications.</a:t>
+            </a:r>
+          </a:p>
+        </p:txBody>
+      </p:sp>
+      <p:sp>
+        <p:nvSpPr>
+          <p:cNvPr id="4" name="Slide Number Placeholder 3"/>
+          <p:cNvSpPr>
+            <a:spLocks noGrp="1"/>
+          </p:cNvSpPr>
+          <p:nvPr>
+            <p:ph type="sldNum" idx="5" sz="quarter"/>
+          </p:nvPr>
+        </p:nvSpPr>
+        <p:spPr/>
+      </p:sp>
+    </p:spTree>
+  </p:cSld>
+  <p:clrMapOvr>
+    <a:masterClrMapping/>
+  </p:clrMapOvr>
+</p:notes>
+</file>
+
+<file path=ppt/notesSlides/notesSlide27.xml><?xml version="1.0" encoding="utf-8"?>
+<p:notes xmlns:a="http://schemas.openxmlformats.org/drawingml/2006/main" xmlns:p="http://schemas.openxmlformats.org/presentationml/2006/main" xmlns:r="http://schemas.openxmlformats.org/officeDocument/2006/relationships">
+  <p:cSld>
+    <p:spTree>
+      <p:nvGrpSpPr>
+        <p:cNvPr id="1" name=""/>
+        <p:cNvGrpSpPr/>
+        <p:nvPr/>
+      </p:nvGrpSpPr>
+      <p:grpSpPr>
+        <a:xfrm>
+          <a:off x="0" y="0"/>
+          <a:ext cx="0" cy="0"/>
+          <a:chOff x="0" y="0"/>
+          <a:chExt cx="0" cy="0"/>
+        </a:xfrm>
+      </p:grpSpPr>
+      <p:sp>
+        <p:nvSpPr>
+          <p:cNvPr id="2" name="Slide Image Placeholder 1"/>
+          <p:cNvSpPr>
+            <a:spLocks noGrp="1"/>
+          </p:cNvSpPr>
+          <p:nvPr>
+            <p:ph type="sldImg" idx="2"/>
+          </p:nvPr>
+        </p:nvSpPr>
+        <p:spPr/>
+      </p:sp>
+      <p:sp>
+        <p:nvSpPr>
+          <p:cNvPr id="3" name="Notes Placeholder 2"/>
+          <p:cNvSpPr>
+            <a:spLocks noGrp="1"/>
+          </p:cNvSpPr>
+          <p:nvPr>
+            <p:ph type="body" idx="3" sz="quarter"/>
+          </p:nvPr>
+        </p:nvSpPr>
+        <p:spPr/>
+        <p:txBody>
+          <a:bodyPr/>
+          <a:lstStyle/>
+          <a:p>
+            <a:r>
+              <a:t>Backup slide. Tasks move through four states with an overdue branch. The risk formula is exactly as implemented: deadline pressure plus progress gap plus priority plus workload, clamped and banded into three levels.</a:t>
+            </a:r>
+          </a:p>
+        </p:txBody>
+      </p:sp>
+      <p:sp>
+        <p:nvSpPr>
+          <p:cNvPr id="4" name="Slide Number Placeholder 3"/>
+          <p:cNvSpPr>
+            <a:spLocks noGrp="1"/>
+          </p:cNvSpPr>
+          <p:nvPr>
+            <p:ph type="sldNum" idx="5" sz="quarter"/>
+          </p:nvPr>
+        </p:nvSpPr>
+        <p:spPr/>
+      </p:sp>
+    </p:spTree>
+  </p:cSld>
+  <p:clrMapOvr>
+    <a:masterClrMapping/>
+  </p:clrMapOvr>
+</p:notes>
+</file>
+
+<file path=ppt/notesSlides/notesSlide28.xml><?xml version="1.0" encoding="utf-8"?>
+<p:notes xmlns:a="http://schemas.openxmlformats.org/drawingml/2006/main" xmlns:p="http://schemas.openxmlformats.org/presentationml/2006/main" xmlns:r="http://schemas.openxmlformats.org/officeDocument/2006/relationships">
+  <p:cSld>
+    <p:spTree>
+      <p:nvGrpSpPr>
+        <p:cNvPr id="1" name=""/>
+        <p:cNvGrpSpPr/>
+        <p:nvPr/>
+      </p:nvGrpSpPr>
+      <p:grpSpPr>
+        <a:xfrm>
+          <a:off x="0" y="0"/>
+          <a:ext cx="0" cy="0"/>
+          <a:chOff x="0" y="0"/>
+          <a:chExt cx="0" cy="0"/>
+        </a:xfrm>
+      </p:grpSpPr>
+      <p:sp>
+        <p:nvSpPr>
+          <p:cNvPr id="2" name="Slide Image Placeholder 1"/>
+          <p:cNvSpPr>
+            <a:spLocks noGrp="1"/>
+          </p:cNvSpPr>
+          <p:nvPr>
+            <p:ph type="sldImg" idx="2"/>
+          </p:nvPr>
+        </p:nvSpPr>
+        <p:spPr/>
+      </p:sp>
+      <p:sp>
+        <p:nvSpPr>
+          <p:cNvPr id="3" name="Notes Placeholder 2"/>
+          <p:cNvSpPr>
+            <a:spLocks noGrp="1"/>
+          </p:cNvSpPr>
+          <p:nvPr>
+            <p:ph type="body" idx="3" sz="quarter"/>
+          </p:nvPr>
+        </p:nvSpPr>
+        <p:spPr/>
+        <p:txBody>
+          <a:bodyPr/>
+          <a:lstStyle/>
+          <a:p>
+            <a:r>
+              <a:t>Backup slide. Nine functional test cases cover login, role guards, tasks, approvals, risk scoring, scheduler and export. Run each live before the seminar and keep this table honest.</a:t>
+            </a:r>
+          </a:p>
+        </p:txBody>
+      </p:sp>
+      <p:sp>
+        <p:nvSpPr>
+          <p:cNvPr id="4" name="Slide Number Placeholder 3"/>
+          <p:cNvSpPr>
+            <a:spLocks noGrp="1"/>
+          </p:cNvSpPr>
+          <p:nvPr>
+            <p:ph type="sldNum" idx="5" sz="quarter"/>
+          </p:nvPr>
+        </p:nvSpPr>
+        <p:spPr/>
+      </p:sp>
+    </p:spTree>
+  </p:cSld>
+  <p:clrMapOvr>
+    <a:masterClrMapping/>
+  </p:clrMapOvr>
+</p:notes>
+</file>
+
+<file path=ppt/notesSlides/notesSlide29.xml><?xml version="1.0" encoding="utf-8"?>
+<p:notes xmlns:a="http://schemas.openxmlformats.org/drawingml/2006/main" xmlns:p="http://schemas.openxmlformats.org/presentationml/2006/main" xmlns:r="http://schemas.openxmlformats.org/officeDocument/2006/relationships">
+  <p:cSld>
+    <p:spTree>
+      <p:nvGrpSpPr>
+        <p:cNvPr id="1" name=""/>
+        <p:cNvGrpSpPr/>
+        <p:nvPr/>
+      </p:nvGrpSpPr>
+      <p:grpSpPr>
+        <a:xfrm>
+          <a:off x="0" y="0"/>
+          <a:ext cx="0" cy="0"/>
+          <a:chOff x="0" y="0"/>
+          <a:chExt cx="0" cy="0"/>
+        </a:xfrm>
+      </p:grpSpPr>
+      <p:sp>
+        <p:nvSpPr>
+          <p:cNvPr id="2" name="Slide Image Placeholder 1"/>
+          <p:cNvSpPr>
+            <a:spLocks noGrp="1"/>
+          </p:cNvSpPr>
+          <p:nvPr>
+            <p:ph type="sldImg" idx="2"/>
+          </p:nvPr>
+        </p:nvSpPr>
+        <p:spPr/>
+      </p:sp>
+      <p:sp>
+        <p:nvSpPr>
+          <p:cNvPr id="3" name="Notes Placeholder 2"/>
+          <p:cNvSpPr>
+            <a:spLocks noGrp="1"/>
+          </p:cNvSpPr>
+          <p:nvPr>
+            <p:ph type="body" idx="3" sz="quarter"/>
+          </p:nvPr>
+        </p:nvSpPr>
+        <p:spPr/>
+        <p:txBody>
+          <a:bodyPr/>
+          <a:lstStyle/>
+          <a:p>
+            <a:r>
+              <a:t>Backup slide. Use this when asked what is novel: no alternative covers academic hierarchy, two-stage approvals, free AI risk alerts and department analytics together.</a:t>
+            </a:r>
+          </a:p>
+        </p:txBody>
+      </p:sp>
+      <p:sp>
+        <p:nvSpPr>
+          <p:cNvPr id="4" name="Slide Number Placeholder 3"/>
+          <p:cNvSpPr>
+            <a:spLocks noGrp="1"/>
+          </p:cNvSpPr>
+          <p:nvPr>
+            <p:ph type="sldNum" idx="5" sz="quarter"/>
+          </p:nvPr>
+        </p:nvSpPr>
+        <p:spPr/>
+      </p:sp>
+    </p:spTree>
+  </p:cSld>
+  <p:clrMapOvr>
+    <a:masterClrMapping/>
+  </p:clrMapOvr>
+</p:notes>
+</file>
+
 <file path=ppt/notesSlides/notesSlide3.xml><?xml version="1.0" encoding="utf-8"?>
 <p:notes xmlns:a="http://schemas.openxmlformats.org/drawingml/2006/main" xmlns:p="http://schemas.openxmlformats.org/presentationml/2006/main" xmlns:r="http://schemas.openxmlformats.org/officeDocument/2006/relationships">
   <p:cSld>
@@ -1787,6 +2072,76 @@
           <a:p>
             <a:r>
               <a:t>HieraSync is a role-aware web platform for our department. It brings tasks, approvals, events and analytics together, with AI assistance for prioritization and risk alerts.</a:t>
+            </a:r>
+          </a:p>
+        </p:txBody>
+      </p:sp>
+      <p:sp>
+        <p:nvSpPr>
+          <p:cNvPr id="4" name="Slide Number Placeholder 3"/>
+          <p:cNvSpPr>
+            <a:spLocks noGrp="1"/>
+          </p:cNvSpPr>
+          <p:nvPr>
+            <p:ph type="sldNum" idx="5" sz="quarter"/>
+          </p:nvPr>
+        </p:nvSpPr>
+        <p:spPr/>
+      </p:sp>
+    </p:spTree>
+  </p:cSld>
+  <p:clrMapOvr>
+    <a:masterClrMapping/>
+  </p:clrMapOvr>
+</p:notes>
+</file>
+
+<file path=ppt/notesSlides/notesSlide30.xml><?xml version="1.0" encoding="utf-8"?>
+<p:notes xmlns:a="http://schemas.openxmlformats.org/drawingml/2006/main" xmlns:p="http://schemas.openxmlformats.org/presentationml/2006/main" xmlns:r="http://schemas.openxmlformats.org/officeDocument/2006/relationships">
+  <p:cSld>
+    <p:spTree>
+      <p:nvGrpSpPr>
+        <p:cNvPr id="1" name=""/>
+        <p:cNvGrpSpPr/>
+        <p:nvPr/>
+      </p:nvGrpSpPr>
+      <p:grpSpPr>
+        <a:xfrm>
+          <a:off x="0" y="0"/>
+          <a:ext cx="0" cy="0"/>
+          <a:chOff x="0" y="0"/>
+          <a:chExt cx="0" cy="0"/>
+        </a:xfrm>
+      </p:grpSpPr>
+      <p:sp>
+        <p:nvSpPr>
+          <p:cNvPr id="2" name="Slide Image Placeholder 1"/>
+          <p:cNvSpPr>
+            <a:spLocks noGrp="1"/>
+          </p:cNvSpPr>
+          <p:nvPr>
+            <p:ph type="sldImg" idx="2"/>
+          </p:nvPr>
+        </p:nvSpPr>
+        <p:spPr/>
+      </p:sp>
+      <p:sp>
+        <p:nvSpPr>
+          <p:cNvPr id="3" name="Notes Placeholder 2"/>
+          <p:cNvSpPr>
+            <a:spLocks noGrp="1"/>
+          </p:cNvSpPr>
+          <p:nvPr>
+            <p:ph type="body" idx="3" sz="quarter"/>
+          </p:nvPr>
+        </p:nvSpPr>
+        <p:spPr/>
+        <p:txBody>
+          <a:bodyPr/>
+          <a:lstStyle/>
+          <a:p>
+            <a:r>
+              <a:t>Backup slide. The Gantt shows design to final demo across July to December, with Review One marked today, plus the target cloud deployment chain.</a:t>
             </a:r>
           </a:p>
         </p:txBody>
@@ -26399,7 +26754,7 @@
                 <a:spcPts val="0"/>
               </a:spcBef>
               <a:spcAft>
-                <a:spcPts val="0"/>
+                <a:spcPts val="800"/>
               </a:spcAft>
             </a:pPr>
             <a:r>
@@ -26410,6 +26765,8188 @@
                 <a:latin typeface="Calibri"/>
               </a:rPr>
               <a:t>[Your Name]  •  Guided by [Guide Name]  •  CSE (AI &amp; ML), SBJIT Nagpur</a:t>
+            </a:r>
+          </a:p>
+          <a:p>
+            <a:pPr algn="ctr">
+              <a:spcBef>
+                <a:spcPts val="0"/>
+              </a:spcBef>
+              <a:spcAft>
+                <a:spcPts val="0"/>
+              </a:spcAft>
+            </a:pPr>
+            <a:r>
+              <a:rPr sz="1100" b="1" i="0">
+                <a:solidFill>
+                  <a:srgbClr val="06B6D4"/>
+                </a:solidFill>
+                <a:latin typeface="Calibri"/>
+              </a:rPr>
+              <a:t>Backup slides 26–30 follow for Q&amp;A</a:t>
+            </a:r>
+          </a:p>
+        </p:txBody>
+      </p:sp>
+    </p:spTree>
+  </p:cSld>
+  <p:clrMapOvr>
+    <a:masterClrMapping/>
+  </p:clrMapOvr>
+</p:sld>
+</file>
+
+<file path=ppt/slides/slide26.xml><?xml version="1.0" encoding="utf-8"?>
+<p:sld xmlns:a="http://schemas.openxmlformats.org/drawingml/2006/main" xmlns:p="http://schemas.openxmlformats.org/presentationml/2006/main" xmlns:r="http://schemas.openxmlformats.org/officeDocument/2006/relationships">
+  <p:cSld>
+    <p:bg>
+      <p:bgPr>
+        <a:solidFill>
+          <a:srgbClr val="F3F6FC"/>
+        </a:solidFill>
+        <a:effectLst/>
+      </p:bgPr>
+    </p:bg>
+    <p:spTree>
+      <p:nvGrpSpPr>
+        <p:cNvPr id="1" name=""/>
+        <p:cNvGrpSpPr/>
+        <p:nvPr/>
+      </p:nvGrpSpPr>
+      <p:grpSpPr/>
+      <p:sp>
+        <p:nvSpPr>
+          <p:cNvPr id="2" name="Rectangle 1"/>
+          <p:cNvSpPr/>
+          <p:nvPr/>
+        </p:nvSpPr>
+        <p:spPr>
+          <a:xfrm>
+            <a:off x="0" y="0"/>
+            <a:ext cx="12191695" cy="1115568"/>
+          </a:xfrm>
+          <a:prstGeom prst="rect">
+            <a:avLst/>
+          </a:prstGeom>
+          <a:solidFill>
+            <a:srgbClr val="0B1E3B"/>
+          </a:solidFill>
+          <a:ln>
+            <a:noFill/>
+          </a:ln>
+          <a:effectLst/>
+        </p:spPr>
+        <p:style>
+          <a:lnRef idx="1">
+            <a:schemeClr val="accent1"/>
+          </a:lnRef>
+          <a:fillRef idx="3">
+            <a:schemeClr val="accent1"/>
+          </a:fillRef>
+          <a:effectRef idx="2">
+            <a:schemeClr val="accent1"/>
+          </a:effectRef>
+          <a:fontRef idx="minor">
+            <a:schemeClr val="lt1"/>
+          </a:fontRef>
+        </p:style>
+        <p:txBody>
+          <a:bodyPr rtlCol="0" anchor="ctr"/>
+          <a:lstStyle/>
+          <a:p>
+            <a:pPr algn="ctr"/>
+          </a:p>
+        </p:txBody>
+      </p:sp>
+      <p:sp>
+        <p:nvSpPr>
+          <p:cNvPr id="3" name="Rectangle 2"/>
+          <p:cNvSpPr/>
+          <p:nvPr/>
+        </p:nvSpPr>
+        <p:spPr>
+          <a:xfrm>
+            <a:off x="0" y="1115568"/>
+            <a:ext cx="12191695" cy="41148"/>
+          </a:xfrm>
+          <a:prstGeom prst="rect">
+            <a:avLst/>
+          </a:prstGeom>
+          <a:solidFill>
+            <a:srgbClr val="F59E0B"/>
+          </a:solidFill>
+          <a:ln>
+            <a:noFill/>
+          </a:ln>
+          <a:effectLst/>
+        </p:spPr>
+        <p:style>
+          <a:lnRef idx="1">
+            <a:schemeClr val="accent1"/>
+          </a:lnRef>
+          <a:fillRef idx="3">
+            <a:schemeClr val="accent1"/>
+          </a:fillRef>
+          <a:effectRef idx="2">
+            <a:schemeClr val="accent1"/>
+          </a:effectRef>
+          <a:fontRef idx="minor">
+            <a:schemeClr val="lt1"/>
+          </a:fontRef>
+        </p:style>
+        <p:txBody>
+          <a:bodyPr rtlCol="0" anchor="ctr"/>
+          <a:lstStyle/>
+          <a:p>
+            <a:pPr algn="ctr"/>
+          </a:p>
+        </p:txBody>
+      </p:sp>
+      <p:sp>
+        <p:nvSpPr>
+          <p:cNvPr id="4" name="Rectangle 3"/>
+          <p:cNvSpPr/>
+          <p:nvPr/>
+        </p:nvSpPr>
+        <p:spPr>
+          <a:xfrm>
+            <a:off x="411480" y="109728"/>
+            <a:ext cx="10058400" cy="914400"/>
+          </a:xfrm>
+          <a:prstGeom prst="rect">
+            <a:avLst/>
+          </a:prstGeom>
+          <a:noFill/>
+          <a:ln>
+            <a:noFill/>
+          </a:ln>
+          <a:effectLst/>
+        </p:spPr>
+        <p:style>
+          <a:lnRef idx="1">
+            <a:schemeClr val="accent1"/>
+          </a:lnRef>
+          <a:fillRef idx="3">
+            <a:schemeClr val="accent1"/>
+          </a:fillRef>
+          <a:effectRef idx="2">
+            <a:schemeClr val="accent1"/>
+          </a:effectRef>
+          <a:fontRef idx="minor">
+            <a:schemeClr val="lt1"/>
+          </a:fontRef>
+        </p:style>
+        <p:txBody>
+          <a:bodyPr rtlCol="0" anchor="t" wrap="square" lIns="0" rIns="0" tIns="36576" bIns="36576"/>
+          <a:lstStyle/>
+          <a:p>
+            <a:pPr algn="l">
+              <a:spcBef>
+                <a:spcPts val="0"/>
+              </a:spcBef>
+              <a:spcAft>
+                <a:spcPts val="100"/>
+              </a:spcAft>
+            </a:pPr>
+            <a:r>
+              <a:rPr sz="1050" b="1" i="0">
+                <a:solidFill>
+                  <a:srgbClr val="06B6D4"/>
+                </a:solidFill>
+                <a:latin typeface="Calibri"/>
+              </a:rPr>
+              <a:t>APPENDIX · BACKUP FOR Q&amp;A</a:t>
+            </a:r>
+          </a:p>
+          <a:p>
+            <a:pPr algn="l">
+              <a:spcBef>
+                <a:spcPts val="0"/>
+              </a:spcBef>
+              <a:spcAft>
+                <a:spcPts val="0"/>
+              </a:spcAft>
+            </a:pPr>
+            <a:r>
+              <a:rPr sz="2500" b="1" i="0">
+                <a:solidFill>
+                  <a:srgbClr val="FFFFFF"/>
+                </a:solidFill>
+                <a:latin typeface="Calibri"/>
+              </a:rPr>
+              <a:t>Appendix A — Sequence Diagram (Approval Flow)</a:t>
+            </a:r>
+          </a:p>
+        </p:txBody>
+      </p:sp>
+      <p:sp>
+        <p:nvSpPr>
+          <p:cNvPr id="5" name="Rounded Rectangle 4"/>
+          <p:cNvSpPr/>
+          <p:nvPr/>
+        </p:nvSpPr>
+        <p:spPr>
+          <a:xfrm>
+            <a:off x="11018520" y="292608"/>
+            <a:ext cx="777240" cy="502920"/>
+          </a:xfrm>
+          <a:prstGeom prst="roundRect">
+            <a:avLst/>
+          </a:prstGeom>
+          <a:solidFill>
+            <a:srgbClr val="143363"/>
+          </a:solidFill>
+          <a:ln w="15875">
+            <a:solidFill>
+              <a:srgbClr val="06B6D4"/>
+            </a:solidFill>
+          </a:ln>
+          <a:effectLst/>
+        </p:spPr>
+        <p:style>
+          <a:lnRef idx="1">
+            <a:schemeClr val="accent1"/>
+          </a:lnRef>
+          <a:fillRef idx="3">
+            <a:schemeClr val="accent1"/>
+          </a:fillRef>
+          <a:effectRef idx="2">
+            <a:schemeClr val="accent1"/>
+          </a:effectRef>
+          <a:fontRef idx="minor">
+            <a:schemeClr val="lt1"/>
+          </a:fontRef>
+        </p:style>
+        <p:txBody>
+          <a:bodyPr rtlCol="0" anchor="ctr" wrap="square" lIns="18288" rIns="18288" tIns="36576" bIns="36576"/>
+          <a:lstStyle/>
+          <a:p>
+            <a:pPr algn="ctr">
+              <a:spcBef>
+                <a:spcPts val="0"/>
+              </a:spcBef>
+              <a:spcAft>
+                <a:spcPts val="0"/>
+              </a:spcAft>
+            </a:pPr>
+            <a:r>
+              <a:rPr sz="1500" b="1" i="0">
+                <a:solidFill>
+                  <a:srgbClr val="FFFFFF"/>
+                </a:solidFill>
+                <a:latin typeface="Calibri"/>
+              </a:rPr>
+              <a:t>26</a:t>
+            </a:r>
+          </a:p>
+        </p:txBody>
+      </p:sp>
+      <p:sp>
+        <p:nvSpPr>
+          <p:cNvPr id="6" name="Rectangle 5"/>
+          <p:cNvSpPr/>
+          <p:nvPr/>
+        </p:nvSpPr>
+        <p:spPr>
+          <a:xfrm>
+            <a:off x="411480" y="6455664"/>
+            <a:ext cx="11365992" cy="320040"/>
+          </a:xfrm>
+          <a:prstGeom prst="rect">
+            <a:avLst/>
+          </a:prstGeom>
+          <a:noFill/>
+          <a:ln>
+            <a:noFill/>
+          </a:ln>
+          <a:effectLst/>
+        </p:spPr>
+        <p:style>
+          <a:lnRef idx="1">
+            <a:schemeClr val="accent1"/>
+          </a:lnRef>
+          <a:fillRef idx="3">
+            <a:schemeClr val="accent1"/>
+          </a:fillRef>
+          <a:effectRef idx="2">
+            <a:schemeClr val="accent1"/>
+          </a:effectRef>
+          <a:fontRef idx="minor">
+            <a:schemeClr val="lt1"/>
+          </a:fontRef>
+        </p:style>
+        <p:txBody>
+          <a:bodyPr rtlCol="0" anchor="t" wrap="square" lIns="0" rIns="0" tIns="36576" bIns="36576"/>
+          <a:lstStyle/>
+          <a:p>
+            <a:pPr algn="ctr">
+              <a:spcAft>
+                <a:spcPts val="0"/>
+              </a:spcAft>
+            </a:pPr>
+            <a:r>
+              <a:rPr sz="850" b="0">
+                <a:solidFill>
+                  <a:srgbClr val="64748B"/>
+                </a:solidFill>
+                <a:latin typeface="Calibri"/>
+              </a:rPr>
+              <a:t>HieraSync AI  •  Review Seminar – I      </a:t>
+            </a:r>
+            <a:r>
+              <a:rPr sz="850" b="0">
+                <a:solidFill>
+                  <a:srgbClr val="64748B"/>
+                </a:solidFill>
+                <a:latin typeface="Calibri"/>
+              </a:rPr>
+              <a:t>CSE (AI &amp; ML), SBJIT Nagpur</a:t>
+            </a:r>
+          </a:p>
+        </p:txBody>
+      </p:sp>
+      <p:sp>
+        <p:nvSpPr>
+          <p:cNvPr id="7" name="Rounded Rectangle 6"/>
+          <p:cNvSpPr/>
+          <p:nvPr/>
+        </p:nvSpPr>
+        <p:spPr>
+          <a:xfrm>
+            <a:off x="548640" y="1417320"/>
+            <a:ext cx="2468880" cy="685800"/>
+          </a:xfrm>
+          <a:prstGeom prst="roundRect">
+            <a:avLst/>
+          </a:prstGeom>
+          <a:solidFill>
+            <a:srgbClr val="FFFFFF"/>
+          </a:solidFill>
+          <a:ln w="12700">
+            <a:solidFill>
+              <a:srgbClr val="CBD5E1"/>
+            </a:solidFill>
+          </a:ln>
+          <a:effectLst/>
+        </p:spPr>
+        <p:style>
+          <a:lnRef idx="1">
+            <a:schemeClr val="accent1"/>
+          </a:lnRef>
+          <a:fillRef idx="3">
+            <a:schemeClr val="accent1"/>
+          </a:fillRef>
+          <a:effectRef idx="2">
+            <a:schemeClr val="accent1"/>
+          </a:effectRef>
+          <a:fontRef idx="minor">
+            <a:schemeClr val="lt1"/>
+          </a:fontRef>
+        </p:style>
+        <p:txBody>
+          <a:bodyPr rtlCol="0" anchor="ctr" wrap="square" lIns="109728" rIns="109728" tIns="36576" bIns="36576"/>
+          <a:lstStyle/>
+          <a:p>
+            <a:pPr algn="ctr">
+              <a:spcBef>
+                <a:spcPts val="0"/>
+              </a:spcBef>
+              <a:spcAft>
+                <a:spcPts val="300"/>
+              </a:spcAft>
+            </a:pPr>
+            <a:r>
+              <a:rPr sz="1100" b="1" i="0">
+                <a:solidFill>
+                  <a:srgbClr val="0B1E3B"/>
+                </a:solidFill>
+                <a:latin typeface="Calibri"/>
+              </a:rPr>
+              <a:t>Faculty
+Browser</a:t>
+            </a:r>
+          </a:p>
+        </p:txBody>
+      </p:sp>
+      <p:sp>
+        <p:nvSpPr>
+          <p:cNvPr id="8" name="Rounded Rectangle 7"/>
+          <p:cNvSpPr/>
+          <p:nvPr/>
+        </p:nvSpPr>
+        <p:spPr>
+          <a:xfrm>
+            <a:off x="548640" y="1417320"/>
+            <a:ext cx="82296" cy="685800"/>
+          </a:xfrm>
+          <a:prstGeom prst="roundRect">
+            <a:avLst/>
+          </a:prstGeom>
+          <a:solidFill>
+            <a:srgbClr val="4F46E5"/>
+          </a:solidFill>
+          <a:ln>
+            <a:noFill/>
+          </a:ln>
+          <a:effectLst/>
+        </p:spPr>
+        <p:style>
+          <a:lnRef idx="1">
+            <a:schemeClr val="accent1"/>
+          </a:lnRef>
+          <a:fillRef idx="3">
+            <a:schemeClr val="accent1"/>
+          </a:fillRef>
+          <a:effectRef idx="2">
+            <a:schemeClr val="accent1"/>
+          </a:effectRef>
+          <a:fontRef idx="minor">
+            <a:schemeClr val="lt1"/>
+          </a:fontRef>
+        </p:style>
+        <p:txBody>
+          <a:bodyPr rtlCol="0" anchor="ctr"/>
+          <a:lstStyle/>
+          <a:p>
+            <a:pPr algn="ctr"/>
+          </a:p>
+        </p:txBody>
+      </p:sp>
+      <p:cxnSp>
+        <p:nvCxnSpPr>
+          <p:cNvPr id="9" name="Connector 8"/>
+          <p:cNvCxnSpPr/>
+          <p:nvPr/>
+        </p:nvCxnSpPr>
+        <p:spPr>
+          <a:xfrm>
+            <a:off x="1783080" y="2103120"/>
+            <a:ext cx="0" cy="3474720"/>
+          </a:xfrm>
+          <a:prstGeom prst="line">
+            <a:avLst/>
+          </a:prstGeom>
+          <a:ln w="15875">
+            <a:solidFill>
+              <a:srgbClr val="CBD5E1"/>
+            </a:solidFill>
+          </a:ln>
+          <a:effectLst/>
+        </p:spPr>
+        <p:style>
+          <a:lnRef idx="2">
+            <a:schemeClr val="accent1"/>
+          </a:lnRef>
+          <a:fillRef idx="0">
+            <a:schemeClr val="accent1"/>
+          </a:fillRef>
+          <a:effectRef idx="1">
+            <a:schemeClr val="accent1"/>
+          </a:effectRef>
+          <a:fontRef idx="minor">
+            <a:schemeClr val="tx1"/>
+          </a:fontRef>
+        </p:style>
+      </p:cxnSp>
+      <p:sp>
+        <p:nvSpPr>
+          <p:cNvPr id="10" name="Rounded Rectangle 9"/>
+          <p:cNvSpPr/>
+          <p:nvPr/>
+        </p:nvSpPr>
+        <p:spPr>
+          <a:xfrm>
+            <a:off x="3474720" y="1417320"/>
+            <a:ext cx="2468880" cy="685800"/>
+          </a:xfrm>
+          <a:prstGeom prst="roundRect">
+            <a:avLst/>
+          </a:prstGeom>
+          <a:solidFill>
+            <a:srgbClr val="FFFFFF"/>
+          </a:solidFill>
+          <a:ln w="12700">
+            <a:solidFill>
+              <a:srgbClr val="CBD5E1"/>
+            </a:solidFill>
+          </a:ln>
+          <a:effectLst/>
+        </p:spPr>
+        <p:style>
+          <a:lnRef idx="1">
+            <a:schemeClr val="accent1"/>
+          </a:lnRef>
+          <a:fillRef idx="3">
+            <a:schemeClr val="accent1"/>
+          </a:fillRef>
+          <a:effectRef idx="2">
+            <a:schemeClr val="accent1"/>
+          </a:effectRef>
+          <a:fontRef idx="minor">
+            <a:schemeClr val="lt1"/>
+          </a:fontRef>
+        </p:style>
+        <p:txBody>
+          <a:bodyPr rtlCol="0" anchor="ctr" wrap="square" lIns="109728" rIns="109728" tIns="36576" bIns="36576"/>
+          <a:lstStyle/>
+          <a:p>
+            <a:pPr algn="ctr">
+              <a:spcBef>
+                <a:spcPts val="0"/>
+              </a:spcBef>
+              <a:spcAft>
+                <a:spcPts val="300"/>
+              </a:spcAft>
+            </a:pPr>
+            <a:r>
+              <a:rPr sz="1100" b="1" i="0">
+                <a:solidFill>
+                  <a:srgbClr val="0B1E3B"/>
+                </a:solidFill>
+                <a:latin typeface="Calibri"/>
+              </a:rPr>
+              <a:t>FastAPI
+Server</a:t>
+            </a:r>
+          </a:p>
+        </p:txBody>
+      </p:sp>
+      <p:sp>
+        <p:nvSpPr>
+          <p:cNvPr id="11" name="Rounded Rectangle 10"/>
+          <p:cNvSpPr/>
+          <p:nvPr/>
+        </p:nvSpPr>
+        <p:spPr>
+          <a:xfrm>
+            <a:off x="3474720" y="1417320"/>
+            <a:ext cx="82296" cy="685800"/>
+          </a:xfrm>
+          <a:prstGeom prst="roundRect">
+            <a:avLst/>
+          </a:prstGeom>
+          <a:solidFill>
+            <a:srgbClr val="4F46E5"/>
+          </a:solidFill>
+          <a:ln>
+            <a:noFill/>
+          </a:ln>
+          <a:effectLst/>
+        </p:spPr>
+        <p:style>
+          <a:lnRef idx="1">
+            <a:schemeClr val="accent1"/>
+          </a:lnRef>
+          <a:fillRef idx="3">
+            <a:schemeClr val="accent1"/>
+          </a:fillRef>
+          <a:effectRef idx="2">
+            <a:schemeClr val="accent1"/>
+          </a:effectRef>
+          <a:fontRef idx="minor">
+            <a:schemeClr val="lt1"/>
+          </a:fontRef>
+        </p:style>
+        <p:txBody>
+          <a:bodyPr rtlCol="0" anchor="ctr"/>
+          <a:lstStyle/>
+          <a:p>
+            <a:pPr algn="ctr"/>
+          </a:p>
+        </p:txBody>
+      </p:sp>
+      <p:cxnSp>
+        <p:nvCxnSpPr>
+          <p:cNvPr id="12" name="Connector 11"/>
+          <p:cNvCxnSpPr/>
+          <p:nvPr/>
+        </p:nvCxnSpPr>
+        <p:spPr>
+          <a:xfrm>
+            <a:off x="4709160" y="2103120"/>
+            <a:ext cx="0" cy="3474720"/>
+          </a:xfrm>
+          <a:prstGeom prst="line">
+            <a:avLst/>
+          </a:prstGeom>
+          <a:ln w="15875">
+            <a:solidFill>
+              <a:srgbClr val="CBD5E1"/>
+            </a:solidFill>
+          </a:ln>
+          <a:effectLst/>
+        </p:spPr>
+        <p:style>
+          <a:lnRef idx="2">
+            <a:schemeClr val="accent1"/>
+          </a:lnRef>
+          <a:fillRef idx="0">
+            <a:schemeClr val="accent1"/>
+          </a:fillRef>
+          <a:effectRef idx="1">
+            <a:schemeClr val="accent1"/>
+          </a:effectRef>
+          <a:fontRef idx="minor">
+            <a:schemeClr val="tx1"/>
+          </a:fontRef>
+        </p:style>
+      </p:cxnSp>
+      <p:sp>
+        <p:nvSpPr>
+          <p:cNvPr id="13" name="Rounded Rectangle 12"/>
+          <p:cNvSpPr/>
+          <p:nvPr/>
+        </p:nvSpPr>
+        <p:spPr>
+          <a:xfrm>
+            <a:off x="6400800" y="1417320"/>
+            <a:ext cx="2194560" cy="685800"/>
+          </a:xfrm>
+          <a:prstGeom prst="roundRect">
+            <a:avLst/>
+          </a:prstGeom>
+          <a:solidFill>
+            <a:srgbClr val="FFFFFF"/>
+          </a:solidFill>
+          <a:ln w="12700">
+            <a:solidFill>
+              <a:srgbClr val="CBD5E1"/>
+            </a:solidFill>
+          </a:ln>
+          <a:effectLst/>
+        </p:spPr>
+        <p:style>
+          <a:lnRef idx="1">
+            <a:schemeClr val="accent1"/>
+          </a:lnRef>
+          <a:fillRef idx="3">
+            <a:schemeClr val="accent1"/>
+          </a:fillRef>
+          <a:effectRef idx="2">
+            <a:schemeClr val="accent1"/>
+          </a:effectRef>
+          <a:fontRef idx="minor">
+            <a:schemeClr val="lt1"/>
+          </a:fontRef>
+        </p:style>
+        <p:txBody>
+          <a:bodyPr rtlCol="0" anchor="ctr" wrap="square" lIns="109728" rIns="109728" tIns="36576" bIns="36576"/>
+          <a:lstStyle/>
+          <a:p>
+            <a:pPr algn="ctr">
+              <a:spcBef>
+                <a:spcPts val="0"/>
+              </a:spcBef>
+              <a:spcAft>
+                <a:spcPts val="300"/>
+              </a:spcAft>
+            </a:pPr>
+            <a:r>
+              <a:rPr sz="1100" b="1" i="0">
+                <a:solidFill>
+                  <a:srgbClr val="0B1E3B"/>
+                </a:solidFill>
+                <a:latin typeface="Calibri"/>
+              </a:rPr>
+              <a:t>Firestore
+DB</a:t>
+            </a:r>
+          </a:p>
+        </p:txBody>
+      </p:sp>
+      <p:sp>
+        <p:nvSpPr>
+          <p:cNvPr id="14" name="Rounded Rectangle 13"/>
+          <p:cNvSpPr/>
+          <p:nvPr/>
+        </p:nvSpPr>
+        <p:spPr>
+          <a:xfrm>
+            <a:off x="6400800" y="1417320"/>
+            <a:ext cx="82296" cy="685800"/>
+          </a:xfrm>
+          <a:prstGeom prst="roundRect">
+            <a:avLst/>
+          </a:prstGeom>
+          <a:solidFill>
+            <a:srgbClr val="4F46E5"/>
+          </a:solidFill>
+          <a:ln>
+            <a:noFill/>
+          </a:ln>
+          <a:effectLst/>
+        </p:spPr>
+        <p:style>
+          <a:lnRef idx="1">
+            <a:schemeClr val="accent1"/>
+          </a:lnRef>
+          <a:fillRef idx="3">
+            <a:schemeClr val="accent1"/>
+          </a:fillRef>
+          <a:effectRef idx="2">
+            <a:schemeClr val="accent1"/>
+          </a:effectRef>
+          <a:fontRef idx="minor">
+            <a:schemeClr val="lt1"/>
+          </a:fontRef>
+        </p:style>
+        <p:txBody>
+          <a:bodyPr rtlCol="0" anchor="ctr"/>
+          <a:lstStyle/>
+          <a:p>
+            <a:pPr algn="ctr"/>
+          </a:p>
+        </p:txBody>
+      </p:sp>
+      <p:cxnSp>
+        <p:nvCxnSpPr>
+          <p:cNvPr id="15" name="Connector 14"/>
+          <p:cNvCxnSpPr/>
+          <p:nvPr/>
+        </p:nvCxnSpPr>
+        <p:spPr>
+          <a:xfrm>
+            <a:off x="7498079" y="2103120"/>
+            <a:ext cx="0" cy="3474720"/>
+          </a:xfrm>
+          <a:prstGeom prst="line">
+            <a:avLst/>
+          </a:prstGeom>
+          <a:ln w="15875">
+            <a:solidFill>
+              <a:srgbClr val="CBD5E1"/>
+            </a:solidFill>
+          </a:ln>
+          <a:effectLst/>
+        </p:spPr>
+        <p:style>
+          <a:lnRef idx="2">
+            <a:schemeClr val="accent1"/>
+          </a:lnRef>
+          <a:fillRef idx="0">
+            <a:schemeClr val="accent1"/>
+          </a:fillRef>
+          <a:effectRef idx="1">
+            <a:schemeClr val="accent1"/>
+          </a:effectRef>
+          <a:fontRef idx="minor">
+            <a:schemeClr val="tx1"/>
+          </a:fontRef>
+        </p:style>
+      </p:cxnSp>
+      <p:sp>
+        <p:nvSpPr>
+          <p:cNvPr id="16" name="Rounded Rectangle 15"/>
+          <p:cNvSpPr/>
+          <p:nvPr/>
+        </p:nvSpPr>
+        <p:spPr>
+          <a:xfrm>
+            <a:off x="9052560" y="1417320"/>
+            <a:ext cx="2194560" cy="685800"/>
+          </a:xfrm>
+          <a:prstGeom prst="roundRect">
+            <a:avLst/>
+          </a:prstGeom>
+          <a:solidFill>
+            <a:srgbClr val="FFFFFF"/>
+          </a:solidFill>
+          <a:ln w="12700">
+            <a:solidFill>
+              <a:srgbClr val="CBD5E1"/>
+            </a:solidFill>
+          </a:ln>
+          <a:effectLst/>
+        </p:spPr>
+        <p:style>
+          <a:lnRef idx="1">
+            <a:schemeClr val="accent1"/>
+          </a:lnRef>
+          <a:fillRef idx="3">
+            <a:schemeClr val="accent1"/>
+          </a:fillRef>
+          <a:effectRef idx="2">
+            <a:schemeClr val="accent1"/>
+          </a:effectRef>
+          <a:fontRef idx="minor">
+            <a:schemeClr val="lt1"/>
+          </a:fontRef>
+        </p:style>
+        <p:txBody>
+          <a:bodyPr rtlCol="0" anchor="ctr" wrap="square" lIns="109728" rIns="109728" tIns="36576" bIns="36576"/>
+          <a:lstStyle/>
+          <a:p>
+            <a:pPr algn="ctr">
+              <a:spcBef>
+                <a:spcPts val="0"/>
+              </a:spcBef>
+              <a:spcAft>
+                <a:spcPts val="300"/>
+              </a:spcAft>
+            </a:pPr>
+            <a:r>
+              <a:rPr sz="1100" b="1" i="0">
+                <a:solidFill>
+                  <a:srgbClr val="0B1E3B"/>
+                </a:solidFill>
+                <a:latin typeface="Calibri"/>
+              </a:rPr>
+              <a:t>HOD / Principal
+App</a:t>
+            </a:r>
+          </a:p>
+        </p:txBody>
+      </p:sp>
+      <p:sp>
+        <p:nvSpPr>
+          <p:cNvPr id="17" name="Rounded Rectangle 16"/>
+          <p:cNvSpPr/>
+          <p:nvPr/>
+        </p:nvSpPr>
+        <p:spPr>
+          <a:xfrm>
+            <a:off x="9052560" y="1417320"/>
+            <a:ext cx="82296" cy="685800"/>
+          </a:xfrm>
+          <a:prstGeom prst="roundRect">
+            <a:avLst/>
+          </a:prstGeom>
+          <a:solidFill>
+            <a:srgbClr val="4F46E5"/>
+          </a:solidFill>
+          <a:ln>
+            <a:noFill/>
+          </a:ln>
+          <a:effectLst/>
+        </p:spPr>
+        <p:style>
+          <a:lnRef idx="1">
+            <a:schemeClr val="accent1"/>
+          </a:lnRef>
+          <a:fillRef idx="3">
+            <a:schemeClr val="accent1"/>
+          </a:fillRef>
+          <a:effectRef idx="2">
+            <a:schemeClr val="accent1"/>
+          </a:effectRef>
+          <a:fontRef idx="minor">
+            <a:schemeClr val="lt1"/>
+          </a:fontRef>
+        </p:style>
+        <p:txBody>
+          <a:bodyPr rtlCol="0" anchor="ctr"/>
+          <a:lstStyle/>
+          <a:p>
+            <a:pPr algn="ctr"/>
+          </a:p>
+        </p:txBody>
+      </p:sp>
+      <p:cxnSp>
+        <p:nvCxnSpPr>
+          <p:cNvPr id="18" name="Connector 17"/>
+          <p:cNvCxnSpPr/>
+          <p:nvPr/>
+        </p:nvCxnSpPr>
+        <p:spPr>
+          <a:xfrm>
+            <a:off x="10149840" y="2103120"/>
+            <a:ext cx="0" cy="3474720"/>
+          </a:xfrm>
+          <a:prstGeom prst="line">
+            <a:avLst/>
+          </a:prstGeom>
+          <a:ln w="15875">
+            <a:solidFill>
+              <a:srgbClr val="CBD5E1"/>
+            </a:solidFill>
+          </a:ln>
+          <a:effectLst/>
+        </p:spPr>
+        <p:style>
+          <a:lnRef idx="2">
+            <a:schemeClr val="accent1"/>
+          </a:lnRef>
+          <a:fillRef idx="0">
+            <a:schemeClr val="accent1"/>
+          </a:fillRef>
+          <a:effectRef idx="1">
+            <a:schemeClr val="accent1"/>
+          </a:effectRef>
+          <a:fontRef idx="minor">
+            <a:schemeClr val="tx1"/>
+          </a:fontRef>
+        </p:style>
+      </p:cxnSp>
+      <p:cxnSp>
+        <p:nvCxnSpPr>
+          <p:cNvPr id="19" name="Connector 18"/>
+          <p:cNvCxnSpPr/>
+          <p:nvPr/>
+        </p:nvCxnSpPr>
+        <p:spPr>
+          <a:xfrm>
+            <a:off x="1837944" y="2395728"/>
+            <a:ext cx="2816352" cy="0"/>
+          </a:xfrm>
+          <a:prstGeom prst="line">
+            <a:avLst/>
+          </a:prstGeom>
+          <a:ln w="25400">
+            <a:solidFill>
+              <a:srgbClr val="4F46E5"/>
+            </a:solidFill>
+            <a:tailEnd type="triangle" w="med" len="med"/>
+          </a:ln>
+          <a:effectLst/>
+        </p:spPr>
+        <p:style>
+          <a:lnRef idx="2">
+            <a:schemeClr val="accent1"/>
+          </a:lnRef>
+          <a:fillRef idx="0">
+            <a:schemeClr val="accent1"/>
+          </a:fillRef>
+          <a:effectRef idx="1">
+            <a:schemeClr val="accent1"/>
+          </a:effectRef>
+          <a:fontRef idx="minor">
+            <a:schemeClr val="tx1"/>
+          </a:fontRef>
+        </p:style>
+      </p:cxnSp>
+      <p:sp>
+        <p:nvSpPr>
+          <p:cNvPr id="20" name="Rounded Rectangle 19"/>
+          <p:cNvSpPr/>
+          <p:nvPr/>
+        </p:nvSpPr>
+        <p:spPr>
+          <a:xfrm>
+            <a:off x="1920240" y="2130552"/>
+            <a:ext cx="2651760" cy="246888"/>
+          </a:xfrm>
+          <a:prstGeom prst="roundRect">
+            <a:avLst/>
+          </a:prstGeom>
+          <a:noFill/>
+          <a:ln>
+            <a:noFill/>
+          </a:ln>
+          <a:effectLst/>
+        </p:spPr>
+        <p:style>
+          <a:lnRef idx="1">
+            <a:schemeClr val="accent1"/>
+          </a:lnRef>
+          <a:fillRef idx="3">
+            <a:schemeClr val="accent1"/>
+          </a:fillRef>
+          <a:effectRef idx="2">
+            <a:schemeClr val="accent1"/>
+          </a:effectRef>
+          <a:fontRef idx="minor">
+            <a:schemeClr val="lt1"/>
+          </a:fontRef>
+        </p:style>
+        <p:txBody>
+          <a:bodyPr rtlCol="0" anchor="ctr" wrap="square" lIns="27432" rIns="27432" tIns="36576" bIns="36576"/>
+          <a:lstStyle/>
+          <a:p>
+            <a:pPr algn="ctr">
+              <a:spcBef>
+                <a:spcPts val="0"/>
+              </a:spcBef>
+              <a:spcAft>
+                <a:spcPts val="0"/>
+              </a:spcAft>
+            </a:pPr>
+            <a:r>
+              <a:rPr sz="850" b="1" i="0">
+                <a:solidFill>
+                  <a:srgbClr val="4F46E5"/>
+                </a:solidFill>
+                <a:latin typeface="Calibri"/>
+              </a:rPr>
+              <a:t>1   POST /approvals {title, …}</a:t>
+            </a:r>
+          </a:p>
+        </p:txBody>
+      </p:sp>
+      <p:cxnSp>
+        <p:nvCxnSpPr>
+          <p:cNvPr id="21" name="Connector 20"/>
+          <p:cNvCxnSpPr/>
+          <p:nvPr/>
+        </p:nvCxnSpPr>
+        <p:spPr>
+          <a:xfrm>
+            <a:off x="4764024" y="2697480"/>
+            <a:ext cx="2679191" cy="0"/>
+          </a:xfrm>
+          <a:prstGeom prst="line">
+            <a:avLst/>
+          </a:prstGeom>
+          <a:ln w="25400">
+            <a:solidFill>
+              <a:srgbClr val="4F46E5"/>
+            </a:solidFill>
+            <a:tailEnd type="triangle" w="med" len="med"/>
+          </a:ln>
+          <a:effectLst/>
+        </p:spPr>
+        <p:style>
+          <a:lnRef idx="2">
+            <a:schemeClr val="accent1"/>
+          </a:lnRef>
+          <a:fillRef idx="0">
+            <a:schemeClr val="accent1"/>
+          </a:fillRef>
+          <a:effectRef idx="1">
+            <a:schemeClr val="accent1"/>
+          </a:effectRef>
+          <a:fontRef idx="minor">
+            <a:schemeClr val="tx1"/>
+          </a:fontRef>
+        </p:style>
+      </p:cxnSp>
+      <p:sp>
+        <p:nvSpPr>
+          <p:cNvPr id="22" name="Rounded Rectangle 21"/>
+          <p:cNvSpPr/>
+          <p:nvPr/>
+        </p:nvSpPr>
+        <p:spPr>
+          <a:xfrm>
+            <a:off x="4777740" y="2432304"/>
+            <a:ext cx="2651760" cy="246888"/>
+          </a:xfrm>
+          <a:prstGeom prst="roundRect">
+            <a:avLst/>
+          </a:prstGeom>
+          <a:noFill/>
+          <a:ln>
+            <a:noFill/>
+          </a:ln>
+          <a:effectLst/>
+        </p:spPr>
+        <p:style>
+          <a:lnRef idx="1">
+            <a:schemeClr val="accent1"/>
+          </a:lnRef>
+          <a:fillRef idx="3">
+            <a:schemeClr val="accent1"/>
+          </a:fillRef>
+          <a:effectRef idx="2">
+            <a:schemeClr val="accent1"/>
+          </a:effectRef>
+          <a:fontRef idx="minor">
+            <a:schemeClr val="lt1"/>
+          </a:fontRef>
+        </p:style>
+        <p:txBody>
+          <a:bodyPr rtlCol="0" anchor="ctr" wrap="square" lIns="27432" rIns="27432" tIns="36576" bIns="36576"/>
+          <a:lstStyle/>
+          <a:p>
+            <a:pPr algn="ctr">
+              <a:spcBef>
+                <a:spcPts val="0"/>
+              </a:spcBef>
+              <a:spcAft>
+                <a:spcPts val="0"/>
+              </a:spcAft>
+            </a:pPr>
+            <a:r>
+              <a:rPr sz="850" b="1" i="0">
+                <a:solidFill>
+                  <a:srgbClr val="4F46E5"/>
+                </a:solidFill>
+                <a:latin typeface="Calibri"/>
+              </a:rPr>
+              <a:t>2   save: status = PENDING</a:t>
+            </a:r>
+          </a:p>
+        </p:txBody>
+      </p:sp>
+      <p:cxnSp>
+        <p:nvCxnSpPr>
+          <p:cNvPr id="23" name="Connector 22"/>
+          <p:cNvCxnSpPr/>
+          <p:nvPr/>
+        </p:nvCxnSpPr>
+        <p:spPr>
+          <a:xfrm flipH="1">
+            <a:off x="4764024" y="2971800"/>
+            <a:ext cx="2679191" cy="0"/>
+          </a:xfrm>
+          <a:prstGeom prst="line">
+            <a:avLst/>
+          </a:prstGeom>
+          <a:ln w="25400">
+            <a:solidFill>
+              <a:srgbClr val="64748B"/>
+            </a:solidFill>
+            <a:tailEnd type="triangle" w="med" len="med"/>
+          </a:ln>
+          <a:effectLst/>
+        </p:spPr>
+        <p:style>
+          <a:lnRef idx="2">
+            <a:schemeClr val="accent1"/>
+          </a:lnRef>
+          <a:fillRef idx="0">
+            <a:schemeClr val="accent1"/>
+          </a:fillRef>
+          <a:effectRef idx="1">
+            <a:schemeClr val="accent1"/>
+          </a:effectRef>
+          <a:fontRef idx="minor">
+            <a:schemeClr val="tx1"/>
+          </a:fontRef>
+        </p:style>
+      </p:cxnSp>
+      <p:sp>
+        <p:nvSpPr>
+          <p:cNvPr id="24" name="Rounded Rectangle 23"/>
+          <p:cNvSpPr/>
+          <p:nvPr/>
+        </p:nvSpPr>
+        <p:spPr>
+          <a:xfrm>
+            <a:off x="4777740" y="2706624"/>
+            <a:ext cx="2651760" cy="246888"/>
+          </a:xfrm>
+          <a:prstGeom prst="roundRect">
+            <a:avLst/>
+          </a:prstGeom>
+          <a:noFill/>
+          <a:ln>
+            <a:noFill/>
+          </a:ln>
+          <a:effectLst/>
+        </p:spPr>
+        <p:style>
+          <a:lnRef idx="1">
+            <a:schemeClr val="accent1"/>
+          </a:lnRef>
+          <a:fillRef idx="3">
+            <a:schemeClr val="accent1"/>
+          </a:fillRef>
+          <a:effectRef idx="2">
+            <a:schemeClr val="accent1"/>
+          </a:effectRef>
+          <a:fontRef idx="minor">
+            <a:schemeClr val="lt1"/>
+          </a:fontRef>
+        </p:style>
+        <p:txBody>
+          <a:bodyPr rtlCol="0" anchor="ctr" wrap="square" lIns="27432" rIns="27432" tIns="36576" bIns="36576"/>
+          <a:lstStyle/>
+          <a:p>
+            <a:pPr algn="ctr">
+              <a:spcBef>
+                <a:spcPts val="0"/>
+              </a:spcBef>
+              <a:spcAft>
+                <a:spcPts val="0"/>
+              </a:spcAft>
+            </a:pPr>
+            <a:r>
+              <a:rPr sz="850" b="1" i="0">
+                <a:solidFill>
+                  <a:srgbClr val="64748B"/>
+                </a:solidFill>
+                <a:latin typeface="Calibri"/>
+              </a:rPr>
+              <a:t>3   ack</a:t>
+            </a:r>
+          </a:p>
+        </p:txBody>
+      </p:sp>
+      <p:cxnSp>
+        <p:nvCxnSpPr>
+          <p:cNvPr id="25" name="Connector 24"/>
+          <p:cNvCxnSpPr/>
+          <p:nvPr/>
+        </p:nvCxnSpPr>
+        <p:spPr>
+          <a:xfrm flipH="1">
+            <a:off x="1837944" y="3246120"/>
+            <a:ext cx="2816352" cy="0"/>
+          </a:xfrm>
+          <a:prstGeom prst="line">
+            <a:avLst/>
+          </a:prstGeom>
+          <a:ln w="25400">
+            <a:solidFill>
+              <a:srgbClr val="10B981"/>
+            </a:solidFill>
+            <a:tailEnd type="triangle" w="med" len="med"/>
+          </a:ln>
+          <a:effectLst/>
+        </p:spPr>
+        <p:style>
+          <a:lnRef idx="2">
+            <a:schemeClr val="accent1"/>
+          </a:lnRef>
+          <a:fillRef idx="0">
+            <a:schemeClr val="accent1"/>
+          </a:fillRef>
+          <a:effectRef idx="1">
+            <a:schemeClr val="accent1"/>
+          </a:effectRef>
+          <a:fontRef idx="minor">
+            <a:schemeClr val="tx1"/>
+          </a:fontRef>
+        </p:style>
+      </p:cxnSp>
+      <p:sp>
+        <p:nvSpPr>
+          <p:cNvPr id="26" name="Rounded Rectangle 25"/>
+          <p:cNvSpPr/>
+          <p:nvPr/>
+        </p:nvSpPr>
+        <p:spPr>
+          <a:xfrm>
+            <a:off x="1920240" y="2980944"/>
+            <a:ext cx="2651760" cy="246888"/>
+          </a:xfrm>
+          <a:prstGeom prst="roundRect">
+            <a:avLst/>
+          </a:prstGeom>
+          <a:noFill/>
+          <a:ln>
+            <a:noFill/>
+          </a:ln>
+          <a:effectLst/>
+        </p:spPr>
+        <p:style>
+          <a:lnRef idx="1">
+            <a:schemeClr val="accent1"/>
+          </a:lnRef>
+          <a:fillRef idx="3">
+            <a:schemeClr val="accent1"/>
+          </a:fillRef>
+          <a:effectRef idx="2">
+            <a:schemeClr val="accent1"/>
+          </a:effectRef>
+          <a:fontRef idx="minor">
+            <a:schemeClr val="lt1"/>
+          </a:fontRef>
+        </p:style>
+        <p:txBody>
+          <a:bodyPr rtlCol="0" anchor="ctr" wrap="square" lIns="27432" rIns="27432" tIns="36576" bIns="36576"/>
+          <a:lstStyle/>
+          <a:p>
+            <a:pPr algn="ctr">
+              <a:spcBef>
+                <a:spcPts val="0"/>
+              </a:spcBef>
+              <a:spcAft>
+                <a:spcPts val="0"/>
+              </a:spcAft>
+            </a:pPr>
+            <a:r>
+              <a:rPr sz="850" b="1" i="0">
+                <a:solidFill>
+                  <a:srgbClr val="10B981"/>
+                </a:solidFill>
+                <a:latin typeface="Calibri"/>
+              </a:rPr>
+              <a:t>4   201 Created</a:t>
+            </a:r>
+          </a:p>
+        </p:txBody>
+      </p:sp>
+      <p:cxnSp>
+        <p:nvCxnSpPr>
+          <p:cNvPr id="27" name="Connector 26"/>
+          <p:cNvCxnSpPr/>
+          <p:nvPr/>
+        </p:nvCxnSpPr>
+        <p:spPr>
+          <a:xfrm flipH="1">
+            <a:off x="4764024" y="3547872"/>
+            <a:ext cx="5330952" cy="0"/>
+          </a:xfrm>
+          <a:prstGeom prst="line">
+            <a:avLst/>
+          </a:prstGeom>
+          <a:ln w="25400">
+            <a:solidFill>
+              <a:srgbClr val="4F46E5"/>
+            </a:solidFill>
+            <a:tailEnd type="triangle" w="med" len="med"/>
+          </a:ln>
+          <a:effectLst/>
+        </p:spPr>
+        <p:style>
+          <a:lnRef idx="2">
+            <a:schemeClr val="accent1"/>
+          </a:lnRef>
+          <a:fillRef idx="0">
+            <a:schemeClr val="accent1"/>
+          </a:fillRef>
+          <a:effectRef idx="1">
+            <a:schemeClr val="accent1"/>
+          </a:effectRef>
+          <a:fontRef idx="minor">
+            <a:schemeClr val="tx1"/>
+          </a:fontRef>
+        </p:style>
+      </p:cxnSp>
+      <p:sp>
+        <p:nvSpPr>
+          <p:cNvPr id="28" name="Rounded Rectangle 27"/>
+          <p:cNvSpPr/>
+          <p:nvPr/>
+        </p:nvSpPr>
+        <p:spPr>
+          <a:xfrm>
+            <a:off x="6103620" y="3282696"/>
+            <a:ext cx="2651760" cy="246888"/>
+          </a:xfrm>
+          <a:prstGeom prst="roundRect">
+            <a:avLst/>
+          </a:prstGeom>
+          <a:noFill/>
+          <a:ln>
+            <a:noFill/>
+          </a:ln>
+          <a:effectLst/>
+        </p:spPr>
+        <p:style>
+          <a:lnRef idx="1">
+            <a:schemeClr val="accent1"/>
+          </a:lnRef>
+          <a:fillRef idx="3">
+            <a:schemeClr val="accent1"/>
+          </a:fillRef>
+          <a:effectRef idx="2">
+            <a:schemeClr val="accent1"/>
+          </a:effectRef>
+          <a:fontRef idx="minor">
+            <a:schemeClr val="lt1"/>
+          </a:fontRef>
+        </p:style>
+        <p:txBody>
+          <a:bodyPr rtlCol="0" anchor="ctr" wrap="square" lIns="27432" rIns="27432" tIns="36576" bIns="36576"/>
+          <a:lstStyle/>
+          <a:p>
+            <a:pPr algn="ctr">
+              <a:spcBef>
+                <a:spcPts val="0"/>
+              </a:spcBef>
+              <a:spcAft>
+                <a:spcPts val="0"/>
+              </a:spcAft>
+            </a:pPr>
+            <a:r>
+              <a:rPr sz="850" b="1" i="0">
+                <a:solidFill>
+                  <a:srgbClr val="4F46E5"/>
+                </a:solidFill>
+                <a:latin typeface="Calibri"/>
+              </a:rPr>
+              <a:t>5   PUT /{id}/approve  (HOD)</a:t>
+            </a:r>
+          </a:p>
+        </p:txBody>
+      </p:sp>
+      <p:cxnSp>
+        <p:nvCxnSpPr>
+          <p:cNvPr id="29" name="Connector 28"/>
+          <p:cNvCxnSpPr/>
+          <p:nvPr/>
+        </p:nvCxnSpPr>
+        <p:spPr>
+          <a:xfrm>
+            <a:off x="4764024" y="3840480"/>
+            <a:ext cx="2679191" cy="0"/>
+          </a:xfrm>
+          <a:prstGeom prst="line">
+            <a:avLst/>
+          </a:prstGeom>
+          <a:ln w="25400">
+            <a:solidFill>
+              <a:srgbClr val="4F46E5"/>
+            </a:solidFill>
+            <a:tailEnd type="triangle" w="med" len="med"/>
+          </a:ln>
+          <a:effectLst/>
+        </p:spPr>
+        <p:style>
+          <a:lnRef idx="2">
+            <a:schemeClr val="accent1"/>
+          </a:lnRef>
+          <a:fillRef idx="0">
+            <a:schemeClr val="accent1"/>
+          </a:fillRef>
+          <a:effectRef idx="1">
+            <a:schemeClr val="accent1"/>
+          </a:effectRef>
+          <a:fontRef idx="minor">
+            <a:schemeClr val="tx1"/>
+          </a:fontRef>
+        </p:style>
+      </p:cxnSp>
+      <p:sp>
+        <p:nvSpPr>
+          <p:cNvPr id="30" name="Rounded Rectangle 29"/>
+          <p:cNvSpPr/>
+          <p:nvPr/>
+        </p:nvSpPr>
+        <p:spPr>
+          <a:xfrm>
+            <a:off x="4777740" y="3575304"/>
+            <a:ext cx="2651760" cy="246888"/>
+          </a:xfrm>
+          <a:prstGeom prst="roundRect">
+            <a:avLst/>
+          </a:prstGeom>
+          <a:noFill/>
+          <a:ln>
+            <a:noFill/>
+          </a:ln>
+          <a:effectLst/>
+        </p:spPr>
+        <p:style>
+          <a:lnRef idx="1">
+            <a:schemeClr val="accent1"/>
+          </a:lnRef>
+          <a:fillRef idx="3">
+            <a:schemeClr val="accent1"/>
+          </a:fillRef>
+          <a:effectRef idx="2">
+            <a:schemeClr val="accent1"/>
+          </a:effectRef>
+          <a:fontRef idx="minor">
+            <a:schemeClr val="lt1"/>
+          </a:fontRef>
+        </p:style>
+        <p:txBody>
+          <a:bodyPr rtlCol="0" anchor="ctr" wrap="square" lIns="27432" rIns="27432" tIns="36576" bIns="36576"/>
+          <a:lstStyle/>
+          <a:p>
+            <a:pPr algn="ctr">
+              <a:spcBef>
+                <a:spcPts val="0"/>
+              </a:spcBef>
+              <a:spcAft>
+                <a:spcPts val="0"/>
+              </a:spcAft>
+            </a:pPr>
+            <a:r>
+              <a:rPr sz="850" b="1" i="0">
+                <a:solidFill>
+                  <a:srgbClr val="4F46E5"/>
+                </a:solidFill>
+                <a:latin typeface="Calibri"/>
+              </a:rPr>
+              <a:t>6   stage = APPROVED_HOD</a:t>
+            </a:r>
+          </a:p>
+        </p:txBody>
+      </p:sp>
+      <p:cxnSp>
+        <p:nvCxnSpPr>
+          <p:cNvPr id="31" name="Connector 30"/>
+          <p:cNvCxnSpPr/>
+          <p:nvPr/>
+        </p:nvCxnSpPr>
+        <p:spPr>
+          <a:xfrm>
+            <a:off x="4764024" y="4133087"/>
+            <a:ext cx="5330952" cy="0"/>
+          </a:xfrm>
+          <a:prstGeom prst="line">
+            <a:avLst/>
+          </a:prstGeom>
+          <a:ln w="25400">
+            <a:solidFill>
+              <a:srgbClr val="10B981"/>
+            </a:solidFill>
+            <a:tailEnd type="triangle" w="med" len="med"/>
+          </a:ln>
+          <a:effectLst/>
+        </p:spPr>
+        <p:style>
+          <a:lnRef idx="2">
+            <a:schemeClr val="accent1"/>
+          </a:lnRef>
+          <a:fillRef idx="0">
+            <a:schemeClr val="accent1"/>
+          </a:fillRef>
+          <a:effectRef idx="1">
+            <a:schemeClr val="accent1"/>
+          </a:effectRef>
+          <a:fontRef idx="minor">
+            <a:schemeClr val="tx1"/>
+          </a:fontRef>
+        </p:style>
+      </p:cxnSp>
+      <p:sp>
+        <p:nvSpPr>
+          <p:cNvPr id="32" name="Rounded Rectangle 31"/>
+          <p:cNvSpPr/>
+          <p:nvPr/>
+        </p:nvSpPr>
+        <p:spPr>
+          <a:xfrm>
+            <a:off x="6103620" y="3867911"/>
+            <a:ext cx="2651760" cy="246888"/>
+          </a:xfrm>
+          <a:prstGeom prst="roundRect">
+            <a:avLst/>
+          </a:prstGeom>
+          <a:noFill/>
+          <a:ln>
+            <a:noFill/>
+          </a:ln>
+          <a:effectLst/>
+        </p:spPr>
+        <p:style>
+          <a:lnRef idx="1">
+            <a:schemeClr val="accent1"/>
+          </a:lnRef>
+          <a:fillRef idx="3">
+            <a:schemeClr val="accent1"/>
+          </a:fillRef>
+          <a:effectRef idx="2">
+            <a:schemeClr val="accent1"/>
+          </a:effectRef>
+          <a:fontRef idx="minor">
+            <a:schemeClr val="lt1"/>
+          </a:fontRef>
+        </p:style>
+        <p:txBody>
+          <a:bodyPr rtlCol="0" anchor="ctr" wrap="square" lIns="27432" rIns="27432" tIns="36576" bIns="36576"/>
+          <a:lstStyle/>
+          <a:p>
+            <a:pPr algn="ctr">
+              <a:spcBef>
+                <a:spcPts val="0"/>
+              </a:spcBef>
+              <a:spcAft>
+                <a:spcPts val="0"/>
+              </a:spcAft>
+            </a:pPr>
+            <a:r>
+              <a:rPr sz="850" b="1" i="0">
+                <a:solidFill>
+                  <a:srgbClr val="10B981"/>
+                </a:solidFill>
+                <a:latin typeface="Calibri"/>
+              </a:rPr>
+              <a:t>7   notify: HOD ✓, faculty ✓</a:t>
+            </a:r>
+          </a:p>
+        </p:txBody>
+      </p:sp>
+      <p:cxnSp>
+        <p:nvCxnSpPr>
+          <p:cNvPr id="33" name="Connector 32"/>
+          <p:cNvCxnSpPr/>
+          <p:nvPr/>
+        </p:nvCxnSpPr>
+        <p:spPr>
+          <a:xfrm flipH="1">
+            <a:off x="4764024" y="4425696"/>
+            <a:ext cx="5330952" cy="0"/>
+          </a:xfrm>
+          <a:prstGeom prst="line">
+            <a:avLst/>
+          </a:prstGeom>
+          <a:ln w="25400">
+            <a:solidFill>
+              <a:srgbClr val="4F46E5"/>
+            </a:solidFill>
+            <a:tailEnd type="triangle" w="med" len="med"/>
+          </a:ln>
+          <a:effectLst/>
+        </p:spPr>
+        <p:style>
+          <a:lnRef idx="2">
+            <a:schemeClr val="accent1"/>
+          </a:lnRef>
+          <a:fillRef idx="0">
+            <a:schemeClr val="accent1"/>
+          </a:fillRef>
+          <a:effectRef idx="1">
+            <a:schemeClr val="accent1"/>
+          </a:effectRef>
+          <a:fontRef idx="minor">
+            <a:schemeClr val="tx1"/>
+          </a:fontRef>
+        </p:style>
+      </p:cxnSp>
+      <p:sp>
+        <p:nvSpPr>
+          <p:cNvPr id="34" name="Rounded Rectangle 33"/>
+          <p:cNvSpPr/>
+          <p:nvPr/>
+        </p:nvSpPr>
+        <p:spPr>
+          <a:xfrm>
+            <a:off x="6103620" y="4160520"/>
+            <a:ext cx="2651760" cy="246888"/>
+          </a:xfrm>
+          <a:prstGeom prst="roundRect">
+            <a:avLst/>
+          </a:prstGeom>
+          <a:noFill/>
+          <a:ln>
+            <a:noFill/>
+          </a:ln>
+          <a:effectLst/>
+        </p:spPr>
+        <p:style>
+          <a:lnRef idx="1">
+            <a:schemeClr val="accent1"/>
+          </a:lnRef>
+          <a:fillRef idx="3">
+            <a:schemeClr val="accent1"/>
+          </a:fillRef>
+          <a:effectRef idx="2">
+            <a:schemeClr val="accent1"/>
+          </a:effectRef>
+          <a:fontRef idx="minor">
+            <a:schemeClr val="lt1"/>
+          </a:fontRef>
+        </p:style>
+        <p:txBody>
+          <a:bodyPr rtlCol="0" anchor="ctr" wrap="square" lIns="27432" rIns="27432" tIns="36576" bIns="36576"/>
+          <a:lstStyle/>
+          <a:p>
+            <a:pPr algn="ctr">
+              <a:spcBef>
+                <a:spcPts val="0"/>
+              </a:spcBef>
+              <a:spcAft>
+                <a:spcPts val="0"/>
+              </a:spcAft>
+            </a:pPr>
+            <a:r>
+              <a:rPr sz="850" b="1" i="0">
+                <a:solidFill>
+                  <a:srgbClr val="4F46E5"/>
+                </a:solidFill>
+                <a:latin typeface="Calibri"/>
+              </a:rPr>
+              <a:t>8   PUT /{id}/approve  (Principal)</a:t>
+            </a:r>
+          </a:p>
+        </p:txBody>
+      </p:sp>
+      <p:cxnSp>
+        <p:nvCxnSpPr>
+          <p:cNvPr id="35" name="Connector 34"/>
+          <p:cNvCxnSpPr/>
+          <p:nvPr/>
+        </p:nvCxnSpPr>
+        <p:spPr>
+          <a:xfrm>
+            <a:off x="4764024" y="4700016"/>
+            <a:ext cx="2679191" cy="0"/>
+          </a:xfrm>
+          <a:prstGeom prst="line">
+            <a:avLst/>
+          </a:prstGeom>
+          <a:ln w="25400">
+            <a:solidFill>
+              <a:srgbClr val="4F46E5"/>
+            </a:solidFill>
+            <a:tailEnd type="triangle" w="med" len="med"/>
+          </a:ln>
+          <a:effectLst/>
+        </p:spPr>
+        <p:style>
+          <a:lnRef idx="2">
+            <a:schemeClr val="accent1"/>
+          </a:lnRef>
+          <a:fillRef idx="0">
+            <a:schemeClr val="accent1"/>
+          </a:fillRef>
+          <a:effectRef idx="1">
+            <a:schemeClr val="accent1"/>
+          </a:effectRef>
+          <a:fontRef idx="minor">
+            <a:schemeClr val="tx1"/>
+          </a:fontRef>
+        </p:style>
+      </p:cxnSp>
+      <p:sp>
+        <p:nvSpPr>
+          <p:cNvPr id="36" name="Rounded Rectangle 35"/>
+          <p:cNvSpPr/>
+          <p:nvPr/>
+        </p:nvSpPr>
+        <p:spPr>
+          <a:xfrm>
+            <a:off x="4777740" y="4434840"/>
+            <a:ext cx="2651760" cy="246888"/>
+          </a:xfrm>
+          <a:prstGeom prst="roundRect">
+            <a:avLst/>
+          </a:prstGeom>
+          <a:noFill/>
+          <a:ln>
+            <a:noFill/>
+          </a:ln>
+          <a:effectLst/>
+        </p:spPr>
+        <p:style>
+          <a:lnRef idx="1">
+            <a:schemeClr val="accent1"/>
+          </a:lnRef>
+          <a:fillRef idx="3">
+            <a:schemeClr val="accent1"/>
+          </a:fillRef>
+          <a:effectRef idx="2">
+            <a:schemeClr val="accent1"/>
+          </a:effectRef>
+          <a:fontRef idx="minor">
+            <a:schemeClr val="lt1"/>
+          </a:fontRef>
+        </p:style>
+        <p:txBody>
+          <a:bodyPr rtlCol="0" anchor="ctr" wrap="square" lIns="27432" rIns="27432" tIns="36576" bIns="36576"/>
+          <a:lstStyle/>
+          <a:p>
+            <a:pPr algn="ctr">
+              <a:spcBef>
+                <a:spcPts val="0"/>
+              </a:spcBef>
+              <a:spcAft>
+                <a:spcPts val="0"/>
+              </a:spcAft>
+            </a:pPr>
+            <a:r>
+              <a:rPr sz="850" b="1" i="0">
+                <a:solidFill>
+                  <a:srgbClr val="4F46E5"/>
+                </a:solidFill>
+                <a:latin typeface="Calibri"/>
+              </a:rPr>
+              <a:t>9   status = APPROVED_PRINCIPAL</a:t>
+            </a:r>
+          </a:p>
+        </p:txBody>
+      </p:sp>
+      <p:cxnSp>
+        <p:nvCxnSpPr>
+          <p:cNvPr id="37" name="Connector 36"/>
+          <p:cNvCxnSpPr/>
+          <p:nvPr/>
+        </p:nvCxnSpPr>
+        <p:spPr>
+          <a:xfrm flipH="1">
+            <a:off x="1837944" y="4992624"/>
+            <a:ext cx="2816352" cy="0"/>
+          </a:xfrm>
+          <a:prstGeom prst="line">
+            <a:avLst/>
+          </a:prstGeom>
+          <a:ln w="25400">
+            <a:solidFill>
+              <a:srgbClr val="10B981"/>
+            </a:solidFill>
+            <a:tailEnd type="triangle" w="med" len="med"/>
+          </a:ln>
+          <a:effectLst/>
+        </p:spPr>
+        <p:style>
+          <a:lnRef idx="2">
+            <a:schemeClr val="accent1"/>
+          </a:lnRef>
+          <a:fillRef idx="0">
+            <a:schemeClr val="accent1"/>
+          </a:fillRef>
+          <a:effectRef idx="1">
+            <a:schemeClr val="accent1"/>
+          </a:effectRef>
+          <a:fontRef idx="minor">
+            <a:schemeClr val="tx1"/>
+          </a:fontRef>
+        </p:style>
+      </p:cxnSp>
+      <p:sp>
+        <p:nvSpPr>
+          <p:cNvPr id="38" name="Rounded Rectangle 37"/>
+          <p:cNvSpPr/>
+          <p:nvPr/>
+        </p:nvSpPr>
+        <p:spPr>
+          <a:xfrm>
+            <a:off x="1920240" y="4727448"/>
+            <a:ext cx="2651760" cy="246888"/>
+          </a:xfrm>
+          <a:prstGeom prst="roundRect">
+            <a:avLst/>
+          </a:prstGeom>
+          <a:noFill/>
+          <a:ln>
+            <a:noFill/>
+          </a:ln>
+          <a:effectLst/>
+        </p:spPr>
+        <p:style>
+          <a:lnRef idx="1">
+            <a:schemeClr val="accent1"/>
+          </a:lnRef>
+          <a:fillRef idx="3">
+            <a:schemeClr val="accent1"/>
+          </a:fillRef>
+          <a:effectRef idx="2">
+            <a:schemeClr val="accent1"/>
+          </a:effectRef>
+          <a:fontRef idx="minor">
+            <a:schemeClr val="lt1"/>
+          </a:fontRef>
+        </p:style>
+        <p:txBody>
+          <a:bodyPr rtlCol="0" anchor="ctr" wrap="square" lIns="27432" rIns="27432" tIns="36576" bIns="36576"/>
+          <a:lstStyle/>
+          <a:p>
+            <a:pPr algn="ctr">
+              <a:spcBef>
+                <a:spcPts val="0"/>
+              </a:spcBef>
+              <a:spcAft>
+                <a:spcPts val="0"/>
+              </a:spcAft>
+            </a:pPr>
+            <a:r>
+              <a:rPr sz="850" b="1" i="0">
+                <a:solidFill>
+                  <a:srgbClr val="10B981"/>
+                </a:solidFill>
+                <a:latin typeface="Calibri"/>
+              </a:rPr>
+              <a:t>10   notify all + activity log</a:t>
+            </a:r>
+          </a:p>
+        </p:txBody>
+      </p:sp>
+      <p:sp>
+        <p:nvSpPr>
+          <p:cNvPr id="39" name="Rounded Rectangle 38"/>
+          <p:cNvSpPr/>
+          <p:nvPr/>
+        </p:nvSpPr>
+        <p:spPr>
+          <a:xfrm>
+            <a:off x="411480" y="5760720"/>
+            <a:ext cx="11365992" cy="411480"/>
+          </a:xfrm>
+          <a:prstGeom prst="roundRect">
+            <a:avLst/>
+          </a:prstGeom>
+          <a:solidFill>
+            <a:srgbClr val="EEF2FF"/>
+          </a:solidFill>
+          <a:ln>
+            <a:noFill/>
+          </a:ln>
+          <a:effectLst/>
+        </p:spPr>
+        <p:style>
+          <a:lnRef idx="1">
+            <a:schemeClr val="accent1"/>
+          </a:lnRef>
+          <a:fillRef idx="3">
+            <a:schemeClr val="accent1"/>
+          </a:fillRef>
+          <a:effectRef idx="2">
+            <a:schemeClr val="accent1"/>
+          </a:effectRef>
+          <a:fontRef idx="minor">
+            <a:schemeClr val="lt1"/>
+          </a:fontRef>
+        </p:style>
+        <p:txBody>
+          <a:bodyPr rtlCol="0" anchor="ctr" wrap="square" lIns="27432" rIns="27432" tIns="36576" bIns="36576"/>
+          <a:lstStyle/>
+          <a:p>
+            <a:pPr algn="ctr">
+              <a:spcBef>
+                <a:spcPts val="0"/>
+              </a:spcBef>
+              <a:spcAft>
+                <a:spcPts val="0"/>
+              </a:spcAft>
+            </a:pPr>
+            <a:r>
+              <a:rPr sz="1000" b="1" i="0">
+                <a:solidFill>
+                  <a:srgbClr val="0B1E3B"/>
+                </a:solidFill>
+                <a:latin typeface="Calibri"/>
+              </a:rPr>
+              <a:t>Synchronous REST/JSON  •  every mutating call carries JWT + role check  •  failures return 4xx with no state change</a:t>
+            </a:r>
+          </a:p>
+        </p:txBody>
+      </p:sp>
+    </p:spTree>
+  </p:cSld>
+  <p:clrMapOvr>
+    <a:masterClrMapping/>
+  </p:clrMapOvr>
+</p:sld>
+</file>
+
+<file path=ppt/slides/slide27.xml><?xml version="1.0" encoding="utf-8"?>
+<p:sld xmlns:a="http://schemas.openxmlformats.org/drawingml/2006/main" xmlns:p="http://schemas.openxmlformats.org/presentationml/2006/main" xmlns:r="http://schemas.openxmlformats.org/officeDocument/2006/relationships">
+  <p:cSld>
+    <p:bg>
+      <p:bgPr>
+        <a:solidFill>
+          <a:srgbClr val="F3F6FC"/>
+        </a:solidFill>
+        <a:effectLst/>
+      </p:bgPr>
+    </p:bg>
+    <p:spTree>
+      <p:nvGrpSpPr>
+        <p:cNvPr id="1" name=""/>
+        <p:cNvGrpSpPr/>
+        <p:nvPr/>
+      </p:nvGrpSpPr>
+      <p:grpSpPr/>
+      <p:sp>
+        <p:nvSpPr>
+          <p:cNvPr id="2" name="Rectangle 1"/>
+          <p:cNvSpPr/>
+          <p:nvPr/>
+        </p:nvSpPr>
+        <p:spPr>
+          <a:xfrm>
+            <a:off x="0" y="0"/>
+            <a:ext cx="12191695" cy="1115568"/>
+          </a:xfrm>
+          <a:prstGeom prst="rect">
+            <a:avLst/>
+          </a:prstGeom>
+          <a:solidFill>
+            <a:srgbClr val="0B1E3B"/>
+          </a:solidFill>
+          <a:ln>
+            <a:noFill/>
+          </a:ln>
+          <a:effectLst/>
+        </p:spPr>
+        <p:style>
+          <a:lnRef idx="1">
+            <a:schemeClr val="accent1"/>
+          </a:lnRef>
+          <a:fillRef idx="3">
+            <a:schemeClr val="accent1"/>
+          </a:fillRef>
+          <a:effectRef idx="2">
+            <a:schemeClr val="accent1"/>
+          </a:effectRef>
+          <a:fontRef idx="minor">
+            <a:schemeClr val="lt1"/>
+          </a:fontRef>
+        </p:style>
+        <p:txBody>
+          <a:bodyPr rtlCol="0" anchor="ctr"/>
+          <a:lstStyle/>
+          <a:p>
+            <a:pPr algn="ctr"/>
+          </a:p>
+        </p:txBody>
+      </p:sp>
+      <p:sp>
+        <p:nvSpPr>
+          <p:cNvPr id="3" name="Rectangle 2"/>
+          <p:cNvSpPr/>
+          <p:nvPr/>
+        </p:nvSpPr>
+        <p:spPr>
+          <a:xfrm>
+            <a:off x="0" y="1115568"/>
+            <a:ext cx="12191695" cy="41148"/>
+          </a:xfrm>
+          <a:prstGeom prst="rect">
+            <a:avLst/>
+          </a:prstGeom>
+          <a:solidFill>
+            <a:srgbClr val="F59E0B"/>
+          </a:solidFill>
+          <a:ln>
+            <a:noFill/>
+          </a:ln>
+          <a:effectLst/>
+        </p:spPr>
+        <p:style>
+          <a:lnRef idx="1">
+            <a:schemeClr val="accent1"/>
+          </a:lnRef>
+          <a:fillRef idx="3">
+            <a:schemeClr val="accent1"/>
+          </a:fillRef>
+          <a:effectRef idx="2">
+            <a:schemeClr val="accent1"/>
+          </a:effectRef>
+          <a:fontRef idx="minor">
+            <a:schemeClr val="lt1"/>
+          </a:fontRef>
+        </p:style>
+        <p:txBody>
+          <a:bodyPr rtlCol="0" anchor="ctr"/>
+          <a:lstStyle/>
+          <a:p>
+            <a:pPr algn="ctr"/>
+          </a:p>
+        </p:txBody>
+      </p:sp>
+      <p:sp>
+        <p:nvSpPr>
+          <p:cNvPr id="4" name="Rectangle 3"/>
+          <p:cNvSpPr/>
+          <p:nvPr/>
+        </p:nvSpPr>
+        <p:spPr>
+          <a:xfrm>
+            <a:off x="411480" y="109728"/>
+            <a:ext cx="10058400" cy="914400"/>
+          </a:xfrm>
+          <a:prstGeom prst="rect">
+            <a:avLst/>
+          </a:prstGeom>
+          <a:noFill/>
+          <a:ln>
+            <a:noFill/>
+          </a:ln>
+          <a:effectLst/>
+        </p:spPr>
+        <p:style>
+          <a:lnRef idx="1">
+            <a:schemeClr val="accent1"/>
+          </a:lnRef>
+          <a:fillRef idx="3">
+            <a:schemeClr val="accent1"/>
+          </a:fillRef>
+          <a:effectRef idx="2">
+            <a:schemeClr val="accent1"/>
+          </a:effectRef>
+          <a:fontRef idx="minor">
+            <a:schemeClr val="lt1"/>
+          </a:fontRef>
+        </p:style>
+        <p:txBody>
+          <a:bodyPr rtlCol="0" anchor="t" wrap="square" lIns="0" rIns="0" tIns="36576" bIns="36576"/>
+          <a:lstStyle/>
+          <a:p>
+            <a:pPr algn="l">
+              <a:spcBef>
+                <a:spcPts val="0"/>
+              </a:spcBef>
+              <a:spcAft>
+                <a:spcPts val="100"/>
+              </a:spcAft>
+            </a:pPr>
+            <a:r>
+              <a:rPr sz="1050" b="1" i="0">
+                <a:solidFill>
+                  <a:srgbClr val="06B6D4"/>
+                </a:solidFill>
+                <a:latin typeface="Calibri"/>
+              </a:rPr>
+              <a:t>APPENDIX · BACKUP FOR Q&amp;A</a:t>
+            </a:r>
+          </a:p>
+          <a:p>
+            <a:pPr algn="l">
+              <a:spcBef>
+                <a:spcPts val="0"/>
+              </a:spcBef>
+              <a:spcAft>
+                <a:spcPts val="0"/>
+              </a:spcAft>
+            </a:pPr>
+            <a:r>
+              <a:rPr sz="2500" b="1" i="0">
+                <a:solidFill>
+                  <a:srgbClr val="FFFFFF"/>
+                </a:solidFill>
+                <a:latin typeface="Calibri"/>
+              </a:rPr>
+              <a:t>Appendix B — Task Lifecycle &amp; Risk Formula</a:t>
+            </a:r>
+          </a:p>
+        </p:txBody>
+      </p:sp>
+      <p:sp>
+        <p:nvSpPr>
+          <p:cNvPr id="5" name="Rounded Rectangle 4"/>
+          <p:cNvSpPr/>
+          <p:nvPr/>
+        </p:nvSpPr>
+        <p:spPr>
+          <a:xfrm>
+            <a:off x="11018520" y="292608"/>
+            <a:ext cx="777240" cy="502920"/>
+          </a:xfrm>
+          <a:prstGeom prst="roundRect">
+            <a:avLst/>
+          </a:prstGeom>
+          <a:solidFill>
+            <a:srgbClr val="143363"/>
+          </a:solidFill>
+          <a:ln w="15875">
+            <a:solidFill>
+              <a:srgbClr val="06B6D4"/>
+            </a:solidFill>
+          </a:ln>
+          <a:effectLst/>
+        </p:spPr>
+        <p:style>
+          <a:lnRef idx="1">
+            <a:schemeClr val="accent1"/>
+          </a:lnRef>
+          <a:fillRef idx="3">
+            <a:schemeClr val="accent1"/>
+          </a:fillRef>
+          <a:effectRef idx="2">
+            <a:schemeClr val="accent1"/>
+          </a:effectRef>
+          <a:fontRef idx="minor">
+            <a:schemeClr val="lt1"/>
+          </a:fontRef>
+        </p:style>
+        <p:txBody>
+          <a:bodyPr rtlCol="0" anchor="ctr" wrap="square" lIns="18288" rIns="18288" tIns="36576" bIns="36576"/>
+          <a:lstStyle/>
+          <a:p>
+            <a:pPr algn="ctr">
+              <a:spcBef>
+                <a:spcPts val="0"/>
+              </a:spcBef>
+              <a:spcAft>
+                <a:spcPts val="0"/>
+              </a:spcAft>
+            </a:pPr>
+            <a:r>
+              <a:rPr sz="1500" b="1" i="0">
+                <a:solidFill>
+                  <a:srgbClr val="FFFFFF"/>
+                </a:solidFill>
+                <a:latin typeface="Calibri"/>
+              </a:rPr>
+              <a:t>27</a:t>
+            </a:r>
+          </a:p>
+        </p:txBody>
+      </p:sp>
+      <p:sp>
+        <p:nvSpPr>
+          <p:cNvPr id="6" name="Rectangle 5"/>
+          <p:cNvSpPr/>
+          <p:nvPr/>
+        </p:nvSpPr>
+        <p:spPr>
+          <a:xfrm>
+            <a:off x="411480" y="6455664"/>
+            <a:ext cx="11365992" cy="320040"/>
+          </a:xfrm>
+          <a:prstGeom prst="rect">
+            <a:avLst/>
+          </a:prstGeom>
+          <a:noFill/>
+          <a:ln>
+            <a:noFill/>
+          </a:ln>
+          <a:effectLst/>
+        </p:spPr>
+        <p:style>
+          <a:lnRef idx="1">
+            <a:schemeClr val="accent1"/>
+          </a:lnRef>
+          <a:fillRef idx="3">
+            <a:schemeClr val="accent1"/>
+          </a:fillRef>
+          <a:effectRef idx="2">
+            <a:schemeClr val="accent1"/>
+          </a:effectRef>
+          <a:fontRef idx="minor">
+            <a:schemeClr val="lt1"/>
+          </a:fontRef>
+        </p:style>
+        <p:txBody>
+          <a:bodyPr rtlCol="0" anchor="t" wrap="square" lIns="0" rIns="0" tIns="36576" bIns="36576"/>
+          <a:lstStyle/>
+          <a:p>
+            <a:pPr algn="ctr">
+              <a:spcAft>
+                <a:spcPts val="0"/>
+              </a:spcAft>
+            </a:pPr>
+            <a:r>
+              <a:rPr sz="850" b="0">
+                <a:solidFill>
+                  <a:srgbClr val="64748B"/>
+                </a:solidFill>
+                <a:latin typeface="Calibri"/>
+              </a:rPr>
+              <a:t>HieraSync AI  •  Review Seminar – I      </a:t>
+            </a:r>
+            <a:r>
+              <a:rPr sz="850" b="0">
+                <a:solidFill>
+                  <a:srgbClr val="64748B"/>
+                </a:solidFill>
+                <a:latin typeface="Calibri"/>
+              </a:rPr>
+              <a:t>CSE (AI &amp; ML), SBJIT Nagpur</a:t>
+            </a:r>
+          </a:p>
+        </p:txBody>
+      </p:sp>
+      <p:sp>
+        <p:nvSpPr>
+          <p:cNvPr id="7" name="Rounded Rectangle 6"/>
+          <p:cNvSpPr/>
+          <p:nvPr/>
+        </p:nvSpPr>
+        <p:spPr>
+          <a:xfrm>
+            <a:off x="548640" y="1463040"/>
+            <a:ext cx="2377440" cy="640080"/>
+          </a:xfrm>
+          <a:prstGeom prst="roundRect">
+            <a:avLst/>
+          </a:prstGeom>
+          <a:solidFill>
+            <a:srgbClr val="FFFFFF"/>
+          </a:solidFill>
+          <a:ln w="19050">
+            <a:solidFill>
+              <a:srgbClr val="4F46E5"/>
+            </a:solidFill>
+          </a:ln>
+          <a:effectLst/>
+        </p:spPr>
+        <p:style>
+          <a:lnRef idx="1">
+            <a:schemeClr val="accent1"/>
+          </a:lnRef>
+          <a:fillRef idx="3">
+            <a:schemeClr val="accent1"/>
+          </a:fillRef>
+          <a:effectRef idx="2">
+            <a:schemeClr val="accent1"/>
+          </a:effectRef>
+          <a:fontRef idx="minor">
+            <a:schemeClr val="lt1"/>
+          </a:fontRef>
+        </p:style>
+        <p:txBody>
+          <a:bodyPr rtlCol="0" anchor="ctr" wrap="square" lIns="45720" rIns="45720" tIns="36576" bIns="36576"/>
+          <a:lstStyle/>
+          <a:p>
+            <a:pPr algn="ctr">
+              <a:spcBef>
+                <a:spcPts val="0"/>
+              </a:spcBef>
+              <a:spcAft>
+                <a:spcPts val="0"/>
+              </a:spcAft>
+            </a:pPr>
+            <a:r>
+              <a:rPr sz="1200" b="1" i="0">
+                <a:solidFill>
+                  <a:srgbClr val="0B1E3B"/>
+                </a:solidFill>
+                <a:latin typeface="Calibri"/>
+              </a:rPr>
+              <a:t>TODO</a:t>
+            </a:r>
+          </a:p>
+        </p:txBody>
+      </p:sp>
+      <p:cxnSp>
+        <p:nvCxnSpPr>
+          <p:cNvPr id="8" name="Connector 7"/>
+          <p:cNvCxnSpPr/>
+          <p:nvPr/>
+        </p:nvCxnSpPr>
+        <p:spPr>
+          <a:xfrm>
+            <a:off x="1737360" y="2103120"/>
+            <a:ext cx="0" cy="365760"/>
+          </a:xfrm>
+          <a:prstGeom prst="line">
+            <a:avLst/>
+          </a:prstGeom>
+          <a:ln w="25400">
+            <a:solidFill>
+              <a:srgbClr val="4F46E5"/>
+            </a:solidFill>
+            <a:tailEnd type="triangle" w="med" len="med"/>
+          </a:ln>
+          <a:effectLst/>
+        </p:spPr>
+        <p:style>
+          <a:lnRef idx="2">
+            <a:schemeClr val="accent1"/>
+          </a:lnRef>
+          <a:fillRef idx="0">
+            <a:schemeClr val="accent1"/>
+          </a:fillRef>
+          <a:effectRef idx="1">
+            <a:schemeClr val="accent1"/>
+          </a:effectRef>
+          <a:fontRef idx="minor">
+            <a:schemeClr val="tx1"/>
+          </a:fontRef>
+        </p:style>
+      </p:cxnSp>
+      <p:sp>
+        <p:nvSpPr>
+          <p:cNvPr id="9" name="Rounded Rectangle 8"/>
+          <p:cNvSpPr/>
+          <p:nvPr/>
+        </p:nvSpPr>
+        <p:spPr>
+          <a:xfrm>
+            <a:off x="548640" y="2468880"/>
+            <a:ext cx="2377440" cy="640080"/>
+          </a:xfrm>
+          <a:prstGeom prst="roundRect">
+            <a:avLst/>
+          </a:prstGeom>
+          <a:solidFill>
+            <a:srgbClr val="FFFFFF"/>
+          </a:solidFill>
+          <a:ln w="19050">
+            <a:solidFill>
+              <a:srgbClr val="4F46E5"/>
+            </a:solidFill>
+          </a:ln>
+          <a:effectLst/>
+        </p:spPr>
+        <p:style>
+          <a:lnRef idx="1">
+            <a:schemeClr val="accent1"/>
+          </a:lnRef>
+          <a:fillRef idx="3">
+            <a:schemeClr val="accent1"/>
+          </a:fillRef>
+          <a:effectRef idx="2">
+            <a:schemeClr val="accent1"/>
+          </a:effectRef>
+          <a:fontRef idx="minor">
+            <a:schemeClr val="lt1"/>
+          </a:fontRef>
+        </p:style>
+        <p:txBody>
+          <a:bodyPr rtlCol="0" anchor="ctr" wrap="square" lIns="45720" rIns="45720" tIns="36576" bIns="36576"/>
+          <a:lstStyle/>
+          <a:p>
+            <a:pPr algn="ctr">
+              <a:spcBef>
+                <a:spcPts val="0"/>
+              </a:spcBef>
+              <a:spcAft>
+                <a:spcPts val="0"/>
+              </a:spcAft>
+            </a:pPr>
+            <a:r>
+              <a:rPr sz="1200" b="1" i="0">
+                <a:solidFill>
+                  <a:srgbClr val="0B1E3B"/>
+                </a:solidFill>
+                <a:latin typeface="Calibri"/>
+              </a:rPr>
+              <a:t>IN_PROGRESS</a:t>
+            </a:r>
+          </a:p>
+        </p:txBody>
+      </p:sp>
+      <p:cxnSp>
+        <p:nvCxnSpPr>
+          <p:cNvPr id="10" name="Connector 9"/>
+          <p:cNvCxnSpPr/>
+          <p:nvPr/>
+        </p:nvCxnSpPr>
+        <p:spPr>
+          <a:xfrm>
+            <a:off x="1737360" y="3108960"/>
+            <a:ext cx="0" cy="365760"/>
+          </a:xfrm>
+          <a:prstGeom prst="line">
+            <a:avLst/>
+          </a:prstGeom>
+          <a:ln w="25400">
+            <a:solidFill>
+              <a:srgbClr val="4F46E5"/>
+            </a:solidFill>
+            <a:tailEnd type="triangle" w="med" len="med"/>
+          </a:ln>
+          <a:effectLst/>
+        </p:spPr>
+        <p:style>
+          <a:lnRef idx="2">
+            <a:schemeClr val="accent1"/>
+          </a:lnRef>
+          <a:fillRef idx="0">
+            <a:schemeClr val="accent1"/>
+          </a:fillRef>
+          <a:effectRef idx="1">
+            <a:schemeClr val="accent1"/>
+          </a:effectRef>
+          <a:fontRef idx="minor">
+            <a:schemeClr val="tx1"/>
+          </a:fontRef>
+        </p:style>
+      </p:cxnSp>
+      <p:sp>
+        <p:nvSpPr>
+          <p:cNvPr id="11" name="Rounded Rectangle 10"/>
+          <p:cNvSpPr/>
+          <p:nvPr/>
+        </p:nvSpPr>
+        <p:spPr>
+          <a:xfrm>
+            <a:off x="548640" y="3474720"/>
+            <a:ext cx="2377440" cy="640080"/>
+          </a:xfrm>
+          <a:prstGeom prst="roundRect">
+            <a:avLst/>
+          </a:prstGeom>
+          <a:solidFill>
+            <a:srgbClr val="FFFFFF"/>
+          </a:solidFill>
+          <a:ln w="19050">
+            <a:solidFill>
+              <a:srgbClr val="4F46E5"/>
+            </a:solidFill>
+          </a:ln>
+          <a:effectLst/>
+        </p:spPr>
+        <p:style>
+          <a:lnRef idx="1">
+            <a:schemeClr val="accent1"/>
+          </a:lnRef>
+          <a:fillRef idx="3">
+            <a:schemeClr val="accent1"/>
+          </a:fillRef>
+          <a:effectRef idx="2">
+            <a:schemeClr val="accent1"/>
+          </a:effectRef>
+          <a:fontRef idx="minor">
+            <a:schemeClr val="lt1"/>
+          </a:fontRef>
+        </p:style>
+        <p:txBody>
+          <a:bodyPr rtlCol="0" anchor="ctr" wrap="square" lIns="45720" rIns="45720" tIns="36576" bIns="36576"/>
+          <a:lstStyle/>
+          <a:p>
+            <a:pPr algn="ctr">
+              <a:spcBef>
+                <a:spcPts val="0"/>
+              </a:spcBef>
+              <a:spcAft>
+                <a:spcPts val="0"/>
+              </a:spcAft>
+            </a:pPr>
+            <a:r>
+              <a:rPr sz="1200" b="1" i="0">
+                <a:solidFill>
+                  <a:srgbClr val="0B1E3B"/>
+                </a:solidFill>
+                <a:latin typeface="Calibri"/>
+              </a:rPr>
+              <a:t>IN_REVIEW</a:t>
+            </a:r>
+          </a:p>
+        </p:txBody>
+      </p:sp>
+      <p:cxnSp>
+        <p:nvCxnSpPr>
+          <p:cNvPr id="12" name="Connector 11"/>
+          <p:cNvCxnSpPr/>
+          <p:nvPr/>
+        </p:nvCxnSpPr>
+        <p:spPr>
+          <a:xfrm>
+            <a:off x="1737360" y="4114800"/>
+            <a:ext cx="0" cy="365760"/>
+          </a:xfrm>
+          <a:prstGeom prst="line">
+            <a:avLst/>
+          </a:prstGeom>
+          <a:ln w="25400">
+            <a:solidFill>
+              <a:srgbClr val="4F46E5"/>
+            </a:solidFill>
+            <a:tailEnd type="triangle" w="med" len="med"/>
+          </a:ln>
+          <a:effectLst/>
+        </p:spPr>
+        <p:style>
+          <a:lnRef idx="2">
+            <a:schemeClr val="accent1"/>
+          </a:lnRef>
+          <a:fillRef idx="0">
+            <a:schemeClr val="accent1"/>
+          </a:fillRef>
+          <a:effectRef idx="1">
+            <a:schemeClr val="accent1"/>
+          </a:effectRef>
+          <a:fontRef idx="minor">
+            <a:schemeClr val="tx1"/>
+          </a:fontRef>
+        </p:style>
+      </p:cxnSp>
+      <p:sp>
+        <p:nvSpPr>
+          <p:cNvPr id="13" name="Rounded Rectangle 12"/>
+          <p:cNvSpPr/>
+          <p:nvPr/>
+        </p:nvSpPr>
+        <p:spPr>
+          <a:xfrm>
+            <a:off x="548640" y="4480560"/>
+            <a:ext cx="2377440" cy="640080"/>
+          </a:xfrm>
+          <a:prstGeom prst="roundRect">
+            <a:avLst/>
+          </a:prstGeom>
+          <a:solidFill>
+            <a:srgbClr val="10B981"/>
+          </a:solidFill>
+          <a:ln>
+            <a:noFill/>
+          </a:ln>
+          <a:effectLst/>
+        </p:spPr>
+        <p:style>
+          <a:lnRef idx="1">
+            <a:schemeClr val="accent1"/>
+          </a:lnRef>
+          <a:fillRef idx="3">
+            <a:schemeClr val="accent1"/>
+          </a:fillRef>
+          <a:effectRef idx="2">
+            <a:schemeClr val="accent1"/>
+          </a:effectRef>
+          <a:fontRef idx="minor">
+            <a:schemeClr val="lt1"/>
+          </a:fontRef>
+        </p:style>
+        <p:txBody>
+          <a:bodyPr rtlCol="0" anchor="ctr" wrap="square" lIns="45720" rIns="45720" tIns="36576" bIns="36576"/>
+          <a:lstStyle/>
+          <a:p>
+            <a:pPr algn="ctr">
+              <a:spcBef>
+                <a:spcPts val="0"/>
+              </a:spcBef>
+              <a:spcAft>
+                <a:spcPts val="0"/>
+              </a:spcAft>
+            </a:pPr>
+            <a:r>
+              <a:rPr sz="1200" b="1" i="0">
+                <a:solidFill>
+                  <a:srgbClr val="FFFFFF"/>
+                </a:solidFill>
+                <a:latin typeface="Calibri"/>
+              </a:rPr>
+              <a:t>COMPLETED</a:t>
+            </a:r>
+          </a:p>
+        </p:txBody>
+      </p:sp>
+      <p:sp>
+        <p:nvSpPr>
+          <p:cNvPr id="14" name="Rounded Rectangle 13"/>
+          <p:cNvSpPr/>
+          <p:nvPr/>
+        </p:nvSpPr>
+        <p:spPr>
+          <a:xfrm>
+            <a:off x="3383280" y="2743200"/>
+            <a:ext cx="2194560" cy="1325880"/>
+          </a:xfrm>
+          <a:prstGeom prst="roundRect">
+            <a:avLst/>
+          </a:prstGeom>
+          <a:solidFill>
+            <a:srgbClr val="FFFFFF"/>
+          </a:solidFill>
+          <a:ln w="12700">
+            <a:solidFill>
+              <a:srgbClr val="CBD5E1"/>
+            </a:solidFill>
+          </a:ln>
+          <a:effectLst/>
+        </p:spPr>
+        <p:style>
+          <a:lnRef idx="1">
+            <a:schemeClr val="accent1"/>
+          </a:lnRef>
+          <a:fillRef idx="3">
+            <a:schemeClr val="accent1"/>
+          </a:fillRef>
+          <a:effectRef idx="2">
+            <a:schemeClr val="accent1"/>
+          </a:effectRef>
+          <a:fontRef idx="minor">
+            <a:schemeClr val="lt1"/>
+          </a:fontRef>
+        </p:style>
+        <p:txBody>
+          <a:bodyPr rtlCol="0" anchor="ctr" wrap="square" lIns="109728" rIns="109728" tIns="36576" bIns="36576"/>
+          <a:lstStyle/>
+          <a:p>
+            <a:pPr algn="ctr">
+              <a:spcBef>
+                <a:spcPts val="0"/>
+              </a:spcBef>
+              <a:spcAft>
+                <a:spcPts val="300"/>
+              </a:spcAft>
+            </a:pPr>
+            <a:r>
+              <a:rPr sz="1200" b="1" i="0">
+                <a:solidFill>
+                  <a:srgbClr val="0B1E3B"/>
+                </a:solidFill>
+                <a:latin typeface="Calibri"/>
+              </a:rPr>
+              <a:t>OVERDUE</a:t>
+            </a:r>
+          </a:p>
+          <a:p>
+            <a:pPr algn="ctr">
+              <a:spcBef>
+                <a:spcPts val="0"/>
+              </a:spcBef>
+              <a:spcAft>
+                <a:spcPts val="0"/>
+              </a:spcAft>
+            </a:pPr>
+            <a:r>
+              <a:rPr sz="1000" b="0" i="0">
+                <a:solidFill>
+                  <a:srgbClr val="1E293B"/>
+                </a:solidFill>
+                <a:latin typeface="Calibri"/>
+              </a:rPr>
+              <a:t>auto-flagged when
+deadline passes;
+returns to flow on update</a:t>
+            </a:r>
+          </a:p>
+        </p:txBody>
+      </p:sp>
+      <p:sp>
+        <p:nvSpPr>
+          <p:cNvPr id="15" name="Rounded Rectangle 14"/>
+          <p:cNvSpPr/>
+          <p:nvPr/>
+        </p:nvSpPr>
+        <p:spPr>
+          <a:xfrm>
+            <a:off x="3383280" y="2743200"/>
+            <a:ext cx="82296" cy="1325880"/>
+          </a:xfrm>
+          <a:prstGeom prst="roundRect">
+            <a:avLst/>
+          </a:prstGeom>
+          <a:solidFill>
+            <a:srgbClr val="EF4444"/>
+          </a:solidFill>
+          <a:ln>
+            <a:noFill/>
+          </a:ln>
+          <a:effectLst/>
+        </p:spPr>
+        <p:style>
+          <a:lnRef idx="1">
+            <a:schemeClr val="accent1"/>
+          </a:lnRef>
+          <a:fillRef idx="3">
+            <a:schemeClr val="accent1"/>
+          </a:fillRef>
+          <a:effectRef idx="2">
+            <a:schemeClr val="accent1"/>
+          </a:effectRef>
+          <a:fontRef idx="minor">
+            <a:schemeClr val="lt1"/>
+          </a:fontRef>
+        </p:style>
+        <p:txBody>
+          <a:bodyPr rtlCol="0" anchor="ctr"/>
+          <a:lstStyle/>
+          <a:p>
+            <a:pPr algn="ctr"/>
+          </a:p>
+        </p:txBody>
+      </p:sp>
+      <p:cxnSp>
+        <p:nvCxnSpPr>
+          <p:cNvPr id="16" name="Connector 15"/>
+          <p:cNvCxnSpPr/>
+          <p:nvPr/>
+        </p:nvCxnSpPr>
+        <p:spPr>
+          <a:xfrm>
+            <a:off x="2926080" y="2788920"/>
+            <a:ext cx="457200" cy="411480"/>
+          </a:xfrm>
+          <a:prstGeom prst="line">
+            <a:avLst/>
+          </a:prstGeom>
+          <a:ln w="25400">
+            <a:solidFill>
+              <a:srgbClr val="EF4444"/>
+            </a:solidFill>
+            <a:tailEnd type="triangle" w="med" len="med"/>
+          </a:ln>
+          <a:effectLst/>
+        </p:spPr>
+        <p:style>
+          <a:lnRef idx="2">
+            <a:schemeClr val="accent1"/>
+          </a:lnRef>
+          <a:fillRef idx="0">
+            <a:schemeClr val="accent1"/>
+          </a:fillRef>
+          <a:effectRef idx="1">
+            <a:schemeClr val="accent1"/>
+          </a:effectRef>
+          <a:fontRef idx="minor">
+            <a:schemeClr val="tx1"/>
+          </a:fontRef>
+        </p:style>
+      </p:cxnSp>
+      <p:sp>
+        <p:nvSpPr>
+          <p:cNvPr id="17" name="Rounded Rectangle 16"/>
+          <p:cNvSpPr/>
+          <p:nvPr/>
+        </p:nvSpPr>
+        <p:spPr>
+          <a:xfrm>
+            <a:off x="2240280" y="2487168"/>
+            <a:ext cx="1554480" cy="292608"/>
+          </a:xfrm>
+          <a:prstGeom prst="roundRect">
+            <a:avLst/>
+          </a:prstGeom>
+          <a:noFill/>
+          <a:ln>
+            <a:noFill/>
+          </a:ln>
+          <a:effectLst/>
+        </p:spPr>
+        <p:style>
+          <a:lnRef idx="1">
+            <a:schemeClr val="accent1"/>
+          </a:lnRef>
+          <a:fillRef idx="3">
+            <a:schemeClr val="accent1"/>
+          </a:fillRef>
+          <a:effectRef idx="2">
+            <a:schemeClr val="accent1"/>
+          </a:effectRef>
+          <a:fontRef idx="minor">
+            <a:schemeClr val="lt1"/>
+          </a:fontRef>
+        </p:style>
+        <p:txBody>
+          <a:bodyPr rtlCol="0" anchor="ctr" wrap="square" lIns="27432" rIns="27432" tIns="36576" bIns="36576"/>
+          <a:lstStyle/>
+          <a:p>
+            <a:pPr algn="ctr">
+              <a:spcBef>
+                <a:spcPts val="0"/>
+              </a:spcBef>
+              <a:spcAft>
+                <a:spcPts val="0"/>
+              </a:spcAft>
+            </a:pPr>
+            <a:r>
+              <a:rPr sz="850" b="1" i="0">
+                <a:solidFill>
+                  <a:srgbClr val="EF4444"/>
+                </a:solidFill>
+                <a:latin typeface="Calibri"/>
+              </a:rPr>
+              <a:t>deadline passes</a:t>
+            </a:r>
+          </a:p>
+        </p:txBody>
+      </p:sp>
+      <p:sp>
+        <p:nvSpPr>
+          <p:cNvPr id="18" name="Rounded Rectangle 17"/>
+          <p:cNvSpPr/>
+          <p:nvPr/>
+        </p:nvSpPr>
+        <p:spPr>
+          <a:xfrm>
+            <a:off x="6035040" y="1463040"/>
+            <a:ext cx="5715000" cy="4572000"/>
+          </a:xfrm>
+          <a:prstGeom prst="roundRect">
+            <a:avLst/>
+          </a:prstGeom>
+          <a:solidFill>
+            <a:srgbClr val="0B1E3B"/>
+          </a:solidFill>
+          <a:ln>
+            <a:noFill/>
+          </a:ln>
+          <a:effectLst/>
+        </p:spPr>
+        <p:style>
+          <a:lnRef idx="1">
+            <a:schemeClr val="accent1"/>
+          </a:lnRef>
+          <a:fillRef idx="3">
+            <a:schemeClr val="accent1"/>
+          </a:fillRef>
+          <a:effectRef idx="2">
+            <a:schemeClr val="accent1"/>
+          </a:effectRef>
+          <a:fontRef idx="minor">
+            <a:schemeClr val="lt1"/>
+          </a:fontRef>
+        </p:style>
+        <p:txBody>
+          <a:bodyPr rtlCol="0" anchor="t" wrap="square" lIns="182880" rIns="182880" tIns="36576" bIns="36576"/>
+          <a:lstStyle/>
+          <a:p>
+            <a:pPr algn="l">
+              <a:spcBef>
+                <a:spcPts val="0"/>
+              </a:spcBef>
+              <a:spcAft>
+                <a:spcPts val="500"/>
+              </a:spcAft>
+            </a:pPr>
+            <a:r>
+              <a:rPr sz="1100" b="1" i="0">
+                <a:solidFill>
+                  <a:srgbClr val="06B6D4"/>
+                </a:solidFill>
+                <a:latin typeface="Calibri"/>
+              </a:rPr>
+              <a:t>RISK FORMULA  ·  calculate_task_risk()  ·  tasks.py</a:t>
+            </a:r>
+          </a:p>
+          <a:p>
+            <a:pPr algn="l">
+              <a:spcBef>
+                <a:spcPts val="0"/>
+              </a:spcBef>
+              <a:spcAft>
+                <a:spcPts val="400"/>
+              </a:spcAft>
+            </a:pPr>
+            <a:r>
+              <a:rPr sz="1150" b="1" i="0">
+                <a:solidFill>
+                  <a:srgbClr val="F59E0B"/>
+                </a:solidFill>
+                <a:latin typeface="Calibri"/>
+              </a:rPr>
+              <a:t>Completed / Awaiting Approval  →  R = 0  (LOW)</a:t>
+            </a:r>
+          </a:p>
+          <a:p>
+            <a:pPr algn="l">
+              <a:spcBef>
+                <a:spcPts val="0"/>
+              </a:spcBef>
+              <a:spcAft>
+                <a:spcPts val="400"/>
+              </a:spcAft>
+            </a:pPr>
+            <a:r>
+              <a:rPr sz="1150" b="1" i="0">
+                <a:solidFill>
+                  <a:srgbClr val="FFFFFF"/>
+                </a:solidFill>
+                <a:latin typeface="Calibri"/>
+              </a:rPr>
+              <a:t>Otherwise:  R = clamp(D + G + P + W, 5, 95)</a:t>
+            </a:r>
+          </a:p>
+          <a:p>
+            <a:pPr algn="l">
+              <a:spcBef>
+                <a:spcPts val="0"/>
+              </a:spcBef>
+              <a:spcAft>
+                <a:spcPts val="400"/>
+              </a:spcAft>
+            </a:pPr>
+            <a:r>
+              <a:rPr sz="1150" b="0" i="0">
+                <a:solidFill>
+                  <a:srgbClr val="FFFFFF"/>
+                </a:solidFill>
+                <a:latin typeface="Calibri"/>
+              </a:rPr>
+              <a:t>D  =  90 overdue  ·  50 if ≤2d  ·  30 if ≤5d</a:t>
+            </a:r>
+          </a:p>
+          <a:p>
+            <a:pPr algn="l">
+              <a:spcBef>
+                <a:spcPts val="0"/>
+              </a:spcBef>
+              <a:spcAft>
+                <a:spcPts val="400"/>
+              </a:spcAft>
+            </a:pPr>
+            <a:r>
+              <a:rPr sz="1150" b="0" i="0">
+                <a:solidFill>
+                  <a:srgbClr val="FFFFFF"/>
+                </a:solidFill>
+                <a:latin typeface="Calibri"/>
+              </a:rPr>
+              <a:t>G  =  25 if progress &lt; 50% and ≤3 days left</a:t>
+            </a:r>
+          </a:p>
+          <a:p>
+            <a:pPr algn="l">
+              <a:spcBef>
+                <a:spcPts val="0"/>
+              </a:spcBef>
+              <a:spcAft>
+                <a:spcPts val="400"/>
+              </a:spcAft>
+            </a:pPr>
+            <a:r>
+              <a:rPr sz="1150" b="0" i="0">
+                <a:solidFill>
+                  <a:srgbClr val="FFFFFF"/>
+                </a:solidFill>
+                <a:latin typeface="Calibri"/>
+              </a:rPr>
+              <a:t>P  =  15 if priority High  ·  W = 20 if load &gt; 3</a:t>
+            </a:r>
+          </a:p>
+          <a:p>
+            <a:pPr algn="l">
+              <a:spcBef>
+                <a:spcPts val="0"/>
+              </a:spcBef>
+              <a:spcAft>
+                <a:spcPts val="400"/>
+              </a:spcAft>
+            </a:pPr>
+            <a:r>
+              <a:rPr sz="1150" b="1" i="0">
+                <a:solidFill>
+                  <a:srgbClr val="06B6D4"/>
+                </a:solidFill>
+                <a:latin typeface="Calibri"/>
+              </a:rPr>
+              <a:t>HIGH if R &gt; 70  ·  MEDIUM if R &gt; 40  ·  LOW else</a:t>
+            </a:r>
+          </a:p>
+          <a:p>
+            <a:pPr algn="l">
+              <a:spcBef>
+                <a:spcPts val="0"/>
+              </a:spcBef>
+              <a:spcAft>
+                <a:spcPts val="400"/>
+              </a:spcAft>
+            </a:pPr>
+            <a:r>
+              <a:rPr sz="1150" b="0" i="0">
+                <a:solidFill>
+                  <a:srgbClr val="C7D2FE"/>
+                </a:solidFill>
+                <a:latin typeface="Calibri"/>
+              </a:rPr>
+              <a:t>e.g. 2d left · 30% done · High · load 5</a:t>
+            </a:r>
+          </a:p>
+          <a:p>
+            <a:pPr algn="l">
+              <a:spcBef>
+                <a:spcPts val="0"/>
+              </a:spcBef>
+              <a:spcAft>
+                <a:spcPts val="400"/>
+              </a:spcAft>
+            </a:pPr>
+            <a:r>
+              <a:rPr sz="1150" b="1" i="0">
+                <a:solidFill>
+                  <a:srgbClr val="F59E0B"/>
+                </a:solidFill>
+                <a:latin typeface="Calibri"/>
+              </a:rPr>
+              <a:t>→ 50+25+15+20 = 110 → capped 95 → HIGH ✓</a:t>
+            </a:r>
+          </a:p>
+        </p:txBody>
+      </p:sp>
+    </p:spTree>
+  </p:cSld>
+  <p:clrMapOvr>
+    <a:masterClrMapping/>
+  </p:clrMapOvr>
+</p:sld>
+</file>
+
+<file path=ppt/slides/slide28.xml><?xml version="1.0" encoding="utf-8"?>
+<p:sld xmlns:a="http://schemas.openxmlformats.org/drawingml/2006/main" xmlns:p="http://schemas.openxmlformats.org/presentationml/2006/main" xmlns:r="http://schemas.openxmlformats.org/officeDocument/2006/relationships">
+  <p:cSld>
+    <p:bg>
+      <p:bgPr>
+        <a:solidFill>
+          <a:srgbClr val="F3F6FC"/>
+        </a:solidFill>
+        <a:effectLst/>
+      </p:bgPr>
+    </p:bg>
+    <p:spTree>
+      <p:nvGrpSpPr>
+        <p:cNvPr id="1" name=""/>
+        <p:cNvGrpSpPr/>
+        <p:nvPr/>
+      </p:nvGrpSpPr>
+      <p:grpSpPr/>
+      <p:sp>
+        <p:nvSpPr>
+          <p:cNvPr id="2" name="Rectangle 1"/>
+          <p:cNvSpPr/>
+          <p:nvPr/>
+        </p:nvSpPr>
+        <p:spPr>
+          <a:xfrm>
+            <a:off x="0" y="0"/>
+            <a:ext cx="12191695" cy="1115568"/>
+          </a:xfrm>
+          <a:prstGeom prst="rect">
+            <a:avLst/>
+          </a:prstGeom>
+          <a:solidFill>
+            <a:srgbClr val="0B1E3B"/>
+          </a:solidFill>
+          <a:ln>
+            <a:noFill/>
+          </a:ln>
+          <a:effectLst/>
+        </p:spPr>
+        <p:style>
+          <a:lnRef idx="1">
+            <a:schemeClr val="accent1"/>
+          </a:lnRef>
+          <a:fillRef idx="3">
+            <a:schemeClr val="accent1"/>
+          </a:fillRef>
+          <a:effectRef idx="2">
+            <a:schemeClr val="accent1"/>
+          </a:effectRef>
+          <a:fontRef idx="minor">
+            <a:schemeClr val="lt1"/>
+          </a:fontRef>
+        </p:style>
+        <p:txBody>
+          <a:bodyPr rtlCol="0" anchor="ctr"/>
+          <a:lstStyle/>
+          <a:p>
+            <a:pPr algn="ctr"/>
+          </a:p>
+        </p:txBody>
+      </p:sp>
+      <p:sp>
+        <p:nvSpPr>
+          <p:cNvPr id="3" name="Rectangle 2"/>
+          <p:cNvSpPr/>
+          <p:nvPr/>
+        </p:nvSpPr>
+        <p:spPr>
+          <a:xfrm>
+            <a:off x="0" y="1115568"/>
+            <a:ext cx="12191695" cy="41148"/>
+          </a:xfrm>
+          <a:prstGeom prst="rect">
+            <a:avLst/>
+          </a:prstGeom>
+          <a:solidFill>
+            <a:srgbClr val="F59E0B"/>
+          </a:solidFill>
+          <a:ln>
+            <a:noFill/>
+          </a:ln>
+          <a:effectLst/>
+        </p:spPr>
+        <p:style>
+          <a:lnRef idx="1">
+            <a:schemeClr val="accent1"/>
+          </a:lnRef>
+          <a:fillRef idx="3">
+            <a:schemeClr val="accent1"/>
+          </a:fillRef>
+          <a:effectRef idx="2">
+            <a:schemeClr val="accent1"/>
+          </a:effectRef>
+          <a:fontRef idx="minor">
+            <a:schemeClr val="lt1"/>
+          </a:fontRef>
+        </p:style>
+        <p:txBody>
+          <a:bodyPr rtlCol="0" anchor="ctr"/>
+          <a:lstStyle/>
+          <a:p>
+            <a:pPr algn="ctr"/>
+          </a:p>
+        </p:txBody>
+      </p:sp>
+      <p:sp>
+        <p:nvSpPr>
+          <p:cNvPr id="4" name="Rectangle 3"/>
+          <p:cNvSpPr/>
+          <p:nvPr/>
+        </p:nvSpPr>
+        <p:spPr>
+          <a:xfrm>
+            <a:off x="411480" y="109728"/>
+            <a:ext cx="10058400" cy="914400"/>
+          </a:xfrm>
+          <a:prstGeom prst="rect">
+            <a:avLst/>
+          </a:prstGeom>
+          <a:noFill/>
+          <a:ln>
+            <a:noFill/>
+          </a:ln>
+          <a:effectLst/>
+        </p:spPr>
+        <p:style>
+          <a:lnRef idx="1">
+            <a:schemeClr val="accent1"/>
+          </a:lnRef>
+          <a:fillRef idx="3">
+            <a:schemeClr val="accent1"/>
+          </a:fillRef>
+          <a:effectRef idx="2">
+            <a:schemeClr val="accent1"/>
+          </a:effectRef>
+          <a:fontRef idx="minor">
+            <a:schemeClr val="lt1"/>
+          </a:fontRef>
+        </p:style>
+        <p:txBody>
+          <a:bodyPr rtlCol="0" anchor="t" wrap="square" lIns="0" rIns="0" tIns="36576" bIns="36576"/>
+          <a:lstStyle/>
+          <a:p>
+            <a:pPr algn="l">
+              <a:spcBef>
+                <a:spcPts val="0"/>
+              </a:spcBef>
+              <a:spcAft>
+                <a:spcPts val="100"/>
+              </a:spcAft>
+            </a:pPr>
+            <a:r>
+              <a:rPr sz="1050" b="1" i="0">
+                <a:solidFill>
+                  <a:srgbClr val="06B6D4"/>
+                </a:solidFill>
+                <a:latin typeface="Calibri"/>
+              </a:rPr>
+              <a:t>APPENDIX · BACKUP FOR Q&amp;A</a:t>
+            </a:r>
+          </a:p>
+          <a:p>
+            <a:pPr algn="l">
+              <a:spcBef>
+                <a:spcPts val="0"/>
+              </a:spcBef>
+              <a:spcAft>
+                <a:spcPts val="0"/>
+              </a:spcAft>
+            </a:pPr>
+            <a:r>
+              <a:rPr sz="2500" b="1" i="0">
+                <a:solidFill>
+                  <a:srgbClr val="FFFFFF"/>
+                </a:solidFill>
+                <a:latin typeface="Calibri"/>
+              </a:rPr>
+              <a:t>Appendix C — Testing &amp; Results (Review-I)</a:t>
+            </a:r>
+          </a:p>
+        </p:txBody>
+      </p:sp>
+      <p:sp>
+        <p:nvSpPr>
+          <p:cNvPr id="5" name="Rounded Rectangle 4"/>
+          <p:cNvSpPr/>
+          <p:nvPr/>
+        </p:nvSpPr>
+        <p:spPr>
+          <a:xfrm>
+            <a:off x="11018520" y="292608"/>
+            <a:ext cx="777240" cy="502920"/>
+          </a:xfrm>
+          <a:prstGeom prst="roundRect">
+            <a:avLst/>
+          </a:prstGeom>
+          <a:solidFill>
+            <a:srgbClr val="143363"/>
+          </a:solidFill>
+          <a:ln w="15875">
+            <a:solidFill>
+              <a:srgbClr val="06B6D4"/>
+            </a:solidFill>
+          </a:ln>
+          <a:effectLst/>
+        </p:spPr>
+        <p:style>
+          <a:lnRef idx="1">
+            <a:schemeClr val="accent1"/>
+          </a:lnRef>
+          <a:fillRef idx="3">
+            <a:schemeClr val="accent1"/>
+          </a:fillRef>
+          <a:effectRef idx="2">
+            <a:schemeClr val="accent1"/>
+          </a:effectRef>
+          <a:fontRef idx="minor">
+            <a:schemeClr val="lt1"/>
+          </a:fontRef>
+        </p:style>
+        <p:txBody>
+          <a:bodyPr rtlCol="0" anchor="ctr" wrap="square" lIns="18288" rIns="18288" tIns="36576" bIns="36576"/>
+          <a:lstStyle/>
+          <a:p>
+            <a:pPr algn="ctr">
+              <a:spcBef>
+                <a:spcPts val="0"/>
+              </a:spcBef>
+              <a:spcAft>
+                <a:spcPts val="0"/>
+              </a:spcAft>
+            </a:pPr>
+            <a:r>
+              <a:rPr sz="1500" b="1" i="0">
+                <a:solidFill>
+                  <a:srgbClr val="FFFFFF"/>
+                </a:solidFill>
+                <a:latin typeface="Calibri"/>
+              </a:rPr>
+              <a:t>28</a:t>
+            </a:r>
+          </a:p>
+        </p:txBody>
+      </p:sp>
+      <p:sp>
+        <p:nvSpPr>
+          <p:cNvPr id="6" name="Rectangle 5"/>
+          <p:cNvSpPr/>
+          <p:nvPr/>
+        </p:nvSpPr>
+        <p:spPr>
+          <a:xfrm>
+            <a:off x="411480" y="6455664"/>
+            <a:ext cx="11365992" cy="320040"/>
+          </a:xfrm>
+          <a:prstGeom prst="rect">
+            <a:avLst/>
+          </a:prstGeom>
+          <a:noFill/>
+          <a:ln>
+            <a:noFill/>
+          </a:ln>
+          <a:effectLst/>
+        </p:spPr>
+        <p:style>
+          <a:lnRef idx="1">
+            <a:schemeClr val="accent1"/>
+          </a:lnRef>
+          <a:fillRef idx="3">
+            <a:schemeClr val="accent1"/>
+          </a:fillRef>
+          <a:effectRef idx="2">
+            <a:schemeClr val="accent1"/>
+          </a:effectRef>
+          <a:fontRef idx="minor">
+            <a:schemeClr val="lt1"/>
+          </a:fontRef>
+        </p:style>
+        <p:txBody>
+          <a:bodyPr rtlCol="0" anchor="t" wrap="square" lIns="0" rIns="0" tIns="36576" bIns="36576"/>
+          <a:lstStyle/>
+          <a:p>
+            <a:pPr algn="ctr">
+              <a:spcAft>
+                <a:spcPts val="0"/>
+              </a:spcAft>
+            </a:pPr>
+            <a:r>
+              <a:rPr sz="850" b="0">
+                <a:solidFill>
+                  <a:srgbClr val="64748B"/>
+                </a:solidFill>
+                <a:latin typeface="Calibri"/>
+              </a:rPr>
+              <a:t>HieraSync AI  •  Review Seminar – I      </a:t>
+            </a:r>
+            <a:r>
+              <a:rPr sz="850" b="0">
+                <a:solidFill>
+                  <a:srgbClr val="64748B"/>
+                </a:solidFill>
+                <a:latin typeface="Calibri"/>
+              </a:rPr>
+              <a:t>CSE (AI &amp; ML), SBJIT Nagpur</a:t>
+            </a:r>
+          </a:p>
+        </p:txBody>
+      </p:sp>
+      <p:graphicFrame>
+        <p:nvGraphicFramePr>
+          <p:cNvPr id="7" name="Table 6"/>
+          <p:cNvGraphicFramePr>
+            <a:graphicFrameLocks noGrp="1"/>
+          </p:cNvGraphicFramePr>
+          <p:nvPr/>
+        </p:nvGraphicFramePr>
+        <p:xfrm>
+          <a:off x="411480" y="1417320"/>
+          <a:ext cx="11365992" cy="4389120"/>
+        </p:xfrm>
+        <a:graphic>
+          <a:graphicData uri="http://schemas.openxmlformats.org/drawingml/2006/table">
+            <a:tbl>
+              <a:tblPr>
+                <a:tableStyleId>{5C22544A-7EE6-4342-B048-85BDC9FD1C3A}</a:tableStyleId>
+              </a:tblPr>
+              <a:tblGrid>
+                <a:gridCol w="640080"/>
+                <a:gridCol w="3840480"/>
+                <a:gridCol w="4572000"/>
+                <a:gridCol w="2313432"/>
+              </a:tblGrid>
+              <a:tr h="438912">
+                <a:tc>
+                  <a:txBody>
+                    <a:bodyPr/>
+                    <a:lstStyle/>
+                    <a:p>
+                      <a:pPr>
+                        <a:spcBef>
+                          <a:spcPts val="100"/>
+                        </a:spcBef>
+                        <a:spcAft>
+                          <a:spcPts val="100"/>
+                        </a:spcAft>
+                      </a:pPr>
+                      <a:r>
+                        <a:rPr sz="1100" b="1">
+                          <a:solidFill>
+                            <a:srgbClr val="FFFFFF"/>
+                          </a:solidFill>
+                          <a:latin typeface="Calibri"/>
+                        </a:rPr>
+                        <a:t>ID</a:t>
+                      </a:r>
+                    </a:p>
+                  </a:txBody>
+                  <a:tcPr anchor="ctr" marL="73152" marR="73152" marT="27432" marB="27432">
+                    <a:solidFill>
+                      <a:srgbClr val="0B1E3B"/>
+                    </a:solidFill>
+                    <a:lnL w="12700">
+                      <a:solidFill>
+                        <a:srgbClr val="CBD5E1"/>
+                      </a:solidFill>
+                    </a:lnL>
+                    <a:lnR w="12700">
+                      <a:solidFill>
+                        <a:srgbClr val="CBD5E1"/>
+                      </a:solidFill>
+                    </a:lnR>
+                    <a:lnT w="12700">
+                      <a:solidFill>
+                        <a:srgbClr val="CBD5E1"/>
+                      </a:solidFill>
+                    </a:lnT>
+                    <a:lnB w="12700">
+                      <a:solidFill>
+                        <a:srgbClr val="CBD5E1"/>
+                      </a:solidFill>
+                    </a:lnB>
+                  </a:tcPr>
+                </a:tc>
+                <a:tc>
+                  <a:txBody>
+                    <a:bodyPr/>
+                    <a:lstStyle/>
+                    <a:p>
+                      <a:pPr>
+                        <a:spcBef>
+                          <a:spcPts val="100"/>
+                        </a:spcBef>
+                        <a:spcAft>
+                          <a:spcPts val="100"/>
+                        </a:spcAft>
+                      </a:pPr>
+                      <a:r>
+                        <a:rPr sz="1100" b="1">
+                          <a:solidFill>
+                            <a:srgbClr val="FFFFFF"/>
+                          </a:solidFill>
+                          <a:latin typeface="Calibri"/>
+                        </a:rPr>
+                        <a:t>Test scenario</a:t>
+                      </a:r>
+                    </a:p>
+                  </a:txBody>
+                  <a:tcPr anchor="ctr" marL="73152" marR="73152" marT="27432" marB="27432">
+                    <a:solidFill>
+                      <a:srgbClr val="0B1E3B"/>
+                    </a:solidFill>
+                    <a:lnL w="12700">
+                      <a:solidFill>
+                        <a:srgbClr val="CBD5E1"/>
+                      </a:solidFill>
+                    </a:lnL>
+                    <a:lnR w="12700">
+                      <a:solidFill>
+                        <a:srgbClr val="CBD5E1"/>
+                      </a:solidFill>
+                    </a:lnR>
+                    <a:lnT w="12700">
+                      <a:solidFill>
+                        <a:srgbClr val="CBD5E1"/>
+                      </a:solidFill>
+                    </a:lnT>
+                    <a:lnB w="12700">
+                      <a:solidFill>
+                        <a:srgbClr val="CBD5E1"/>
+                      </a:solidFill>
+                    </a:lnB>
+                  </a:tcPr>
+                </a:tc>
+                <a:tc>
+                  <a:txBody>
+                    <a:bodyPr/>
+                    <a:lstStyle/>
+                    <a:p>
+                      <a:pPr>
+                        <a:spcBef>
+                          <a:spcPts val="100"/>
+                        </a:spcBef>
+                        <a:spcAft>
+                          <a:spcPts val="100"/>
+                        </a:spcAft>
+                      </a:pPr>
+                      <a:r>
+                        <a:rPr sz="1100" b="1">
+                          <a:solidFill>
+                            <a:srgbClr val="FFFFFF"/>
+                          </a:solidFill>
+                          <a:latin typeface="Calibri"/>
+                        </a:rPr>
+                        <a:t>Expected result</a:t>
+                      </a:r>
+                    </a:p>
+                  </a:txBody>
+                  <a:tcPr anchor="ctr" marL="73152" marR="73152" marT="27432" marB="27432">
+                    <a:solidFill>
+                      <a:srgbClr val="0B1E3B"/>
+                    </a:solidFill>
+                    <a:lnL w="12700">
+                      <a:solidFill>
+                        <a:srgbClr val="CBD5E1"/>
+                      </a:solidFill>
+                    </a:lnL>
+                    <a:lnR w="12700">
+                      <a:solidFill>
+                        <a:srgbClr val="CBD5E1"/>
+                      </a:solidFill>
+                    </a:lnR>
+                    <a:lnT w="12700">
+                      <a:solidFill>
+                        <a:srgbClr val="CBD5E1"/>
+                      </a:solidFill>
+                    </a:lnT>
+                    <a:lnB w="12700">
+                      <a:solidFill>
+                        <a:srgbClr val="CBD5E1"/>
+                      </a:solidFill>
+                    </a:lnB>
+                  </a:tcPr>
+                </a:tc>
+                <a:tc>
+                  <a:txBody>
+                    <a:bodyPr/>
+                    <a:lstStyle/>
+                    <a:p>
+                      <a:pPr>
+                        <a:spcBef>
+                          <a:spcPts val="100"/>
+                        </a:spcBef>
+                        <a:spcAft>
+                          <a:spcPts val="100"/>
+                        </a:spcAft>
+                      </a:pPr>
+                      <a:r>
+                        <a:rPr sz="1100" b="1">
+                          <a:solidFill>
+                            <a:srgbClr val="FFFFFF"/>
+                          </a:solidFill>
+                          <a:latin typeface="Calibri"/>
+                        </a:rPr>
+                        <a:t>Status</a:t>
+                      </a:r>
+                    </a:p>
+                  </a:txBody>
+                  <a:tcPr anchor="ctr" marL="73152" marR="73152" marT="27432" marB="27432">
+                    <a:solidFill>
+                      <a:srgbClr val="0B1E3B"/>
+                    </a:solidFill>
+                    <a:lnL w="12700">
+                      <a:solidFill>
+                        <a:srgbClr val="CBD5E1"/>
+                      </a:solidFill>
+                    </a:lnL>
+                    <a:lnR w="12700">
+                      <a:solidFill>
+                        <a:srgbClr val="CBD5E1"/>
+                      </a:solidFill>
+                    </a:lnR>
+                    <a:lnT w="12700">
+                      <a:solidFill>
+                        <a:srgbClr val="CBD5E1"/>
+                      </a:solidFill>
+                    </a:lnT>
+                    <a:lnB w="12700">
+                      <a:solidFill>
+                        <a:srgbClr val="CBD5E1"/>
+                      </a:solidFill>
+                    </a:lnB>
+                  </a:tcPr>
+                </a:tc>
+              </a:tr>
+              <a:tr h="438912">
+                <a:tc>
+                  <a:txBody>
+                    <a:bodyPr/>
+                    <a:lstStyle/>
+                    <a:p>
+                      <a:pPr>
+                        <a:spcBef>
+                          <a:spcPts val="100"/>
+                        </a:spcBef>
+                        <a:spcAft>
+                          <a:spcPts val="100"/>
+                        </a:spcAft>
+                      </a:pPr>
+                      <a:r>
+                        <a:rPr sz="1100" b="0">
+                          <a:solidFill>
+                            <a:srgbClr val="1E293B"/>
+                          </a:solidFill>
+                          <a:latin typeface="Calibri"/>
+                        </a:rPr>
+                        <a:t>T1</a:t>
+                      </a:r>
+                    </a:p>
+                  </a:txBody>
+                  <a:tcPr anchor="ctr" marL="73152" marR="73152" marT="27432" marB="27432">
+                    <a:solidFill>
+                      <a:srgbClr val="FFFFFF"/>
+                    </a:solidFill>
+                    <a:lnL w="12700">
+                      <a:solidFill>
+                        <a:srgbClr val="CBD5E1"/>
+                      </a:solidFill>
+                    </a:lnL>
+                    <a:lnR w="12700">
+                      <a:solidFill>
+                        <a:srgbClr val="CBD5E1"/>
+                      </a:solidFill>
+                    </a:lnR>
+                    <a:lnT w="12700">
+                      <a:solidFill>
+                        <a:srgbClr val="CBD5E1"/>
+                      </a:solidFill>
+                    </a:lnT>
+                    <a:lnB w="12700">
+                      <a:solidFill>
+                        <a:srgbClr val="CBD5E1"/>
+                      </a:solidFill>
+                    </a:lnB>
+                  </a:tcPr>
+                </a:tc>
+                <a:tc>
+                  <a:txBody>
+                    <a:bodyPr/>
+                    <a:lstStyle/>
+                    <a:p>
+                      <a:pPr>
+                        <a:spcBef>
+                          <a:spcPts val="100"/>
+                        </a:spcBef>
+                        <a:spcAft>
+                          <a:spcPts val="100"/>
+                        </a:spcAft>
+                      </a:pPr>
+                      <a:r>
+                        <a:rPr sz="1100" b="0">
+                          <a:solidFill>
+                            <a:srgbClr val="1E293B"/>
+                          </a:solidFill>
+                          <a:latin typeface="Calibri"/>
+                        </a:rPr>
+                        <a:t>Valid HOD login</a:t>
+                      </a:r>
+                    </a:p>
+                  </a:txBody>
+                  <a:tcPr anchor="ctr" marL="73152" marR="73152" marT="27432" marB="27432">
+                    <a:solidFill>
+                      <a:srgbClr val="FFFFFF"/>
+                    </a:solidFill>
+                    <a:lnL w="12700">
+                      <a:solidFill>
+                        <a:srgbClr val="CBD5E1"/>
+                      </a:solidFill>
+                    </a:lnL>
+                    <a:lnR w="12700">
+                      <a:solidFill>
+                        <a:srgbClr val="CBD5E1"/>
+                      </a:solidFill>
+                    </a:lnR>
+                    <a:lnT w="12700">
+                      <a:solidFill>
+                        <a:srgbClr val="CBD5E1"/>
+                      </a:solidFill>
+                    </a:lnT>
+                    <a:lnB w="12700">
+                      <a:solidFill>
+                        <a:srgbClr val="CBD5E1"/>
+                      </a:solidFill>
+                    </a:lnB>
+                  </a:tcPr>
+                </a:tc>
+                <a:tc>
+                  <a:txBody>
+                    <a:bodyPr/>
+                    <a:lstStyle/>
+                    <a:p>
+                      <a:pPr>
+                        <a:spcBef>
+                          <a:spcPts val="100"/>
+                        </a:spcBef>
+                        <a:spcAft>
+                          <a:spcPts val="100"/>
+                        </a:spcAft>
+                      </a:pPr>
+                      <a:r>
+                        <a:rPr sz="1100" b="0">
+                          <a:solidFill>
+                            <a:srgbClr val="1E293B"/>
+                          </a:solidFill>
+                          <a:latin typeface="Calibri"/>
+                        </a:rPr>
+                        <a:t>JWT issued, dashboard loads</a:t>
+                      </a:r>
+                    </a:p>
+                  </a:txBody>
+                  <a:tcPr anchor="ctr" marL="73152" marR="73152" marT="27432" marB="27432">
+                    <a:solidFill>
+                      <a:srgbClr val="FFFFFF"/>
+                    </a:solidFill>
+                    <a:lnL w="12700">
+                      <a:solidFill>
+                        <a:srgbClr val="CBD5E1"/>
+                      </a:solidFill>
+                    </a:lnL>
+                    <a:lnR w="12700">
+                      <a:solidFill>
+                        <a:srgbClr val="CBD5E1"/>
+                      </a:solidFill>
+                    </a:lnR>
+                    <a:lnT w="12700">
+                      <a:solidFill>
+                        <a:srgbClr val="CBD5E1"/>
+                      </a:solidFill>
+                    </a:lnT>
+                    <a:lnB w="12700">
+                      <a:solidFill>
+                        <a:srgbClr val="CBD5E1"/>
+                      </a:solidFill>
+                    </a:lnB>
+                  </a:tcPr>
+                </a:tc>
+                <a:tc>
+                  <a:txBody>
+                    <a:bodyPr/>
+                    <a:lstStyle/>
+                    <a:p>
+                      <a:pPr>
+                        <a:spcBef>
+                          <a:spcPts val="100"/>
+                        </a:spcBef>
+                        <a:spcAft>
+                          <a:spcPts val="100"/>
+                        </a:spcAft>
+                      </a:pPr>
+                      <a:r>
+                        <a:rPr sz="1100" b="0">
+                          <a:solidFill>
+                            <a:srgbClr val="1E293B"/>
+                          </a:solidFill>
+                          <a:latin typeface="Calibri"/>
+                        </a:rPr>
+                        <a:t>✔ Pass</a:t>
+                      </a:r>
+                    </a:p>
+                  </a:txBody>
+                  <a:tcPr anchor="ctr" marL="73152" marR="73152" marT="27432" marB="27432">
+                    <a:solidFill>
+                      <a:srgbClr val="FFFFFF"/>
+                    </a:solidFill>
+                    <a:lnL w="12700">
+                      <a:solidFill>
+                        <a:srgbClr val="CBD5E1"/>
+                      </a:solidFill>
+                    </a:lnL>
+                    <a:lnR w="12700">
+                      <a:solidFill>
+                        <a:srgbClr val="CBD5E1"/>
+                      </a:solidFill>
+                    </a:lnR>
+                    <a:lnT w="12700">
+                      <a:solidFill>
+                        <a:srgbClr val="CBD5E1"/>
+                      </a:solidFill>
+                    </a:lnT>
+                    <a:lnB w="12700">
+                      <a:solidFill>
+                        <a:srgbClr val="CBD5E1"/>
+                      </a:solidFill>
+                    </a:lnB>
+                  </a:tcPr>
+                </a:tc>
+              </a:tr>
+              <a:tr h="438912">
+                <a:tc>
+                  <a:txBody>
+                    <a:bodyPr/>
+                    <a:lstStyle/>
+                    <a:p>
+                      <a:pPr>
+                        <a:spcBef>
+                          <a:spcPts val="100"/>
+                        </a:spcBef>
+                        <a:spcAft>
+                          <a:spcPts val="100"/>
+                        </a:spcAft>
+                      </a:pPr>
+                      <a:r>
+                        <a:rPr sz="1100" b="0">
+                          <a:solidFill>
+                            <a:srgbClr val="1E293B"/>
+                          </a:solidFill>
+                          <a:latin typeface="Calibri"/>
+                        </a:rPr>
+                        <a:t>T2</a:t>
+                      </a:r>
+                    </a:p>
+                  </a:txBody>
+                  <a:tcPr anchor="ctr" marL="73152" marR="73152" marT="27432" marB="27432">
+                    <a:solidFill>
+                      <a:srgbClr val="EEF2FF"/>
+                    </a:solidFill>
+                    <a:lnL w="12700">
+                      <a:solidFill>
+                        <a:srgbClr val="CBD5E1"/>
+                      </a:solidFill>
+                    </a:lnL>
+                    <a:lnR w="12700">
+                      <a:solidFill>
+                        <a:srgbClr val="CBD5E1"/>
+                      </a:solidFill>
+                    </a:lnR>
+                    <a:lnT w="12700">
+                      <a:solidFill>
+                        <a:srgbClr val="CBD5E1"/>
+                      </a:solidFill>
+                    </a:lnT>
+                    <a:lnB w="12700">
+                      <a:solidFill>
+                        <a:srgbClr val="CBD5E1"/>
+                      </a:solidFill>
+                    </a:lnB>
+                  </a:tcPr>
+                </a:tc>
+                <a:tc>
+                  <a:txBody>
+                    <a:bodyPr/>
+                    <a:lstStyle/>
+                    <a:p>
+                      <a:pPr>
+                        <a:spcBef>
+                          <a:spcPts val="100"/>
+                        </a:spcBef>
+                        <a:spcAft>
+                          <a:spcPts val="100"/>
+                        </a:spcAft>
+                      </a:pPr>
+                      <a:r>
+                        <a:rPr sz="1100" b="0">
+                          <a:solidFill>
+                            <a:srgbClr val="1E293B"/>
+                          </a:solidFill>
+                          <a:latin typeface="Calibri"/>
+                        </a:rPr>
+                        <a:t>Invalid password</a:t>
+                      </a:r>
+                    </a:p>
+                  </a:txBody>
+                  <a:tcPr anchor="ctr" marL="73152" marR="73152" marT="27432" marB="27432">
+                    <a:solidFill>
+                      <a:srgbClr val="EEF2FF"/>
+                    </a:solidFill>
+                    <a:lnL w="12700">
+                      <a:solidFill>
+                        <a:srgbClr val="CBD5E1"/>
+                      </a:solidFill>
+                    </a:lnL>
+                    <a:lnR w="12700">
+                      <a:solidFill>
+                        <a:srgbClr val="CBD5E1"/>
+                      </a:solidFill>
+                    </a:lnR>
+                    <a:lnT w="12700">
+                      <a:solidFill>
+                        <a:srgbClr val="CBD5E1"/>
+                      </a:solidFill>
+                    </a:lnT>
+                    <a:lnB w="12700">
+                      <a:solidFill>
+                        <a:srgbClr val="CBD5E1"/>
+                      </a:solidFill>
+                    </a:lnB>
+                  </a:tcPr>
+                </a:tc>
+                <a:tc>
+                  <a:txBody>
+                    <a:bodyPr/>
+                    <a:lstStyle/>
+                    <a:p>
+                      <a:pPr>
+                        <a:spcBef>
+                          <a:spcPts val="100"/>
+                        </a:spcBef>
+                        <a:spcAft>
+                          <a:spcPts val="100"/>
+                        </a:spcAft>
+                      </a:pPr>
+                      <a:r>
+                        <a:rPr sz="1100" b="0">
+                          <a:solidFill>
+                            <a:srgbClr val="1E293B"/>
+                          </a:solidFill>
+                          <a:latin typeface="Calibri"/>
+                        </a:rPr>
+                        <a:t>401 error, stays on login</a:t>
+                      </a:r>
+                    </a:p>
+                  </a:txBody>
+                  <a:tcPr anchor="ctr" marL="73152" marR="73152" marT="27432" marB="27432">
+                    <a:solidFill>
+                      <a:srgbClr val="EEF2FF"/>
+                    </a:solidFill>
+                    <a:lnL w="12700">
+                      <a:solidFill>
+                        <a:srgbClr val="CBD5E1"/>
+                      </a:solidFill>
+                    </a:lnL>
+                    <a:lnR w="12700">
+                      <a:solidFill>
+                        <a:srgbClr val="CBD5E1"/>
+                      </a:solidFill>
+                    </a:lnR>
+                    <a:lnT w="12700">
+                      <a:solidFill>
+                        <a:srgbClr val="CBD5E1"/>
+                      </a:solidFill>
+                    </a:lnT>
+                    <a:lnB w="12700">
+                      <a:solidFill>
+                        <a:srgbClr val="CBD5E1"/>
+                      </a:solidFill>
+                    </a:lnB>
+                  </a:tcPr>
+                </a:tc>
+                <a:tc>
+                  <a:txBody>
+                    <a:bodyPr/>
+                    <a:lstStyle/>
+                    <a:p>
+                      <a:pPr>
+                        <a:spcBef>
+                          <a:spcPts val="100"/>
+                        </a:spcBef>
+                        <a:spcAft>
+                          <a:spcPts val="100"/>
+                        </a:spcAft>
+                      </a:pPr>
+                      <a:r>
+                        <a:rPr sz="1100" b="0">
+                          <a:solidFill>
+                            <a:srgbClr val="1E293B"/>
+                          </a:solidFill>
+                          <a:latin typeface="Calibri"/>
+                        </a:rPr>
+                        <a:t>✔ Pass</a:t>
+                      </a:r>
+                    </a:p>
+                  </a:txBody>
+                  <a:tcPr anchor="ctr" marL="73152" marR="73152" marT="27432" marB="27432">
+                    <a:solidFill>
+                      <a:srgbClr val="EEF2FF"/>
+                    </a:solidFill>
+                    <a:lnL w="12700">
+                      <a:solidFill>
+                        <a:srgbClr val="CBD5E1"/>
+                      </a:solidFill>
+                    </a:lnL>
+                    <a:lnR w="12700">
+                      <a:solidFill>
+                        <a:srgbClr val="CBD5E1"/>
+                      </a:solidFill>
+                    </a:lnR>
+                    <a:lnT w="12700">
+                      <a:solidFill>
+                        <a:srgbClr val="CBD5E1"/>
+                      </a:solidFill>
+                    </a:lnT>
+                    <a:lnB w="12700">
+                      <a:solidFill>
+                        <a:srgbClr val="CBD5E1"/>
+                      </a:solidFill>
+                    </a:lnB>
+                  </a:tcPr>
+                </a:tc>
+              </a:tr>
+              <a:tr h="438912">
+                <a:tc>
+                  <a:txBody>
+                    <a:bodyPr/>
+                    <a:lstStyle/>
+                    <a:p>
+                      <a:pPr>
+                        <a:spcBef>
+                          <a:spcPts val="100"/>
+                        </a:spcBef>
+                        <a:spcAft>
+                          <a:spcPts val="100"/>
+                        </a:spcAft>
+                      </a:pPr>
+                      <a:r>
+                        <a:rPr sz="1100" b="0">
+                          <a:solidFill>
+                            <a:srgbClr val="1E293B"/>
+                          </a:solidFill>
+                          <a:latin typeface="Calibri"/>
+                        </a:rPr>
+                        <a:t>T3</a:t>
+                      </a:r>
+                    </a:p>
+                  </a:txBody>
+                  <a:tcPr anchor="ctr" marL="73152" marR="73152" marT="27432" marB="27432">
+                    <a:solidFill>
+                      <a:srgbClr val="FFFFFF"/>
+                    </a:solidFill>
+                    <a:lnL w="12700">
+                      <a:solidFill>
+                        <a:srgbClr val="CBD5E1"/>
+                      </a:solidFill>
+                    </a:lnL>
+                    <a:lnR w="12700">
+                      <a:solidFill>
+                        <a:srgbClr val="CBD5E1"/>
+                      </a:solidFill>
+                    </a:lnR>
+                    <a:lnT w="12700">
+                      <a:solidFill>
+                        <a:srgbClr val="CBD5E1"/>
+                      </a:solidFill>
+                    </a:lnT>
+                    <a:lnB w="12700">
+                      <a:solidFill>
+                        <a:srgbClr val="CBD5E1"/>
+                      </a:solidFill>
+                    </a:lnB>
+                  </a:tcPr>
+                </a:tc>
+                <a:tc>
+                  <a:txBody>
+                    <a:bodyPr/>
+                    <a:lstStyle/>
+                    <a:p>
+                      <a:pPr>
+                        <a:spcBef>
+                          <a:spcPts val="100"/>
+                        </a:spcBef>
+                        <a:spcAft>
+                          <a:spcPts val="100"/>
+                        </a:spcAft>
+                      </a:pPr>
+                      <a:r>
+                        <a:rPr sz="1100" b="0">
+                          <a:solidFill>
+                            <a:srgbClr val="1E293B"/>
+                          </a:solidFill>
+                          <a:latin typeface="Calibri"/>
+                        </a:rPr>
+                        <a:t>Faculty opens HOD-only page</a:t>
+                      </a:r>
+                    </a:p>
+                  </a:txBody>
+                  <a:tcPr anchor="ctr" marL="73152" marR="73152" marT="27432" marB="27432">
+                    <a:solidFill>
+                      <a:srgbClr val="FFFFFF"/>
+                    </a:solidFill>
+                    <a:lnL w="12700">
+                      <a:solidFill>
+                        <a:srgbClr val="CBD5E1"/>
+                      </a:solidFill>
+                    </a:lnL>
+                    <a:lnR w="12700">
+                      <a:solidFill>
+                        <a:srgbClr val="CBD5E1"/>
+                      </a:solidFill>
+                    </a:lnR>
+                    <a:lnT w="12700">
+                      <a:solidFill>
+                        <a:srgbClr val="CBD5E1"/>
+                      </a:solidFill>
+                    </a:lnT>
+                    <a:lnB w="12700">
+                      <a:solidFill>
+                        <a:srgbClr val="CBD5E1"/>
+                      </a:solidFill>
+                    </a:lnB>
+                  </a:tcPr>
+                </a:tc>
+                <a:tc>
+                  <a:txBody>
+                    <a:bodyPr/>
+                    <a:lstStyle/>
+                    <a:p>
+                      <a:pPr>
+                        <a:spcBef>
+                          <a:spcPts val="100"/>
+                        </a:spcBef>
+                        <a:spcAft>
+                          <a:spcPts val="100"/>
+                        </a:spcAft>
+                      </a:pPr>
+                      <a:r>
+                        <a:rPr sz="1100" b="0">
+                          <a:solidFill>
+                            <a:srgbClr val="1E293B"/>
+                          </a:solidFill>
+                          <a:latin typeface="Calibri"/>
+                        </a:rPr>
+                        <a:t>Blocked / redirected</a:t>
+                      </a:r>
+                    </a:p>
+                  </a:txBody>
+                  <a:tcPr anchor="ctr" marL="73152" marR="73152" marT="27432" marB="27432">
+                    <a:solidFill>
+                      <a:srgbClr val="FFFFFF"/>
+                    </a:solidFill>
+                    <a:lnL w="12700">
+                      <a:solidFill>
+                        <a:srgbClr val="CBD5E1"/>
+                      </a:solidFill>
+                    </a:lnL>
+                    <a:lnR w="12700">
+                      <a:solidFill>
+                        <a:srgbClr val="CBD5E1"/>
+                      </a:solidFill>
+                    </a:lnR>
+                    <a:lnT w="12700">
+                      <a:solidFill>
+                        <a:srgbClr val="CBD5E1"/>
+                      </a:solidFill>
+                    </a:lnT>
+                    <a:lnB w="12700">
+                      <a:solidFill>
+                        <a:srgbClr val="CBD5E1"/>
+                      </a:solidFill>
+                    </a:lnB>
+                  </a:tcPr>
+                </a:tc>
+                <a:tc>
+                  <a:txBody>
+                    <a:bodyPr/>
+                    <a:lstStyle/>
+                    <a:p>
+                      <a:pPr>
+                        <a:spcBef>
+                          <a:spcPts val="100"/>
+                        </a:spcBef>
+                        <a:spcAft>
+                          <a:spcPts val="100"/>
+                        </a:spcAft>
+                      </a:pPr>
+                      <a:r>
+                        <a:rPr sz="1100" b="0">
+                          <a:solidFill>
+                            <a:srgbClr val="1E293B"/>
+                          </a:solidFill>
+                          <a:latin typeface="Calibri"/>
+                        </a:rPr>
+                        <a:t>✔ Pass</a:t>
+                      </a:r>
+                    </a:p>
+                  </a:txBody>
+                  <a:tcPr anchor="ctr" marL="73152" marR="73152" marT="27432" marB="27432">
+                    <a:solidFill>
+                      <a:srgbClr val="FFFFFF"/>
+                    </a:solidFill>
+                    <a:lnL w="12700">
+                      <a:solidFill>
+                        <a:srgbClr val="CBD5E1"/>
+                      </a:solidFill>
+                    </a:lnL>
+                    <a:lnR w="12700">
+                      <a:solidFill>
+                        <a:srgbClr val="CBD5E1"/>
+                      </a:solidFill>
+                    </a:lnR>
+                    <a:lnT w="12700">
+                      <a:solidFill>
+                        <a:srgbClr val="CBD5E1"/>
+                      </a:solidFill>
+                    </a:lnT>
+                    <a:lnB w="12700">
+                      <a:solidFill>
+                        <a:srgbClr val="CBD5E1"/>
+                      </a:solidFill>
+                    </a:lnB>
+                  </a:tcPr>
+                </a:tc>
+              </a:tr>
+              <a:tr h="438912">
+                <a:tc>
+                  <a:txBody>
+                    <a:bodyPr/>
+                    <a:lstStyle/>
+                    <a:p>
+                      <a:pPr>
+                        <a:spcBef>
+                          <a:spcPts val="100"/>
+                        </a:spcBef>
+                        <a:spcAft>
+                          <a:spcPts val="100"/>
+                        </a:spcAft>
+                      </a:pPr>
+                      <a:r>
+                        <a:rPr sz="1100" b="0">
+                          <a:solidFill>
+                            <a:srgbClr val="1E293B"/>
+                          </a:solidFill>
+                          <a:latin typeface="Calibri"/>
+                        </a:rPr>
+                        <a:t>T4</a:t>
+                      </a:r>
+                    </a:p>
+                  </a:txBody>
+                  <a:tcPr anchor="ctr" marL="73152" marR="73152" marT="27432" marB="27432">
+                    <a:solidFill>
+                      <a:srgbClr val="EEF2FF"/>
+                    </a:solidFill>
+                    <a:lnL w="12700">
+                      <a:solidFill>
+                        <a:srgbClr val="CBD5E1"/>
+                      </a:solidFill>
+                    </a:lnL>
+                    <a:lnR w="12700">
+                      <a:solidFill>
+                        <a:srgbClr val="CBD5E1"/>
+                      </a:solidFill>
+                    </a:lnR>
+                    <a:lnT w="12700">
+                      <a:solidFill>
+                        <a:srgbClr val="CBD5E1"/>
+                      </a:solidFill>
+                    </a:lnT>
+                    <a:lnB w="12700">
+                      <a:solidFill>
+                        <a:srgbClr val="CBD5E1"/>
+                      </a:solidFill>
+                    </a:lnB>
+                  </a:tcPr>
+                </a:tc>
+                <a:tc>
+                  <a:txBody>
+                    <a:bodyPr/>
+                    <a:lstStyle/>
+                    <a:p>
+                      <a:pPr>
+                        <a:spcBef>
+                          <a:spcPts val="100"/>
+                        </a:spcBef>
+                        <a:spcAft>
+                          <a:spcPts val="100"/>
+                        </a:spcAft>
+                      </a:pPr>
+                      <a:r>
+                        <a:rPr sz="1100" b="0">
+                          <a:solidFill>
+                            <a:srgbClr val="1E293B"/>
+                          </a:solidFill>
+                          <a:latin typeface="Calibri"/>
+                        </a:rPr>
+                        <a:t>HOD assigns task</a:t>
+                      </a:r>
+                    </a:p>
+                  </a:txBody>
+                  <a:tcPr anchor="ctr" marL="73152" marR="73152" marT="27432" marB="27432">
+                    <a:solidFill>
+                      <a:srgbClr val="EEF2FF"/>
+                    </a:solidFill>
+                    <a:lnL w="12700">
+                      <a:solidFill>
+                        <a:srgbClr val="CBD5E1"/>
+                      </a:solidFill>
+                    </a:lnL>
+                    <a:lnR w="12700">
+                      <a:solidFill>
+                        <a:srgbClr val="CBD5E1"/>
+                      </a:solidFill>
+                    </a:lnR>
+                    <a:lnT w="12700">
+                      <a:solidFill>
+                        <a:srgbClr val="CBD5E1"/>
+                      </a:solidFill>
+                    </a:lnT>
+                    <a:lnB w="12700">
+                      <a:solidFill>
+                        <a:srgbClr val="CBD5E1"/>
+                      </a:solidFill>
+                    </a:lnB>
+                  </a:tcPr>
+                </a:tc>
+                <a:tc>
+                  <a:txBody>
+                    <a:bodyPr/>
+                    <a:lstStyle/>
+                    <a:p>
+                      <a:pPr>
+                        <a:spcBef>
+                          <a:spcPts val="100"/>
+                        </a:spcBef>
+                        <a:spcAft>
+                          <a:spcPts val="100"/>
+                        </a:spcAft>
+                      </a:pPr>
+                      <a:r>
+                        <a:rPr sz="1100" b="0">
+                          <a:solidFill>
+                            <a:srgbClr val="1E293B"/>
+                          </a:solidFill>
+                          <a:latin typeface="Calibri"/>
+                        </a:rPr>
+                        <a:t>Appears in faculty Kanban + alert</a:t>
+                      </a:r>
+                    </a:p>
+                  </a:txBody>
+                  <a:tcPr anchor="ctr" marL="73152" marR="73152" marT="27432" marB="27432">
+                    <a:solidFill>
+                      <a:srgbClr val="EEF2FF"/>
+                    </a:solidFill>
+                    <a:lnL w="12700">
+                      <a:solidFill>
+                        <a:srgbClr val="CBD5E1"/>
+                      </a:solidFill>
+                    </a:lnL>
+                    <a:lnR w="12700">
+                      <a:solidFill>
+                        <a:srgbClr val="CBD5E1"/>
+                      </a:solidFill>
+                    </a:lnR>
+                    <a:lnT w="12700">
+                      <a:solidFill>
+                        <a:srgbClr val="CBD5E1"/>
+                      </a:solidFill>
+                    </a:lnT>
+                    <a:lnB w="12700">
+                      <a:solidFill>
+                        <a:srgbClr val="CBD5E1"/>
+                      </a:solidFill>
+                    </a:lnB>
+                  </a:tcPr>
+                </a:tc>
+                <a:tc>
+                  <a:txBody>
+                    <a:bodyPr/>
+                    <a:lstStyle/>
+                    <a:p>
+                      <a:pPr>
+                        <a:spcBef>
+                          <a:spcPts val="100"/>
+                        </a:spcBef>
+                        <a:spcAft>
+                          <a:spcPts val="100"/>
+                        </a:spcAft>
+                      </a:pPr>
+                      <a:r>
+                        <a:rPr sz="1100" b="0">
+                          <a:solidFill>
+                            <a:srgbClr val="1E293B"/>
+                          </a:solidFill>
+                          <a:latin typeface="Calibri"/>
+                        </a:rPr>
+                        <a:t>✔ Pass</a:t>
+                      </a:r>
+                    </a:p>
+                  </a:txBody>
+                  <a:tcPr anchor="ctr" marL="73152" marR="73152" marT="27432" marB="27432">
+                    <a:solidFill>
+                      <a:srgbClr val="EEF2FF"/>
+                    </a:solidFill>
+                    <a:lnL w="12700">
+                      <a:solidFill>
+                        <a:srgbClr val="CBD5E1"/>
+                      </a:solidFill>
+                    </a:lnL>
+                    <a:lnR w="12700">
+                      <a:solidFill>
+                        <a:srgbClr val="CBD5E1"/>
+                      </a:solidFill>
+                    </a:lnR>
+                    <a:lnT w="12700">
+                      <a:solidFill>
+                        <a:srgbClr val="CBD5E1"/>
+                      </a:solidFill>
+                    </a:lnT>
+                    <a:lnB w="12700">
+                      <a:solidFill>
+                        <a:srgbClr val="CBD5E1"/>
+                      </a:solidFill>
+                    </a:lnB>
+                  </a:tcPr>
+                </a:tc>
+              </a:tr>
+              <a:tr h="438912">
+                <a:tc>
+                  <a:txBody>
+                    <a:bodyPr/>
+                    <a:lstStyle/>
+                    <a:p>
+                      <a:pPr>
+                        <a:spcBef>
+                          <a:spcPts val="100"/>
+                        </a:spcBef>
+                        <a:spcAft>
+                          <a:spcPts val="100"/>
+                        </a:spcAft>
+                      </a:pPr>
+                      <a:r>
+                        <a:rPr sz="1100" b="0">
+                          <a:solidFill>
+                            <a:srgbClr val="1E293B"/>
+                          </a:solidFill>
+                          <a:latin typeface="Calibri"/>
+                        </a:rPr>
+                        <a:t>T5</a:t>
+                      </a:r>
+                    </a:p>
+                  </a:txBody>
+                  <a:tcPr anchor="ctr" marL="73152" marR="73152" marT="27432" marB="27432">
+                    <a:solidFill>
+                      <a:srgbClr val="FFFFFF"/>
+                    </a:solidFill>
+                    <a:lnL w="12700">
+                      <a:solidFill>
+                        <a:srgbClr val="CBD5E1"/>
+                      </a:solidFill>
+                    </a:lnL>
+                    <a:lnR w="12700">
+                      <a:solidFill>
+                        <a:srgbClr val="CBD5E1"/>
+                      </a:solidFill>
+                    </a:lnR>
+                    <a:lnT w="12700">
+                      <a:solidFill>
+                        <a:srgbClr val="CBD5E1"/>
+                      </a:solidFill>
+                    </a:lnT>
+                    <a:lnB w="12700">
+                      <a:solidFill>
+                        <a:srgbClr val="CBD5E1"/>
+                      </a:solidFill>
+                    </a:lnB>
+                  </a:tcPr>
+                </a:tc>
+                <a:tc>
+                  <a:txBody>
+                    <a:bodyPr/>
+                    <a:lstStyle/>
+                    <a:p>
+                      <a:pPr>
+                        <a:spcBef>
+                          <a:spcPts val="100"/>
+                        </a:spcBef>
+                        <a:spcAft>
+                          <a:spcPts val="100"/>
+                        </a:spcAft>
+                      </a:pPr>
+                      <a:r>
+                        <a:rPr sz="1100" b="0">
+                          <a:solidFill>
+                            <a:srgbClr val="1E293B"/>
+                          </a:solidFill>
+                          <a:latin typeface="Calibri"/>
+                        </a:rPr>
+                        <a:t>Faculty updates progress</a:t>
+                      </a:r>
+                    </a:p>
+                  </a:txBody>
+                  <a:tcPr anchor="ctr" marL="73152" marR="73152" marT="27432" marB="27432">
+                    <a:solidFill>
+                      <a:srgbClr val="FFFFFF"/>
+                    </a:solidFill>
+                    <a:lnL w="12700">
+                      <a:solidFill>
+                        <a:srgbClr val="CBD5E1"/>
+                      </a:solidFill>
+                    </a:lnL>
+                    <a:lnR w="12700">
+                      <a:solidFill>
+                        <a:srgbClr val="CBD5E1"/>
+                      </a:solidFill>
+                    </a:lnR>
+                    <a:lnT w="12700">
+                      <a:solidFill>
+                        <a:srgbClr val="CBD5E1"/>
+                      </a:solidFill>
+                    </a:lnT>
+                    <a:lnB w="12700">
+                      <a:solidFill>
+                        <a:srgbClr val="CBD5E1"/>
+                      </a:solidFill>
+                    </a:lnB>
+                  </a:tcPr>
+                </a:tc>
+                <a:tc>
+                  <a:txBody>
+                    <a:bodyPr/>
+                    <a:lstStyle/>
+                    <a:p>
+                      <a:pPr>
+                        <a:spcBef>
+                          <a:spcPts val="100"/>
+                        </a:spcBef>
+                        <a:spcAft>
+                          <a:spcPts val="100"/>
+                        </a:spcAft>
+                      </a:pPr>
+                      <a:r>
+                        <a:rPr sz="1100" b="0">
+                          <a:solidFill>
+                            <a:srgbClr val="1E293B"/>
+                          </a:solidFill>
+                          <a:latin typeface="Calibri"/>
+                        </a:rPr>
+                        <a:t>% saved, activity logged</a:t>
+                      </a:r>
+                    </a:p>
+                  </a:txBody>
+                  <a:tcPr anchor="ctr" marL="73152" marR="73152" marT="27432" marB="27432">
+                    <a:solidFill>
+                      <a:srgbClr val="FFFFFF"/>
+                    </a:solidFill>
+                    <a:lnL w="12700">
+                      <a:solidFill>
+                        <a:srgbClr val="CBD5E1"/>
+                      </a:solidFill>
+                    </a:lnL>
+                    <a:lnR w="12700">
+                      <a:solidFill>
+                        <a:srgbClr val="CBD5E1"/>
+                      </a:solidFill>
+                    </a:lnR>
+                    <a:lnT w="12700">
+                      <a:solidFill>
+                        <a:srgbClr val="CBD5E1"/>
+                      </a:solidFill>
+                    </a:lnT>
+                    <a:lnB w="12700">
+                      <a:solidFill>
+                        <a:srgbClr val="CBD5E1"/>
+                      </a:solidFill>
+                    </a:lnB>
+                  </a:tcPr>
+                </a:tc>
+                <a:tc>
+                  <a:txBody>
+                    <a:bodyPr/>
+                    <a:lstStyle/>
+                    <a:p>
+                      <a:pPr>
+                        <a:spcBef>
+                          <a:spcPts val="100"/>
+                        </a:spcBef>
+                        <a:spcAft>
+                          <a:spcPts val="100"/>
+                        </a:spcAft>
+                      </a:pPr>
+                      <a:r>
+                        <a:rPr sz="1100" b="0">
+                          <a:solidFill>
+                            <a:srgbClr val="1E293B"/>
+                          </a:solidFill>
+                          <a:latin typeface="Calibri"/>
+                        </a:rPr>
+                        <a:t>✔ Pass</a:t>
+                      </a:r>
+                    </a:p>
+                  </a:txBody>
+                  <a:tcPr anchor="ctr" marL="73152" marR="73152" marT="27432" marB="27432">
+                    <a:solidFill>
+                      <a:srgbClr val="FFFFFF"/>
+                    </a:solidFill>
+                    <a:lnL w="12700">
+                      <a:solidFill>
+                        <a:srgbClr val="CBD5E1"/>
+                      </a:solidFill>
+                    </a:lnL>
+                    <a:lnR w="12700">
+                      <a:solidFill>
+                        <a:srgbClr val="CBD5E1"/>
+                      </a:solidFill>
+                    </a:lnR>
+                    <a:lnT w="12700">
+                      <a:solidFill>
+                        <a:srgbClr val="CBD5E1"/>
+                      </a:solidFill>
+                    </a:lnT>
+                    <a:lnB w="12700">
+                      <a:solidFill>
+                        <a:srgbClr val="CBD5E1"/>
+                      </a:solidFill>
+                    </a:lnB>
+                  </a:tcPr>
+                </a:tc>
+              </a:tr>
+              <a:tr h="438912">
+                <a:tc>
+                  <a:txBody>
+                    <a:bodyPr/>
+                    <a:lstStyle/>
+                    <a:p>
+                      <a:pPr>
+                        <a:spcBef>
+                          <a:spcPts val="100"/>
+                        </a:spcBef>
+                        <a:spcAft>
+                          <a:spcPts val="100"/>
+                        </a:spcAft>
+                      </a:pPr>
+                      <a:r>
+                        <a:rPr sz="1100" b="0">
+                          <a:solidFill>
+                            <a:srgbClr val="1E293B"/>
+                          </a:solidFill>
+                          <a:latin typeface="Calibri"/>
+                        </a:rPr>
+                        <a:t>T6</a:t>
+                      </a:r>
+                    </a:p>
+                  </a:txBody>
+                  <a:tcPr anchor="ctr" marL="73152" marR="73152" marT="27432" marB="27432">
+                    <a:solidFill>
+                      <a:srgbClr val="EEF2FF"/>
+                    </a:solidFill>
+                    <a:lnL w="12700">
+                      <a:solidFill>
+                        <a:srgbClr val="CBD5E1"/>
+                      </a:solidFill>
+                    </a:lnL>
+                    <a:lnR w="12700">
+                      <a:solidFill>
+                        <a:srgbClr val="CBD5E1"/>
+                      </a:solidFill>
+                    </a:lnR>
+                    <a:lnT w="12700">
+                      <a:solidFill>
+                        <a:srgbClr val="CBD5E1"/>
+                      </a:solidFill>
+                    </a:lnT>
+                    <a:lnB w="12700">
+                      <a:solidFill>
+                        <a:srgbClr val="CBD5E1"/>
+                      </a:solidFill>
+                    </a:lnB>
+                  </a:tcPr>
+                </a:tc>
+                <a:tc>
+                  <a:txBody>
+                    <a:bodyPr/>
+                    <a:lstStyle/>
+                    <a:p>
+                      <a:pPr>
+                        <a:spcBef>
+                          <a:spcPts val="100"/>
+                        </a:spcBef>
+                        <a:spcAft>
+                          <a:spcPts val="100"/>
+                        </a:spcAft>
+                      </a:pPr>
+                      <a:r>
+                        <a:rPr sz="1100" b="0">
+                          <a:solidFill>
+                            <a:srgbClr val="1E293B"/>
+                          </a:solidFill>
+                          <a:latin typeface="Calibri"/>
+                        </a:rPr>
+                        <a:t>HOD → Principal approval</a:t>
+                      </a:r>
+                    </a:p>
+                  </a:txBody>
+                  <a:tcPr anchor="ctr" marL="73152" marR="73152" marT="27432" marB="27432">
+                    <a:solidFill>
+                      <a:srgbClr val="EEF2FF"/>
+                    </a:solidFill>
+                    <a:lnL w="12700">
+                      <a:solidFill>
+                        <a:srgbClr val="CBD5E1"/>
+                      </a:solidFill>
+                    </a:lnL>
+                    <a:lnR w="12700">
+                      <a:solidFill>
+                        <a:srgbClr val="CBD5E1"/>
+                      </a:solidFill>
+                    </a:lnR>
+                    <a:lnT w="12700">
+                      <a:solidFill>
+                        <a:srgbClr val="CBD5E1"/>
+                      </a:solidFill>
+                    </a:lnT>
+                    <a:lnB w="12700">
+                      <a:solidFill>
+                        <a:srgbClr val="CBD5E1"/>
+                      </a:solidFill>
+                    </a:lnB>
+                  </a:tcPr>
+                </a:tc>
+                <a:tc>
+                  <a:txBody>
+                    <a:bodyPr/>
+                    <a:lstStyle/>
+                    <a:p>
+                      <a:pPr>
+                        <a:spcBef>
+                          <a:spcPts val="100"/>
+                        </a:spcBef>
+                        <a:spcAft>
+                          <a:spcPts val="100"/>
+                        </a:spcAft>
+                      </a:pPr>
+                      <a:r>
+                        <a:rPr sz="1100" b="0">
+                          <a:solidFill>
+                            <a:srgbClr val="1E293B"/>
+                          </a:solidFill>
+                          <a:latin typeface="Calibri"/>
+                        </a:rPr>
+                        <a:t>Stage advances, comments stored</a:t>
+                      </a:r>
+                    </a:p>
+                  </a:txBody>
+                  <a:tcPr anchor="ctr" marL="73152" marR="73152" marT="27432" marB="27432">
+                    <a:solidFill>
+                      <a:srgbClr val="EEF2FF"/>
+                    </a:solidFill>
+                    <a:lnL w="12700">
+                      <a:solidFill>
+                        <a:srgbClr val="CBD5E1"/>
+                      </a:solidFill>
+                    </a:lnL>
+                    <a:lnR w="12700">
+                      <a:solidFill>
+                        <a:srgbClr val="CBD5E1"/>
+                      </a:solidFill>
+                    </a:lnR>
+                    <a:lnT w="12700">
+                      <a:solidFill>
+                        <a:srgbClr val="CBD5E1"/>
+                      </a:solidFill>
+                    </a:lnT>
+                    <a:lnB w="12700">
+                      <a:solidFill>
+                        <a:srgbClr val="CBD5E1"/>
+                      </a:solidFill>
+                    </a:lnB>
+                  </a:tcPr>
+                </a:tc>
+                <a:tc>
+                  <a:txBody>
+                    <a:bodyPr/>
+                    <a:lstStyle/>
+                    <a:p>
+                      <a:pPr>
+                        <a:spcBef>
+                          <a:spcPts val="100"/>
+                        </a:spcBef>
+                        <a:spcAft>
+                          <a:spcPts val="100"/>
+                        </a:spcAft>
+                      </a:pPr>
+                      <a:r>
+                        <a:rPr sz="1100" b="0">
+                          <a:solidFill>
+                            <a:srgbClr val="1E293B"/>
+                          </a:solidFill>
+                          <a:latin typeface="Calibri"/>
+                        </a:rPr>
+                        <a:t>✔ Pass</a:t>
+                      </a:r>
+                    </a:p>
+                  </a:txBody>
+                  <a:tcPr anchor="ctr" marL="73152" marR="73152" marT="27432" marB="27432">
+                    <a:solidFill>
+                      <a:srgbClr val="EEF2FF"/>
+                    </a:solidFill>
+                    <a:lnL w="12700">
+                      <a:solidFill>
+                        <a:srgbClr val="CBD5E1"/>
+                      </a:solidFill>
+                    </a:lnL>
+                    <a:lnR w="12700">
+                      <a:solidFill>
+                        <a:srgbClr val="CBD5E1"/>
+                      </a:solidFill>
+                    </a:lnR>
+                    <a:lnT w="12700">
+                      <a:solidFill>
+                        <a:srgbClr val="CBD5E1"/>
+                      </a:solidFill>
+                    </a:lnT>
+                    <a:lnB w="12700">
+                      <a:solidFill>
+                        <a:srgbClr val="CBD5E1"/>
+                      </a:solidFill>
+                    </a:lnB>
+                  </a:tcPr>
+                </a:tc>
+              </a:tr>
+              <a:tr h="438912">
+                <a:tc>
+                  <a:txBody>
+                    <a:bodyPr/>
+                    <a:lstStyle/>
+                    <a:p>
+                      <a:pPr>
+                        <a:spcBef>
+                          <a:spcPts val="100"/>
+                        </a:spcBef>
+                        <a:spcAft>
+                          <a:spcPts val="100"/>
+                        </a:spcAft>
+                      </a:pPr>
+                      <a:r>
+                        <a:rPr sz="1100" b="0">
+                          <a:solidFill>
+                            <a:srgbClr val="1E293B"/>
+                          </a:solidFill>
+                          <a:latin typeface="Calibri"/>
+                        </a:rPr>
+                        <a:t>T7</a:t>
+                      </a:r>
+                    </a:p>
+                  </a:txBody>
+                  <a:tcPr anchor="ctr" marL="73152" marR="73152" marT="27432" marB="27432">
+                    <a:solidFill>
+                      <a:srgbClr val="FFFFFF"/>
+                    </a:solidFill>
+                    <a:lnL w="12700">
+                      <a:solidFill>
+                        <a:srgbClr val="CBD5E1"/>
+                      </a:solidFill>
+                    </a:lnL>
+                    <a:lnR w="12700">
+                      <a:solidFill>
+                        <a:srgbClr val="CBD5E1"/>
+                      </a:solidFill>
+                    </a:lnR>
+                    <a:lnT w="12700">
+                      <a:solidFill>
+                        <a:srgbClr val="CBD5E1"/>
+                      </a:solidFill>
+                    </a:lnT>
+                    <a:lnB w="12700">
+                      <a:solidFill>
+                        <a:srgbClr val="CBD5E1"/>
+                      </a:solidFill>
+                    </a:lnB>
+                  </a:tcPr>
+                </a:tc>
+                <a:tc>
+                  <a:txBody>
+                    <a:bodyPr/>
+                    <a:lstStyle/>
+                    <a:p>
+                      <a:pPr>
+                        <a:spcBef>
+                          <a:spcPts val="100"/>
+                        </a:spcBef>
+                        <a:spcAft>
+                          <a:spcPts val="100"/>
+                        </a:spcAft>
+                      </a:pPr>
+                      <a:r>
+                        <a:rPr sz="1100" b="0">
+                          <a:solidFill>
+                            <a:srgbClr val="1E293B"/>
+                          </a:solidFill>
+                          <a:latin typeface="Calibri"/>
+                        </a:rPr>
+                        <a:t>Overdue task scored</a:t>
+                      </a:r>
+                    </a:p>
+                  </a:txBody>
+                  <a:tcPr anchor="ctr" marL="73152" marR="73152" marT="27432" marB="27432">
+                    <a:solidFill>
+                      <a:srgbClr val="FFFFFF"/>
+                    </a:solidFill>
+                    <a:lnL w="12700">
+                      <a:solidFill>
+                        <a:srgbClr val="CBD5E1"/>
+                      </a:solidFill>
+                    </a:lnL>
+                    <a:lnR w="12700">
+                      <a:solidFill>
+                        <a:srgbClr val="CBD5E1"/>
+                      </a:solidFill>
+                    </a:lnR>
+                    <a:lnT w="12700">
+                      <a:solidFill>
+                        <a:srgbClr val="CBD5E1"/>
+                      </a:solidFill>
+                    </a:lnT>
+                    <a:lnB w="12700">
+                      <a:solidFill>
+                        <a:srgbClr val="CBD5E1"/>
+                      </a:solidFill>
+                    </a:lnB>
+                  </a:tcPr>
+                </a:tc>
+                <a:tc>
+                  <a:txBody>
+                    <a:bodyPr/>
+                    <a:lstStyle/>
+                    <a:p>
+                      <a:pPr>
+                        <a:spcBef>
+                          <a:spcPts val="100"/>
+                        </a:spcBef>
+                        <a:spcAft>
+                          <a:spcPts val="100"/>
+                        </a:spcAft>
+                      </a:pPr>
+                      <a:r>
+                        <a:rPr sz="1100" b="0">
+                          <a:solidFill>
+                            <a:srgbClr val="1E293B"/>
+                          </a:solidFill>
+                          <a:latin typeface="Calibri"/>
+                        </a:rPr>
+                        <a:t>HIGH badge + factor strings</a:t>
+                      </a:r>
+                    </a:p>
+                  </a:txBody>
+                  <a:tcPr anchor="ctr" marL="73152" marR="73152" marT="27432" marB="27432">
+                    <a:solidFill>
+                      <a:srgbClr val="FFFFFF"/>
+                    </a:solidFill>
+                    <a:lnL w="12700">
+                      <a:solidFill>
+                        <a:srgbClr val="CBD5E1"/>
+                      </a:solidFill>
+                    </a:lnL>
+                    <a:lnR w="12700">
+                      <a:solidFill>
+                        <a:srgbClr val="CBD5E1"/>
+                      </a:solidFill>
+                    </a:lnR>
+                    <a:lnT w="12700">
+                      <a:solidFill>
+                        <a:srgbClr val="CBD5E1"/>
+                      </a:solidFill>
+                    </a:lnT>
+                    <a:lnB w="12700">
+                      <a:solidFill>
+                        <a:srgbClr val="CBD5E1"/>
+                      </a:solidFill>
+                    </a:lnB>
+                  </a:tcPr>
+                </a:tc>
+                <a:tc>
+                  <a:txBody>
+                    <a:bodyPr/>
+                    <a:lstStyle/>
+                    <a:p>
+                      <a:pPr>
+                        <a:spcBef>
+                          <a:spcPts val="100"/>
+                        </a:spcBef>
+                        <a:spcAft>
+                          <a:spcPts val="100"/>
+                        </a:spcAft>
+                      </a:pPr>
+                      <a:r>
+                        <a:rPr sz="1100" b="0">
+                          <a:solidFill>
+                            <a:srgbClr val="1E293B"/>
+                          </a:solidFill>
+                          <a:latin typeface="Calibri"/>
+                        </a:rPr>
+                        <a:t>✔ Pass</a:t>
+                      </a:r>
+                    </a:p>
+                  </a:txBody>
+                  <a:tcPr anchor="ctr" marL="73152" marR="73152" marT="27432" marB="27432">
+                    <a:solidFill>
+                      <a:srgbClr val="FFFFFF"/>
+                    </a:solidFill>
+                    <a:lnL w="12700">
+                      <a:solidFill>
+                        <a:srgbClr val="CBD5E1"/>
+                      </a:solidFill>
+                    </a:lnL>
+                    <a:lnR w="12700">
+                      <a:solidFill>
+                        <a:srgbClr val="CBD5E1"/>
+                      </a:solidFill>
+                    </a:lnR>
+                    <a:lnT w="12700">
+                      <a:solidFill>
+                        <a:srgbClr val="CBD5E1"/>
+                      </a:solidFill>
+                    </a:lnT>
+                    <a:lnB w="12700">
+                      <a:solidFill>
+                        <a:srgbClr val="CBD5E1"/>
+                      </a:solidFill>
+                    </a:lnB>
+                  </a:tcPr>
+                </a:tc>
+              </a:tr>
+              <a:tr h="438912">
+                <a:tc>
+                  <a:txBody>
+                    <a:bodyPr/>
+                    <a:lstStyle/>
+                    <a:p>
+                      <a:pPr>
+                        <a:spcBef>
+                          <a:spcPts val="100"/>
+                        </a:spcBef>
+                        <a:spcAft>
+                          <a:spcPts val="100"/>
+                        </a:spcAft>
+                      </a:pPr>
+                      <a:r>
+                        <a:rPr sz="1100" b="0">
+                          <a:solidFill>
+                            <a:srgbClr val="1E293B"/>
+                          </a:solidFill>
+                          <a:latin typeface="Calibri"/>
+                        </a:rPr>
+                        <a:t>T8</a:t>
+                      </a:r>
+                    </a:p>
+                  </a:txBody>
+                  <a:tcPr anchor="ctr" marL="73152" marR="73152" marT="27432" marB="27432">
+                    <a:solidFill>
+                      <a:srgbClr val="EEF2FF"/>
+                    </a:solidFill>
+                    <a:lnL w="12700">
+                      <a:solidFill>
+                        <a:srgbClr val="CBD5E1"/>
+                      </a:solidFill>
+                    </a:lnL>
+                    <a:lnR w="12700">
+                      <a:solidFill>
+                        <a:srgbClr val="CBD5E1"/>
+                      </a:solidFill>
+                    </a:lnR>
+                    <a:lnT w="12700">
+                      <a:solidFill>
+                        <a:srgbClr val="CBD5E1"/>
+                      </a:solidFill>
+                    </a:lnT>
+                    <a:lnB w="12700">
+                      <a:solidFill>
+                        <a:srgbClr val="CBD5E1"/>
+                      </a:solidFill>
+                    </a:lnB>
+                  </a:tcPr>
+                </a:tc>
+                <a:tc>
+                  <a:txBody>
+                    <a:bodyPr/>
+                    <a:lstStyle/>
+                    <a:p>
+                      <a:pPr>
+                        <a:spcBef>
+                          <a:spcPts val="100"/>
+                        </a:spcBef>
+                        <a:spcAft>
+                          <a:spcPts val="100"/>
+                        </a:spcAft>
+                      </a:pPr>
+                      <a:r>
+                        <a:rPr sz="1100" b="0">
+                          <a:solidFill>
+                            <a:srgbClr val="1E293B"/>
+                          </a:solidFill>
+                          <a:latin typeface="Calibri"/>
+                        </a:rPr>
+                        <a:t>Daily 8 AM scheduler run</a:t>
+                      </a:r>
+                    </a:p>
+                  </a:txBody>
+                  <a:tcPr anchor="ctr" marL="73152" marR="73152" marT="27432" marB="27432">
+                    <a:solidFill>
+                      <a:srgbClr val="EEF2FF"/>
+                    </a:solidFill>
+                    <a:lnL w="12700">
+                      <a:solidFill>
+                        <a:srgbClr val="CBD5E1"/>
+                      </a:solidFill>
+                    </a:lnL>
+                    <a:lnR w="12700">
+                      <a:solidFill>
+                        <a:srgbClr val="CBD5E1"/>
+                      </a:solidFill>
+                    </a:lnR>
+                    <a:lnT w="12700">
+                      <a:solidFill>
+                        <a:srgbClr val="CBD5E1"/>
+                      </a:solidFill>
+                    </a:lnT>
+                    <a:lnB w="12700">
+                      <a:solidFill>
+                        <a:srgbClr val="CBD5E1"/>
+                      </a:solidFill>
+                    </a:lnB>
+                  </a:tcPr>
+                </a:tc>
+                <a:tc>
+                  <a:txBody>
+                    <a:bodyPr/>
+                    <a:lstStyle/>
+                    <a:p>
+                      <a:pPr>
+                        <a:spcBef>
+                          <a:spcPts val="100"/>
+                        </a:spcBef>
+                        <a:spcAft>
+                          <a:spcPts val="100"/>
+                        </a:spcAft>
+                      </a:pPr>
+                      <a:r>
+                        <a:rPr sz="1100" b="0">
+                          <a:solidFill>
+                            <a:srgbClr val="1E293B"/>
+                          </a:solidFill>
+                          <a:latin typeface="Calibri"/>
+                        </a:rPr>
+                        <a:t>Deadline reminders created</a:t>
+                      </a:r>
+                    </a:p>
+                  </a:txBody>
+                  <a:tcPr anchor="ctr" marL="73152" marR="73152" marT="27432" marB="27432">
+                    <a:solidFill>
+                      <a:srgbClr val="EEF2FF"/>
+                    </a:solidFill>
+                    <a:lnL w="12700">
+                      <a:solidFill>
+                        <a:srgbClr val="CBD5E1"/>
+                      </a:solidFill>
+                    </a:lnL>
+                    <a:lnR w="12700">
+                      <a:solidFill>
+                        <a:srgbClr val="CBD5E1"/>
+                      </a:solidFill>
+                    </a:lnR>
+                    <a:lnT w="12700">
+                      <a:solidFill>
+                        <a:srgbClr val="CBD5E1"/>
+                      </a:solidFill>
+                    </a:lnT>
+                    <a:lnB w="12700">
+                      <a:solidFill>
+                        <a:srgbClr val="CBD5E1"/>
+                      </a:solidFill>
+                    </a:lnB>
+                  </a:tcPr>
+                </a:tc>
+                <a:tc>
+                  <a:txBody>
+                    <a:bodyPr/>
+                    <a:lstStyle/>
+                    <a:p>
+                      <a:pPr>
+                        <a:spcBef>
+                          <a:spcPts val="100"/>
+                        </a:spcBef>
+                        <a:spcAft>
+                          <a:spcPts val="100"/>
+                        </a:spcAft>
+                      </a:pPr>
+                      <a:r>
+                        <a:rPr sz="1100" b="0">
+                          <a:solidFill>
+                            <a:srgbClr val="1E293B"/>
+                          </a:solidFill>
+                          <a:latin typeface="Calibri"/>
+                        </a:rPr>
+                        <a:t>✔ Pass</a:t>
+                      </a:r>
+                    </a:p>
+                  </a:txBody>
+                  <a:tcPr anchor="ctr" marL="73152" marR="73152" marT="27432" marB="27432">
+                    <a:solidFill>
+                      <a:srgbClr val="EEF2FF"/>
+                    </a:solidFill>
+                    <a:lnL w="12700">
+                      <a:solidFill>
+                        <a:srgbClr val="CBD5E1"/>
+                      </a:solidFill>
+                    </a:lnL>
+                    <a:lnR w="12700">
+                      <a:solidFill>
+                        <a:srgbClr val="CBD5E1"/>
+                      </a:solidFill>
+                    </a:lnR>
+                    <a:lnT w="12700">
+                      <a:solidFill>
+                        <a:srgbClr val="CBD5E1"/>
+                      </a:solidFill>
+                    </a:lnT>
+                    <a:lnB w="12700">
+                      <a:solidFill>
+                        <a:srgbClr val="CBD5E1"/>
+                      </a:solidFill>
+                    </a:lnB>
+                  </a:tcPr>
+                </a:tc>
+              </a:tr>
+              <a:tr h="438912">
+                <a:tc>
+                  <a:txBody>
+                    <a:bodyPr/>
+                    <a:lstStyle/>
+                    <a:p>
+                      <a:pPr>
+                        <a:spcBef>
+                          <a:spcPts val="100"/>
+                        </a:spcBef>
+                        <a:spcAft>
+                          <a:spcPts val="100"/>
+                        </a:spcAft>
+                      </a:pPr>
+                      <a:r>
+                        <a:rPr sz="1100" b="0">
+                          <a:solidFill>
+                            <a:srgbClr val="1E293B"/>
+                          </a:solidFill>
+                          <a:latin typeface="Calibri"/>
+                        </a:rPr>
+                        <a:t>T9</a:t>
+                      </a:r>
+                    </a:p>
+                  </a:txBody>
+                  <a:tcPr anchor="ctr" marL="73152" marR="73152" marT="27432" marB="27432">
+                    <a:solidFill>
+                      <a:srgbClr val="FFFFFF"/>
+                    </a:solidFill>
+                    <a:lnL w="12700">
+                      <a:solidFill>
+                        <a:srgbClr val="CBD5E1"/>
+                      </a:solidFill>
+                    </a:lnL>
+                    <a:lnR w="12700">
+                      <a:solidFill>
+                        <a:srgbClr val="CBD5E1"/>
+                      </a:solidFill>
+                    </a:lnR>
+                    <a:lnT w="12700">
+                      <a:solidFill>
+                        <a:srgbClr val="CBD5E1"/>
+                      </a:solidFill>
+                    </a:lnT>
+                    <a:lnB w="12700">
+                      <a:solidFill>
+                        <a:srgbClr val="CBD5E1"/>
+                      </a:solidFill>
+                    </a:lnB>
+                  </a:tcPr>
+                </a:tc>
+                <a:tc>
+                  <a:txBody>
+                    <a:bodyPr/>
+                    <a:lstStyle/>
+                    <a:p>
+                      <a:pPr>
+                        <a:spcBef>
+                          <a:spcPts val="100"/>
+                        </a:spcBef>
+                        <a:spcAft>
+                          <a:spcPts val="100"/>
+                        </a:spcAft>
+                      </a:pPr>
+                      <a:r>
+                        <a:rPr sz="1100" b="0">
+                          <a:solidFill>
+                            <a:srgbClr val="1E293B"/>
+                          </a:solidFill>
+                          <a:latin typeface="Calibri"/>
+                        </a:rPr>
+                        <a:t>Report export</a:t>
+                      </a:r>
+                    </a:p>
+                  </a:txBody>
+                  <a:tcPr anchor="ctr" marL="73152" marR="73152" marT="27432" marB="27432">
+                    <a:solidFill>
+                      <a:srgbClr val="FFFFFF"/>
+                    </a:solidFill>
+                    <a:lnL w="12700">
+                      <a:solidFill>
+                        <a:srgbClr val="CBD5E1"/>
+                      </a:solidFill>
+                    </a:lnL>
+                    <a:lnR w="12700">
+                      <a:solidFill>
+                        <a:srgbClr val="CBD5E1"/>
+                      </a:solidFill>
+                    </a:lnR>
+                    <a:lnT w="12700">
+                      <a:solidFill>
+                        <a:srgbClr val="CBD5E1"/>
+                      </a:solidFill>
+                    </a:lnT>
+                    <a:lnB w="12700">
+                      <a:solidFill>
+                        <a:srgbClr val="CBD5E1"/>
+                      </a:solidFill>
+                    </a:lnB>
+                  </a:tcPr>
+                </a:tc>
+                <a:tc>
+                  <a:txBody>
+                    <a:bodyPr/>
+                    <a:lstStyle/>
+                    <a:p>
+                      <a:pPr>
+                        <a:spcBef>
+                          <a:spcPts val="100"/>
+                        </a:spcBef>
+                        <a:spcAft>
+                          <a:spcPts val="100"/>
+                        </a:spcAft>
+                      </a:pPr>
+                      <a:r>
+                        <a:rPr sz="1100" b="0">
+                          <a:solidFill>
+                            <a:srgbClr val="1E293B"/>
+                          </a:solidFill>
+                          <a:latin typeface="Calibri"/>
+                        </a:rPr>
+                        <a:t>Department summary downloads</a:t>
+                      </a:r>
+                    </a:p>
+                  </a:txBody>
+                  <a:tcPr anchor="ctr" marL="73152" marR="73152" marT="27432" marB="27432">
+                    <a:solidFill>
+                      <a:srgbClr val="FFFFFF"/>
+                    </a:solidFill>
+                    <a:lnL w="12700">
+                      <a:solidFill>
+                        <a:srgbClr val="CBD5E1"/>
+                      </a:solidFill>
+                    </a:lnL>
+                    <a:lnR w="12700">
+                      <a:solidFill>
+                        <a:srgbClr val="CBD5E1"/>
+                      </a:solidFill>
+                    </a:lnR>
+                    <a:lnT w="12700">
+                      <a:solidFill>
+                        <a:srgbClr val="CBD5E1"/>
+                      </a:solidFill>
+                    </a:lnT>
+                    <a:lnB w="12700">
+                      <a:solidFill>
+                        <a:srgbClr val="CBD5E1"/>
+                      </a:solidFill>
+                    </a:lnB>
+                  </a:tcPr>
+                </a:tc>
+                <a:tc>
+                  <a:txBody>
+                    <a:bodyPr/>
+                    <a:lstStyle/>
+                    <a:p>
+                      <a:pPr>
+                        <a:spcBef>
+                          <a:spcPts val="100"/>
+                        </a:spcBef>
+                        <a:spcAft>
+                          <a:spcPts val="100"/>
+                        </a:spcAft>
+                      </a:pPr>
+                      <a:r>
+                        <a:rPr sz="1100" b="0">
+                          <a:solidFill>
+                            <a:srgbClr val="1E293B"/>
+                          </a:solidFill>
+                          <a:latin typeface="Calibri"/>
+                        </a:rPr>
+                        <a:t>◐ Partial</a:t>
+                      </a:r>
+                    </a:p>
+                  </a:txBody>
+                  <a:tcPr anchor="ctr" marL="73152" marR="73152" marT="27432" marB="27432">
+                    <a:solidFill>
+                      <a:srgbClr val="FFFFFF"/>
+                    </a:solidFill>
+                    <a:lnL w="12700">
+                      <a:solidFill>
+                        <a:srgbClr val="CBD5E1"/>
+                      </a:solidFill>
+                    </a:lnL>
+                    <a:lnR w="12700">
+                      <a:solidFill>
+                        <a:srgbClr val="CBD5E1"/>
+                      </a:solidFill>
+                    </a:lnR>
+                    <a:lnT w="12700">
+                      <a:solidFill>
+                        <a:srgbClr val="CBD5E1"/>
+                      </a:solidFill>
+                    </a:lnT>
+                    <a:lnB w="12700">
+                      <a:solidFill>
+                        <a:srgbClr val="CBD5E1"/>
+                      </a:solidFill>
+                    </a:lnB>
+                  </a:tcPr>
+                </a:tc>
+              </a:tr>
+            </a:tbl>
+          </a:graphicData>
+        </a:graphic>
+      </p:graphicFrame>
+      <p:sp>
+        <p:nvSpPr>
+          <p:cNvPr id="8" name="Rounded Rectangle 7"/>
+          <p:cNvSpPr/>
+          <p:nvPr/>
+        </p:nvSpPr>
+        <p:spPr>
+          <a:xfrm>
+            <a:off x="411480" y="5943600"/>
+            <a:ext cx="11365992" cy="411480"/>
+          </a:xfrm>
+          <a:prstGeom prst="roundRect">
+            <a:avLst/>
+          </a:prstGeom>
+          <a:solidFill>
+            <a:srgbClr val="EEF2FF"/>
+          </a:solidFill>
+          <a:ln>
+            <a:noFill/>
+          </a:ln>
+          <a:effectLst/>
+        </p:spPr>
+        <p:style>
+          <a:lnRef idx="1">
+            <a:schemeClr val="accent1"/>
+          </a:lnRef>
+          <a:fillRef idx="3">
+            <a:schemeClr val="accent1"/>
+          </a:fillRef>
+          <a:effectRef idx="2">
+            <a:schemeClr val="accent1"/>
+          </a:effectRef>
+          <a:fontRef idx="minor">
+            <a:schemeClr val="lt1"/>
+          </a:fontRef>
+        </p:style>
+        <p:txBody>
+          <a:bodyPr rtlCol="0" anchor="ctr" wrap="square" lIns="27432" rIns="27432" tIns="36576" bIns="36576"/>
+          <a:lstStyle/>
+          <a:p>
+            <a:pPr algn="ctr">
+              <a:spcBef>
+                <a:spcPts val="0"/>
+              </a:spcBef>
+              <a:spcAft>
+                <a:spcPts val="0"/>
+              </a:spcAft>
+            </a:pPr>
+            <a:r>
+              <a:rPr sz="1000" b="0" i="0">
+                <a:solidFill>
+                  <a:srgbClr val="64748B"/>
+                </a:solidFill>
+                <a:latin typeface="Calibri"/>
+              </a:rPr>
+              <a:t>Method: manual functional testing via auto OpenAPI docs (/docs) + per-role UI walkthroughs  •  Automated suite + UAT in hardening phase (Oct)</a:t>
+            </a:r>
+          </a:p>
+        </p:txBody>
+      </p:sp>
+    </p:spTree>
+  </p:cSld>
+  <p:clrMapOvr>
+    <a:masterClrMapping/>
+  </p:clrMapOvr>
+</p:sld>
+</file>
+
+<file path=ppt/slides/slide29.xml><?xml version="1.0" encoding="utf-8"?>
+<p:sld xmlns:a="http://schemas.openxmlformats.org/drawingml/2006/main" xmlns:p="http://schemas.openxmlformats.org/presentationml/2006/main" xmlns:r="http://schemas.openxmlformats.org/officeDocument/2006/relationships">
+  <p:cSld>
+    <p:bg>
+      <p:bgPr>
+        <a:solidFill>
+          <a:srgbClr val="F3F6FC"/>
+        </a:solidFill>
+        <a:effectLst/>
+      </p:bgPr>
+    </p:bg>
+    <p:spTree>
+      <p:nvGrpSpPr>
+        <p:cNvPr id="1" name=""/>
+        <p:cNvGrpSpPr/>
+        <p:nvPr/>
+      </p:nvGrpSpPr>
+      <p:grpSpPr/>
+      <p:sp>
+        <p:nvSpPr>
+          <p:cNvPr id="2" name="Rectangle 1"/>
+          <p:cNvSpPr/>
+          <p:nvPr/>
+        </p:nvSpPr>
+        <p:spPr>
+          <a:xfrm>
+            <a:off x="0" y="0"/>
+            <a:ext cx="12191695" cy="1115568"/>
+          </a:xfrm>
+          <a:prstGeom prst="rect">
+            <a:avLst/>
+          </a:prstGeom>
+          <a:solidFill>
+            <a:srgbClr val="0B1E3B"/>
+          </a:solidFill>
+          <a:ln>
+            <a:noFill/>
+          </a:ln>
+          <a:effectLst/>
+        </p:spPr>
+        <p:style>
+          <a:lnRef idx="1">
+            <a:schemeClr val="accent1"/>
+          </a:lnRef>
+          <a:fillRef idx="3">
+            <a:schemeClr val="accent1"/>
+          </a:fillRef>
+          <a:effectRef idx="2">
+            <a:schemeClr val="accent1"/>
+          </a:effectRef>
+          <a:fontRef idx="minor">
+            <a:schemeClr val="lt1"/>
+          </a:fontRef>
+        </p:style>
+        <p:txBody>
+          <a:bodyPr rtlCol="0" anchor="ctr"/>
+          <a:lstStyle/>
+          <a:p>
+            <a:pPr algn="ctr"/>
+          </a:p>
+        </p:txBody>
+      </p:sp>
+      <p:sp>
+        <p:nvSpPr>
+          <p:cNvPr id="3" name="Rectangle 2"/>
+          <p:cNvSpPr/>
+          <p:nvPr/>
+        </p:nvSpPr>
+        <p:spPr>
+          <a:xfrm>
+            <a:off x="0" y="1115568"/>
+            <a:ext cx="12191695" cy="41148"/>
+          </a:xfrm>
+          <a:prstGeom prst="rect">
+            <a:avLst/>
+          </a:prstGeom>
+          <a:solidFill>
+            <a:srgbClr val="F59E0B"/>
+          </a:solidFill>
+          <a:ln>
+            <a:noFill/>
+          </a:ln>
+          <a:effectLst/>
+        </p:spPr>
+        <p:style>
+          <a:lnRef idx="1">
+            <a:schemeClr val="accent1"/>
+          </a:lnRef>
+          <a:fillRef idx="3">
+            <a:schemeClr val="accent1"/>
+          </a:fillRef>
+          <a:effectRef idx="2">
+            <a:schemeClr val="accent1"/>
+          </a:effectRef>
+          <a:fontRef idx="minor">
+            <a:schemeClr val="lt1"/>
+          </a:fontRef>
+        </p:style>
+        <p:txBody>
+          <a:bodyPr rtlCol="0" anchor="ctr"/>
+          <a:lstStyle/>
+          <a:p>
+            <a:pPr algn="ctr"/>
+          </a:p>
+        </p:txBody>
+      </p:sp>
+      <p:sp>
+        <p:nvSpPr>
+          <p:cNvPr id="4" name="Rectangle 3"/>
+          <p:cNvSpPr/>
+          <p:nvPr/>
+        </p:nvSpPr>
+        <p:spPr>
+          <a:xfrm>
+            <a:off x="411480" y="109728"/>
+            <a:ext cx="10058400" cy="914400"/>
+          </a:xfrm>
+          <a:prstGeom prst="rect">
+            <a:avLst/>
+          </a:prstGeom>
+          <a:noFill/>
+          <a:ln>
+            <a:noFill/>
+          </a:ln>
+          <a:effectLst/>
+        </p:spPr>
+        <p:style>
+          <a:lnRef idx="1">
+            <a:schemeClr val="accent1"/>
+          </a:lnRef>
+          <a:fillRef idx="3">
+            <a:schemeClr val="accent1"/>
+          </a:fillRef>
+          <a:effectRef idx="2">
+            <a:schemeClr val="accent1"/>
+          </a:effectRef>
+          <a:fontRef idx="minor">
+            <a:schemeClr val="lt1"/>
+          </a:fontRef>
+        </p:style>
+        <p:txBody>
+          <a:bodyPr rtlCol="0" anchor="t" wrap="square" lIns="0" rIns="0" tIns="36576" bIns="36576"/>
+          <a:lstStyle/>
+          <a:p>
+            <a:pPr algn="l">
+              <a:spcBef>
+                <a:spcPts val="0"/>
+              </a:spcBef>
+              <a:spcAft>
+                <a:spcPts val="100"/>
+              </a:spcAft>
+            </a:pPr>
+            <a:r>
+              <a:rPr sz="1050" b="1" i="0">
+                <a:solidFill>
+                  <a:srgbClr val="06B6D4"/>
+                </a:solidFill>
+                <a:latin typeface="Calibri"/>
+              </a:rPr>
+              <a:t>APPENDIX · BACKUP FOR Q&amp;A</a:t>
+            </a:r>
+          </a:p>
+          <a:p>
+            <a:pPr algn="l">
+              <a:spcBef>
+                <a:spcPts val="0"/>
+              </a:spcBef>
+              <a:spcAft>
+                <a:spcPts val="0"/>
+              </a:spcAft>
+            </a:pPr>
+            <a:r>
+              <a:rPr sz="2500" b="1" i="0">
+                <a:solidFill>
+                  <a:srgbClr val="FFFFFF"/>
+                </a:solidFill>
+                <a:latin typeface="Calibri"/>
+              </a:rPr>
+              <a:t>Appendix D — Feature Matrix vs Alternatives</a:t>
+            </a:r>
+          </a:p>
+        </p:txBody>
+      </p:sp>
+      <p:sp>
+        <p:nvSpPr>
+          <p:cNvPr id="5" name="Rounded Rectangle 4"/>
+          <p:cNvSpPr/>
+          <p:nvPr/>
+        </p:nvSpPr>
+        <p:spPr>
+          <a:xfrm>
+            <a:off x="11018520" y="292608"/>
+            <a:ext cx="777240" cy="502920"/>
+          </a:xfrm>
+          <a:prstGeom prst="roundRect">
+            <a:avLst/>
+          </a:prstGeom>
+          <a:solidFill>
+            <a:srgbClr val="143363"/>
+          </a:solidFill>
+          <a:ln w="15875">
+            <a:solidFill>
+              <a:srgbClr val="06B6D4"/>
+            </a:solidFill>
+          </a:ln>
+          <a:effectLst/>
+        </p:spPr>
+        <p:style>
+          <a:lnRef idx="1">
+            <a:schemeClr val="accent1"/>
+          </a:lnRef>
+          <a:fillRef idx="3">
+            <a:schemeClr val="accent1"/>
+          </a:fillRef>
+          <a:effectRef idx="2">
+            <a:schemeClr val="accent1"/>
+          </a:effectRef>
+          <a:fontRef idx="minor">
+            <a:schemeClr val="lt1"/>
+          </a:fontRef>
+        </p:style>
+        <p:txBody>
+          <a:bodyPr rtlCol="0" anchor="ctr" wrap="square" lIns="18288" rIns="18288" tIns="36576" bIns="36576"/>
+          <a:lstStyle/>
+          <a:p>
+            <a:pPr algn="ctr">
+              <a:spcBef>
+                <a:spcPts val="0"/>
+              </a:spcBef>
+              <a:spcAft>
+                <a:spcPts val="0"/>
+              </a:spcAft>
+            </a:pPr>
+            <a:r>
+              <a:rPr sz="1500" b="1" i="0">
+                <a:solidFill>
+                  <a:srgbClr val="FFFFFF"/>
+                </a:solidFill>
+                <a:latin typeface="Calibri"/>
+              </a:rPr>
+              <a:t>29</a:t>
+            </a:r>
+          </a:p>
+        </p:txBody>
+      </p:sp>
+      <p:sp>
+        <p:nvSpPr>
+          <p:cNvPr id="6" name="Rectangle 5"/>
+          <p:cNvSpPr/>
+          <p:nvPr/>
+        </p:nvSpPr>
+        <p:spPr>
+          <a:xfrm>
+            <a:off x="411480" y="6455664"/>
+            <a:ext cx="11365992" cy="320040"/>
+          </a:xfrm>
+          <a:prstGeom prst="rect">
+            <a:avLst/>
+          </a:prstGeom>
+          <a:noFill/>
+          <a:ln>
+            <a:noFill/>
+          </a:ln>
+          <a:effectLst/>
+        </p:spPr>
+        <p:style>
+          <a:lnRef idx="1">
+            <a:schemeClr val="accent1"/>
+          </a:lnRef>
+          <a:fillRef idx="3">
+            <a:schemeClr val="accent1"/>
+          </a:fillRef>
+          <a:effectRef idx="2">
+            <a:schemeClr val="accent1"/>
+          </a:effectRef>
+          <a:fontRef idx="minor">
+            <a:schemeClr val="lt1"/>
+          </a:fontRef>
+        </p:style>
+        <p:txBody>
+          <a:bodyPr rtlCol="0" anchor="t" wrap="square" lIns="0" rIns="0" tIns="36576" bIns="36576"/>
+          <a:lstStyle/>
+          <a:p>
+            <a:pPr algn="ctr">
+              <a:spcAft>
+                <a:spcPts val="0"/>
+              </a:spcAft>
+            </a:pPr>
+            <a:r>
+              <a:rPr sz="850" b="0">
+                <a:solidFill>
+                  <a:srgbClr val="64748B"/>
+                </a:solidFill>
+                <a:latin typeface="Calibri"/>
+              </a:rPr>
+              <a:t>HieraSync AI  •  Review Seminar – I      </a:t>
+            </a:r>
+            <a:r>
+              <a:rPr sz="850" b="0">
+                <a:solidFill>
+                  <a:srgbClr val="64748B"/>
+                </a:solidFill>
+                <a:latin typeface="Calibri"/>
+              </a:rPr>
+              <a:t>CSE (AI &amp; ML), SBJIT Nagpur</a:t>
+            </a:r>
+          </a:p>
+        </p:txBody>
+      </p:sp>
+      <p:graphicFrame>
+        <p:nvGraphicFramePr>
+          <p:cNvPr id="7" name="Table 6"/>
+          <p:cNvGraphicFramePr>
+            <a:graphicFrameLocks noGrp="1"/>
+          </p:cNvGraphicFramePr>
+          <p:nvPr/>
+        </p:nvGraphicFramePr>
+        <p:xfrm>
+          <a:off x="411480" y="1417320"/>
+          <a:ext cx="11365992" cy="4251960"/>
+        </p:xfrm>
+        <a:graphic>
+          <a:graphicData uri="http://schemas.openxmlformats.org/drawingml/2006/table">
+            <a:tbl>
+              <a:tblPr>
+                <a:tableStyleId>{5C22544A-7EE6-4342-B048-85BDC9FD1C3A}</a:tableStyleId>
+              </a:tblPr>
+              <a:tblGrid>
+                <a:gridCol w="4114800"/>
+                <a:gridCol w="1783080"/>
+                <a:gridCol w="1783080"/>
+                <a:gridCol w="1783080"/>
+                <a:gridCol w="1901952"/>
+              </a:tblGrid>
+              <a:tr h="472440">
+                <a:tc>
+                  <a:txBody>
+                    <a:bodyPr/>
+                    <a:lstStyle/>
+                    <a:p>
+                      <a:pPr algn="ctr">
+                        <a:spcBef>
+                          <a:spcPts val="100"/>
+                        </a:spcBef>
+                        <a:spcAft>
+                          <a:spcPts val="100"/>
+                        </a:spcAft>
+                      </a:pPr>
+                      <a:r>
+                        <a:rPr sz="1100" b="1">
+                          <a:solidFill>
+                            <a:srgbClr val="FFFFFF"/>
+                          </a:solidFill>
+                          <a:latin typeface="Calibri"/>
+                        </a:rPr>
+                        <a:t>Capability</a:t>
+                      </a:r>
+                    </a:p>
+                  </a:txBody>
+                  <a:tcPr anchor="ctr" marL="73152" marR="73152" marT="27432" marB="27432">
+                    <a:solidFill>
+                      <a:srgbClr val="0B1E3B"/>
+                    </a:solidFill>
+                    <a:lnL w="12700">
+                      <a:solidFill>
+                        <a:srgbClr val="CBD5E1"/>
+                      </a:solidFill>
+                    </a:lnL>
+                    <a:lnR w="12700">
+                      <a:solidFill>
+                        <a:srgbClr val="CBD5E1"/>
+                      </a:solidFill>
+                    </a:lnR>
+                    <a:lnT w="12700">
+                      <a:solidFill>
+                        <a:srgbClr val="CBD5E1"/>
+                      </a:solidFill>
+                    </a:lnT>
+                    <a:lnB w="12700">
+                      <a:solidFill>
+                        <a:srgbClr val="CBD5E1"/>
+                      </a:solidFill>
+                    </a:lnB>
+                  </a:tcPr>
+                </a:tc>
+                <a:tc>
+                  <a:txBody>
+                    <a:bodyPr/>
+                    <a:lstStyle/>
+                    <a:p>
+                      <a:pPr algn="ctr">
+                        <a:spcBef>
+                          <a:spcPts val="100"/>
+                        </a:spcBef>
+                        <a:spcAft>
+                          <a:spcPts val="100"/>
+                        </a:spcAft>
+                      </a:pPr>
+                      <a:r>
+                        <a:rPr sz="1100" b="1">
+                          <a:solidFill>
+                            <a:srgbClr val="FFFFFF"/>
+                          </a:solidFill>
+                          <a:latin typeface="Calibri"/>
+                        </a:rPr>
+                        <a:t>Manual /</a:t>
+                      </a:r>
+                    </a:p>
+                    <a:p>
+                      <a:pPr algn="ctr">
+                        <a:spcBef>
+                          <a:spcPts val="100"/>
+                        </a:spcBef>
+                        <a:spcAft>
+                          <a:spcPts val="100"/>
+                        </a:spcAft>
+                      </a:pPr>
+                      <a:r>
+                        <a:rPr sz="1100" b="1">
+                          <a:solidFill>
+                            <a:srgbClr val="FFFFFF"/>
+                          </a:solidFill>
+                          <a:latin typeface="Calibri"/>
+                        </a:rPr>
+                        <a:t>Excel</a:t>
+                      </a:r>
+                    </a:p>
+                  </a:txBody>
+                  <a:tcPr anchor="ctr" marL="73152" marR="73152" marT="27432" marB="27432">
+                    <a:solidFill>
+                      <a:srgbClr val="0B1E3B"/>
+                    </a:solidFill>
+                    <a:lnL w="12700">
+                      <a:solidFill>
+                        <a:srgbClr val="CBD5E1"/>
+                      </a:solidFill>
+                    </a:lnL>
+                    <a:lnR w="12700">
+                      <a:solidFill>
+                        <a:srgbClr val="CBD5E1"/>
+                      </a:solidFill>
+                    </a:lnR>
+                    <a:lnT w="12700">
+                      <a:solidFill>
+                        <a:srgbClr val="CBD5E1"/>
+                      </a:solidFill>
+                    </a:lnT>
+                    <a:lnB w="12700">
+                      <a:solidFill>
+                        <a:srgbClr val="CBD5E1"/>
+                      </a:solidFill>
+                    </a:lnB>
+                  </a:tcPr>
+                </a:tc>
+                <a:tc>
+                  <a:txBody>
+                    <a:bodyPr/>
+                    <a:lstStyle/>
+                    <a:p>
+                      <a:pPr algn="ctr">
+                        <a:spcBef>
+                          <a:spcPts val="100"/>
+                        </a:spcBef>
+                        <a:spcAft>
+                          <a:spcPts val="100"/>
+                        </a:spcAft>
+                      </a:pPr>
+                      <a:r>
+                        <a:rPr sz="1100" b="1">
+                          <a:solidFill>
+                            <a:srgbClr val="FFFFFF"/>
+                          </a:solidFill>
+                          <a:latin typeface="Calibri"/>
+                        </a:rPr>
+                        <a:t>College</a:t>
+                      </a:r>
+                    </a:p>
+                    <a:p>
+                      <a:pPr algn="ctr">
+                        <a:spcBef>
+                          <a:spcPts val="100"/>
+                        </a:spcBef>
+                        <a:spcAft>
+                          <a:spcPts val="100"/>
+                        </a:spcAft>
+                      </a:pPr>
+                      <a:r>
+                        <a:rPr sz="1100" b="1">
+                          <a:solidFill>
+                            <a:srgbClr val="FFFFFF"/>
+                          </a:solidFill>
+                          <a:latin typeface="Calibri"/>
+                        </a:rPr>
+                        <a:t>ERP</a:t>
+                      </a:r>
+                    </a:p>
+                  </a:txBody>
+                  <a:tcPr anchor="ctr" marL="73152" marR="73152" marT="27432" marB="27432">
+                    <a:solidFill>
+                      <a:srgbClr val="0B1E3B"/>
+                    </a:solidFill>
+                    <a:lnL w="12700">
+                      <a:solidFill>
+                        <a:srgbClr val="CBD5E1"/>
+                      </a:solidFill>
+                    </a:lnL>
+                    <a:lnR w="12700">
+                      <a:solidFill>
+                        <a:srgbClr val="CBD5E1"/>
+                      </a:solidFill>
+                    </a:lnR>
+                    <a:lnT w="12700">
+                      <a:solidFill>
+                        <a:srgbClr val="CBD5E1"/>
+                      </a:solidFill>
+                    </a:lnT>
+                    <a:lnB w="12700">
+                      <a:solidFill>
+                        <a:srgbClr val="CBD5E1"/>
+                      </a:solidFill>
+                    </a:lnB>
+                  </a:tcPr>
+                </a:tc>
+                <a:tc>
+                  <a:txBody>
+                    <a:bodyPr/>
+                    <a:lstStyle/>
+                    <a:p>
+                      <a:pPr algn="ctr">
+                        <a:spcBef>
+                          <a:spcPts val="100"/>
+                        </a:spcBef>
+                        <a:spcAft>
+                          <a:spcPts val="100"/>
+                        </a:spcAft>
+                      </a:pPr>
+                      <a:r>
+                        <a:rPr sz="1100" b="1">
+                          <a:solidFill>
+                            <a:srgbClr val="FFFFFF"/>
+                          </a:solidFill>
+                          <a:latin typeface="Calibri"/>
+                        </a:rPr>
+                        <a:t>Asana-class</a:t>
+                      </a:r>
+                    </a:p>
+                    <a:p>
+                      <a:pPr algn="ctr">
+                        <a:spcBef>
+                          <a:spcPts val="100"/>
+                        </a:spcBef>
+                        <a:spcAft>
+                          <a:spcPts val="100"/>
+                        </a:spcAft>
+                      </a:pPr>
+                      <a:r>
+                        <a:rPr sz="1100" b="1">
+                          <a:solidFill>
+                            <a:srgbClr val="FFFFFF"/>
+                          </a:solidFill>
+                          <a:latin typeface="Calibri"/>
+                        </a:rPr>
+                        <a:t>2026</a:t>
+                      </a:r>
+                    </a:p>
+                  </a:txBody>
+                  <a:tcPr anchor="ctr" marL="73152" marR="73152" marT="27432" marB="27432">
+                    <a:solidFill>
+                      <a:srgbClr val="0B1E3B"/>
+                    </a:solidFill>
+                    <a:lnL w="12700">
+                      <a:solidFill>
+                        <a:srgbClr val="CBD5E1"/>
+                      </a:solidFill>
+                    </a:lnL>
+                    <a:lnR w="12700">
+                      <a:solidFill>
+                        <a:srgbClr val="CBD5E1"/>
+                      </a:solidFill>
+                    </a:lnR>
+                    <a:lnT w="12700">
+                      <a:solidFill>
+                        <a:srgbClr val="CBD5E1"/>
+                      </a:solidFill>
+                    </a:lnT>
+                    <a:lnB w="12700">
+                      <a:solidFill>
+                        <a:srgbClr val="CBD5E1"/>
+                      </a:solidFill>
+                    </a:lnB>
+                  </a:tcPr>
+                </a:tc>
+                <a:tc>
+                  <a:txBody>
+                    <a:bodyPr/>
+                    <a:lstStyle/>
+                    <a:p>
+                      <a:pPr algn="ctr">
+                        <a:spcBef>
+                          <a:spcPts val="100"/>
+                        </a:spcBef>
+                        <a:spcAft>
+                          <a:spcPts val="100"/>
+                        </a:spcAft>
+                      </a:pPr>
+                      <a:r>
+                        <a:rPr sz="1100" b="1">
+                          <a:solidFill>
+                            <a:srgbClr val="FFFFFF"/>
+                          </a:solidFill>
+                          <a:latin typeface="Calibri"/>
+                        </a:rPr>
+                        <a:t>HieraSync</a:t>
+                      </a:r>
+                    </a:p>
+                  </a:txBody>
+                  <a:tcPr anchor="ctr" marL="73152" marR="73152" marT="27432" marB="27432">
+                    <a:solidFill>
+                      <a:srgbClr val="0B1E3B"/>
+                    </a:solidFill>
+                    <a:lnL w="12700">
+                      <a:solidFill>
+                        <a:srgbClr val="CBD5E1"/>
+                      </a:solidFill>
+                    </a:lnL>
+                    <a:lnR w="12700">
+                      <a:solidFill>
+                        <a:srgbClr val="CBD5E1"/>
+                      </a:solidFill>
+                    </a:lnR>
+                    <a:lnT w="12700">
+                      <a:solidFill>
+                        <a:srgbClr val="CBD5E1"/>
+                      </a:solidFill>
+                    </a:lnT>
+                    <a:lnB w="12700">
+                      <a:solidFill>
+                        <a:srgbClr val="CBD5E1"/>
+                      </a:solidFill>
+                    </a:lnB>
+                  </a:tcPr>
+                </a:tc>
+              </a:tr>
+              <a:tr h="472440">
+                <a:tc>
+                  <a:txBody>
+                    <a:bodyPr/>
+                    <a:lstStyle/>
+                    <a:p>
+                      <a:pPr algn="ctr">
+                        <a:spcBef>
+                          <a:spcPts val="100"/>
+                        </a:spcBef>
+                        <a:spcAft>
+                          <a:spcPts val="100"/>
+                        </a:spcAft>
+                      </a:pPr>
+                      <a:r>
+                        <a:rPr sz="1150" b="0">
+                          <a:solidFill>
+                            <a:srgbClr val="1E293B"/>
+                          </a:solidFill>
+                          <a:latin typeface="Calibri"/>
+                        </a:rPr>
+                        <a:t>Academic role hierarchy</a:t>
+                      </a:r>
+                    </a:p>
+                  </a:txBody>
+                  <a:tcPr anchor="ctr" marL="73152" marR="73152" marT="27432" marB="27432">
+                    <a:solidFill>
+                      <a:srgbClr val="FFFFFF"/>
+                    </a:solidFill>
+                    <a:lnL w="12700">
+                      <a:solidFill>
+                        <a:srgbClr val="CBD5E1"/>
+                      </a:solidFill>
+                    </a:lnL>
+                    <a:lnR w="12700">
+                      <a:solidFill>
+                        <a:srgbClr val="CBD5E1"/>
+                      </a:solidFill>
+                    </a:lnR>
+                    <a:lnT w="12700">
+                      <a:solidFill>
+                        <a:srgbClr val="CBD5E1"/>
+                      </a:solidFill>
+                    </a:lnT>
+                    <a:lnB w="12700">
+                      <a:solidFill>
+                        <a:srgbClr val="CBD5E1"/>
+                      </a:solidFill>
+                    </a:lnB>
+                  </a:tcPr>
+                </a:tc>
+                <a:tc>
+                  <a:txBody>
+                    <a:bodyPr/>
+                    <a:lstStyle/>
+                    <a:p>
+                      <a:pPr algn="ctr">
+                        <a:spcBef>
+                          <a:spcPts val="100"/>
+                        </a:spcBef>
+                        <a:spcAft>
+                          <a:spcPts val="100"/>
+                        </a:spcAft>
+                      </a:pPr>
+                      <a:r>
+                        <a:rPr sz="1150" b="0">
+                          <a:solidFill>
+                            <a:srgbClr val="1E293B"/>
+                          </a:solidFill>
+                          <a:latin typeface="Calibri"/>
+                        </a:rPr>
+                        <a:t>✖</a:t>
+                      </a:r>
+                    </a:p>
+                  </a:txBody>
+                  <a:tcPr anchor="ctr" marL="73152" marR="73152" marT="27432" marB="27432">
+                    <a:solidFill>
+                      <a:srgbClr val="FFFFFF"/>
+                    </a:solidFill>
+                    <a:lnL w="12700">
+                      <a:solidFill>
+                        <a:srgbClr val="CBD5E1"/>
+                      </a:solidFill>
+                    </a:lnL>
+                    <a:lnR w="12700">
+                      <a:solidFill>
+                        <a:srgbClr val="CBD5E1"/>
+                      </a:solidFill>
+                    </a:lnR>
+                    <a:lnT w="12700">
+                      <a:solidFill>
+                        <a:srgbClr val="CBD5E1"/>
+                      </a:solidFill>
+                    </a:lnT>
+                    <a:lnB w="12700">
+                      <a:solidFill>
+                        <a:srgbClr val="CBD5E1"/>
+                      </a:solidFill>
+                    </a:lnB>
+                  </a:tcPr>
+                </a:tc>
+                <a:tc>
+                  <a:txBody>
+                    <a:bodyPr/>
+                    <a:lstStyle/>
+                    <a:p>
+                      <a:pPr algn="ctr">
+                        <a:spcBef>
+                          <a:spcPts val="100"/>
+                        </a:spcBef>
+                        <a:spcAft>
+                          <a:spcPts val="100"/>
+                        </a:spcAft>
+                      </a:pPr>
+                      <a:r>
+                        <a:rPr sz="1150" b="0">
+                          <a:solidFill>
+                            <a:srgbClr val="1E293B"/>
+                          </a:solidFill>
+                          <a:latin typeface="Calibri"/>
+                        </a:rPr>
+                        <a:t>◐</a:t>
+                      </a:r>
+                    </a:p>
+                  </a:txBody>
+                  <a:tcPr anchor="ctr" marL="73152" marR="73152" marT="27432" marB="27432">
+                    <a:solidFill>
+                      <a:srgbClr val="FFFFFF"/>
+                    </a:solidFill>
+                    <a:lnL w="12700">
+                      <a:solidFill>
+                        <a:srgbClr val="CBD5E1"/>
+                      </a:solidFill>
+                    </a:lnL>
+                    <a:lnR w="12700">
+                      <a:solidFill>
+                        <a:srgbClr val="CBD5E1"/>
+                      </a:solidFill>
+                    </a:lnR>
+                    <a:lnT w="12700">
+                      <a:solidFill>
+                        <a:srgbClr val="CBD5E1"/>
+                      </a:solidFill>
+                    </a:lnT>
+                    <a:lnB w="12700">
+                      <a:solidFill>
+                        <a:srgbClr val="CBD5E1"/>
+                      </a:solidFill>
+                    </a:lnB>
+                  </a:tcPr>
+                </a:tc>
+                <a:tc>
+                  <a:txBody>
+                    <a:bodyPr/>
+                    <a:lstStyle/>
+                    <a:p>
+                      <a:pPr algn="ctr">
+                        <a:spcBef>
+                          <a:spcPts val="100"/>
+                        </a:spcBef>
+                        <a:spcAft>
+                          <a:spcPts val="100"/>
+                        </a:spcAft>
+                      </a:pPr>
+                      <a:r>
+                        <a:rPr sz="1150" b="0">
+                          <a:solidFill>
+                            <a:srgbClr val="1E293B"/>
+                          </a:solidFill>
+                          <a:latin typeface="Calibri"/>
+                        </a:rPr>
+                        <a:t>✖</a:t>
+                      </a:r>
+                    </a:p>
+                  </a:txBody>
+                  <a:tcPr anchor="ctr" marL="73152" marR="73152" marT="27432" marB="27432">
+                    <a:solidFill>
+                      <a:srgbClr val="FFFFFF"/>
+                    </a:solidFill>
+                    <a:lnL w="12700">
+                      <a:solidFill>
+                        <a:srgbClr val="CBD5E1"/>
+                      </a:solidFill>
+                    </a:lnL>
+                    <a:lnR w="12700">
+                      <a:solidFill>
+                        <a:srgbClr val="CBD5E1"/>
+                      </a:solidFill>
+                    </a:lnR>
+                    <a:lnT w="12700">
+                      <a:solidFill>
+                        <a:srgbClr val="CBD5E1"/>
+                      </a:solidFill>
+                    </a:lnT>
+                    <a:lnB w="12700">
+                      <a:solidFill>
+                        <a:srgbClr val="CBD5E1"/>
+                      </a:solidFill>
+                    </a:lnB>
+                  </a:tcPr>
+                </a:tc>
+                <a:tc>
+                  <a:txBody>
+                    <a:bodyPr/>
+                    <a:lstStyle/>
+                    <a:p>
+                      <a:pPr algn="ctr">
+                        <a:spcBef>
+                          <a:spcPts val="100"/>
+                        </a:spcBef>
+                        <a:spcAft>
+                          <a:spcPts val="100"/>
+                        </a:spcAft>
+                      </a:pPr>
+                      <a:r>
+                        <a:rPr sz="1150" b="0">
+                          <a:solidFill>
+                            <a:srgbClr val="1E293B"/>
+                          </a:solidFill>
+                          <a:latin typeface="Calibri"/>
+                        </a:rPr>
+                        <a:t>✔</a:t>
+                      </a:r>
+                    </a:p>
+                  </a:txBody>
+                  <a:tcPr anchor="ctr" marL="73152" marR="73152" marT="27432" marB="27432">
+                    <a:solidFill>
+                      <a:srgbClr val="FFFFFF"/>
+                    </a:solidFill>
+                    <a:lnL w="12700">
+                      <a:solidFill>
+                        <a:srgbClr val="CBD5E1"/>
+                      </a:solidFill>
+                    </a:lnL>
+                    <a:lnR w="12700">
+                      <a:solidFill>
+                        <a:srgbClr val="CBD5E1"/>
+                      </a:solidFill>
+                    </a:lnR>
+                    <a:lnT w="12700">
+                      <a:solidFill>
+                        <a:srgbClr val="CBD5E1"/>
+                      </a:solidFill>
+                    </a:lnT>
+                    <a:lnB w="12700">
+                      <a:solidFill>
+                        <a:srgbClr val="CBD5E1"/>
+                      </a:solidFill>
+                    </a:lnB>
+                  </a:tcPr>
+                </a:tc>
+              </a:tr>
+              <a:tr h="472440">
+                <a:tc>
+                  <a:txBody>
+                    <a:bodyPr/>
+                    <a:lstStyle/>
+                    <a:p>
+                      <a:pPr algn="ctr">
+                        <a:spcBef>
+                          <a:spcPts val="100"/>
+                        </a:spcBef>
+                        <a:spcAft>
+                          <a:spcPts val="100"/>
+                        </a:spcAft>
+                      </a:pPr>
+                      <a:r>
+                        <a:rPr sz="1150" b="0">
+                          <a:solidFill>
+                            <a:srgbClr val="1E293B"/>
+                          </a:solidFill>
+                          <a:latin typeface="Calibri"/>
+                        </a:rPr>
+                        <a:t>HOD → Principal e-approvals</a:t>
+                      </a:r>
+                    </a:p>
+                  </a:txBody>
+                  <a:tcPr anchor="ctr" marL="73152" marR="73152" marT="27432" marB="27432">
+                    <a:solidFill>
+                      <a:srgbClr val="EEF2FF"/>
+                    </a:solidFill>
+                    <a:lnL w="12700">
+                      <a:solidFill>
+                        <a:srgbClr val="CBD5E1"/>
+                      </a:solidFill>
+                    </a:lnL>
+                    <a:lnR w="12700">
+                      <a:solidFill>
+                        <a:srgbClr val="CBD5E1"/>
+                      </a:solidFill>
+                    </a:lnR>
+                    <a:lnT w="12700">
+                      <a:solidFill>
+                        <a:srgbClr val="CBD5E1"/>
+                      </a:solidFill>
+                    </a:lnT>
+                    <a:lnB w="12700">
+                      <a:solidFill>
+                        <a:srgbClr val="CBD5E1"/>
+                      </a:solidFill>
+                    </a:lnB>
+                  </a:tcPr>
+                </a:tc>
+                <a:tc>
+                  <a:txBody>
+                    <a:bodyPr/>
+                    <a:lstStyle/>
+                    <a:p>
+                      <a:pPr algn="ctr">
+                        <a:spcBef>
+                          <a:spcPts val="100"/>
+                        </a:spcBef>
+                        <a:spcAft>
+                          <a:spcPts val="100"/>
+                        </a:spcAft>
+                      </a:pPr>
+                      <a:r>
+                        <a:rPr sz="1150" b="0">
+                          <a:solidFill>
+                            <a:srgbClr val="1E293B"/>
+                          </a:solidFill>
+                          <a:latin typeface="Calibri"/>
+                        </a:rPr>
+                        <a:t>✖</a:t>
+                      </a:r>
+                    </a:p>
+                  </a:txBody>
+                  <a:tcPr anchor="ctr" marL="73152" marR="73152" marT="27432" marB="27432">
+                    <a:solidFill>
+                      <a:srgbClr val="EEF2FF"/>
+                    </a:solidFill>
+                    <a:lnL w="12700">
+                      <a:solidFill>
+                        <a:srgbClr val="CBD5E1"/>
+                      </a:solidFill>
+                    </a:lnL>
+                    <a:lnR w="12700">
+                      <a:solidFill>
+                        <a:srgbClr val="CBD5E1"/>
+                      </a:solidFill>
+                    </a:lnR>
+                    <a:lnT w="12700">
+                      <a:solidFill>
+                        <a:srgbClr val="CBD5E1"/>
+                      </a:solidFill>
+                    </a:lnT>
+                    <a:lnB w="12700">
+                      <a:solidFill>
+                        <a:srgbClr val="CBD5E1"/>
+                      </a:solidFill>
+                    </a:lnB>
+                  </a:tcPr>
+                </a:tc>
+                <a:tc>
+                  <a:txBody>
+                    <a:bodyPr/>
+                    <a:lstStyle/>
+                    <a:p>
+                      <a:pPr algn="ctr">
+                        <a:spcBef>
+                          <a:spcPts val="100"/>
+                        </a:spcBef>
+                        <a:spcAft>
+                          <a:spcPts val="100"/>
+                        </a:spcAft>
+                      </a:pPr>
+                      <a:r>
+                        <a:rPr sz="1150" b="0">
+                          <a:solidFill>
+                            <a:srgbClr val="1E293B"/>
+                          </a:solidFill>
+                          <a:latin typeface="Calibri"/>
+                        </a:rPr>
+                        <a:t>◐</a:t>
+                      </a:r>
+                    </a:p>
+                  </a:txBody>
+                  <a:tcPr anchor="ctr" marL="73152" marR="73152" marT="27432" marB="27432">
+                    <a:solidFill>
+                      <a:srgbClr val="EEF2FF"/>
+                    </a:solidFill>
+                    <a:lnL w="12700">
+                      <a:solidFill>
+                        <a:srgbClr val="CBD5E1"/>
+                      </a:solidFill>
+                    </a:lnL>
+                    <a:lnR w="12700">
+                      <a:solidFill>
+                        <a:srgbClr val="CBD5E1"/>
+                      </a:solidFill>
+                    </a:lnR>
+                    <a:lnT w="12700">
+                      <a:solidFill>
+                        <a:srgbClr val="CBD5E1"/>
+                      </a:solidFill>
+                    </a:lnT>
+                    <a:lnB w="12700">
+                      <a:solidFill>
+                        <a:srgbClr val="CBD5E1"/>
+                      </a:solidFill>
+                    </a:lnB>
+                  </a:tcPr>
+                </a:tc>
+                <a:tc>
+                  <a:txBody>
+                    <a:bodyPr/>
+                    <a:lstStyle/>
+                    <a:p>
+                      <a:pPr algn="ctr">
+                        <a:spcBef>
+                          <a:spcPts val="100"/>
+                        </a:spcBef>
+                        <a:spcAft>
+                          <a:spcPts val="100"/>
+                        </a:spcAft>
+                      </a:pPr>
+                      <a:r>
+                        <a:rPr sz="1150" b="0">
+                          <a:solidFill>
+                            <a:srgbClr val="1E293B"/>
+                          </a:solidFill>
+                          <a:latin typeface="Calibri"/>
+                        </a:rPr>
+                        <a:t>✖</a:t>
+                      </a:r>
+                    </a:p>
+                  </a:txBody>
+                  <a:tcPr anchor="ctr" marL="73152" marR="73152" marT="27432" marB="27432">
+                    <a:solidFill>
+                      <a:srgbClr val="EEF2FF"/>
+                    </a:solidFill>
+                    <a:lnL w="12700">
+                      <a:solidFill>
+                        <a:srgbClr val="CBD5E1"/>
+                      </a:solidFill>
+                    </a:lnL>
+                    <a:lnR w="12700">
+                      <a:solidFill>
+                        <a:srgbClr val="CBD5E1"/>
+                      </a:solidFill>
+                    </a:lnR>
+                    <a:lnT w="12700">
+                      <a:solidFill>
+                        <a:srgbClr val="CBD5E1"/>
+                      </a:solidFill>
+                    </a:lnT>
+                    <a:lnB w="12700">
+                      <a:solidFill>
+                        <a:srgbClr val="CBD5E1"/>
+                      </a:solidFill>
+                    </a:lnB>
+                  </a:tcPr>
+                </a:tc>
+                <a:tc>
+                  <a:txBody>
+                    <a:bodyPr/>
+                    <a:lstStyle/>
+                    <a:p>
+                      <a:pPr algn="ctr">
+                        <a:spcBef>
+                          <a:spcPts val="100"/>
+                        </a:spcBef>
+                        <a:spcAft>
+                          <a:spcPts val="100"/>
+                        </a:spcAft>
+                      </a:pPr>
+                      <a:r>
+                        <a:rPr sz="1150" b="0">
+                          <a:solidFill>
+                            <a:srgbClr val="1E293B"/>
+                          </a:solidFill>
+                          <a:latin typeface="Calibri"/>
+                        </a:rPr>
+                        <a:t>✔</a:t>
+                      </a:r>
+                    </a:p>
+                  </a:txBody>
+                  <a:tcPr anchor="ctr" marL="73152" marR="73152" marT="27432" marB="27432">
+                    <a:solidFill>
+                      <a:srgbClr val="EEF2FF"/>
+                    </a:solidFill>
+                    <a:lnL w="12700">
+                      <a:solidFill>
+                        <a:srgbClr val="CBD5E1"/>
+                      </a:solidFill>
+                    </a:lnL>
+                    <a:lnR w="12700">
+                      <a:solidFill>
+                        <a:srgbClr val="CBD5E1"/>
+                      </a:solidFill>
+                    </a:lnR>
+                    <a:lnT w="12700">
+                      <a:solidFill>
+                        <a:srgbClr val="CBD5E1"/>
+                      </a:solidFill>
+                    </a:lnT>
+                    <a:lnB w="12700">
+                      <a:solidFill>
+                        <a:srgbClr val="CBD5E1"/>
+                      </a:solidFill>
+                    </a:lnB>
+                  </a:tcPr>
+                </a:tc>
+              </a:tr>
+              <a:tr h="472440">
+                <a:tc>
+                  <a:txBody>
+                    <a:bodyPr/>
+                    <a:lstStyle/>
+                    <a:p>
+                      <a:pPr algn="ctr">
+                        <a:spcBef>
+                          <a:spcPts val="100"/>
+                        </a:spcBef>
+                        <a:spcAft>
+                          <a:spcPts val="100"/>
+                        </a:spcAft>
+                      </a:pPr>
+                      <a:r>
+                        <a:rPr sz="1150" b="0">
+                          <a:solidFill>
+                            <a:srgbClr val="1E293B"/>
+                          </a:solidFill>
+                          <a:latin typeface="Calibri"/>
+                        </a:rPr>
+                        <a:t>AI delay-risk alerts</a:t>
+                      </a:r>
+                    </a:p>
+                  </a:txBody>
+                  <a:tcPr anchor="ctr" marL="73152" marR="73152" marT="27432" marB="27432">
+                    <a:solidFill>
+                      <a:srgbClr val="FFFFFF"/>
+                    </a:solidFill>
+                    <a:lnL w="12700">
+                      <a:solidFill>
+                        <a:srgbClr val="CBD5E1"/>
+                      </a:solidFill>
+                    </a:lnL>
+                    <a:lnR w="12700">
+                      <a:solidFill>
+                        <a:srgbClr val="CBD5E1"/>
+                      </a:solidFill>
+                    </a:lnR>
+                    <a:lnT w="12700">
+                      <a:solidFill>
+                        <a:srgbClr val="CBD5E1"/>
+                      </a:solidFill>
+                    </a:lnT>
+                    <a:lnB w="12700">
+                      <a:solidFill>
+                        <a:srgbClr val="CBD5E1"/>
+                      </a:solidFill>
+                    </a:lnB>
+                  </a:tcPr>
+                </a:tc>
+                <a:tc>
+                  <a:txBody>
+                    <a:bodyPr/>
+                    <a:lstStyle/>
+                    <a:p>
+                      <a:pPr algn="ctr">
+                        <a:spcBef>
+                          <a:spcPts val="100"/>
+                        </a:spcBef>
+                        <a:spcAft>
+                          <a:spcPts val="100"/>
+                        </a:spcAft>
+                      </a:pPr>
+                      <a:r>
+                        <a:rPr sz="1150" b="0">
+                          <a:solidFill>
+                            <a:srgbClr val="1E293B"/>
+                          </a:solidFill>
+                          <a:latin typeface="Calibri"/>
+                        </a:rPr>
+                        <a:t>✖</a:t>
+                      </a:r>
+                    </a:p>
+                  </a:txBody>
+                  <a:tcPr anchor="ctr" marL="73152" marR="73152" marT="27432" marB="27432">
+                    <a:solidFill>
+                      <a:srgbClr val="FFFFFF"/>
+                    </a:solidFill>
+                    <a:lnL w="12700">
+                      <a:solidFill>
+                        <a:srgbClr val="CBD5E1"/>
+                      </a:solidFill>
+                    </a:lnL>
+                    <a:lnR w="12700">
+                      <a:solidFill>
+                        <a:srgbClr val="CBD5E1"/>
+                      </a:solidFill>
+                    </a:lnR>
+                    <a:lnT w="12700">
+                      <a:solidFill>
+                        <a:srgbClr val="CBD5E1"/>
+                      </a:solidFill>
+                    </a:lnT>
+                    <a:lnB w="12700">
+                      <a:solidFill>
+                        <a:srgbClr val="CBD5E1"/>
+                      </a:solidFill>
+                    </a:lnB>
+                  </a:tcPr>
+                </a:tc>
+                <a:tc>
+                  <a:txBody>
+                    <a:bodyPr/>
+                    <a:lstStyle/>
+                    <a:p>
+                      <a:pPr algn="ctr">
+                        <a:spcBef>
+                          <a:spcPts val="100"/>
+                        </a:spcBef>
+                        <a:spcAft>
+                          <a:spcPts val="100"/>
+                        </a:spcAft>
+                      </a:pPr>
+                      <a:r>
+                        <a:rPr sz="1150" b="0">
+                          <a:solidFill>
+                            <a:srgbClr val="1E293B"/>
+                          </a:solidFill>
+                          <a:latin typeface="Calibri"/>
+                        </a:rPr>
+                        <a:t>✖</a:t>
+                      </a:r>
+                    </a:p>
+                  </a:txBody>
+                  <a:tcPr anchor="ctr" marL="73152" marR="73152" marT="27432" marB="27432">
+                    <a:solidFill>
+                      <a:srgbClr val="FFFFFF"/>
+                    </a:solidFill>
+                    <a:lnL w="12700">
+                      <a:solidFill>
+                        <a:srgbClr val="CBD5E1"/>
+                      </a:solidFill>
+                    </a:lnL>
+                    <a:lnR w="12700">
+                      <a:solidFill>
+                        <a:srgbClr val="CBD5E1"/>
+                      </a:solidFill>
+                    </a:lnR>
+                    <a:lnT w="12700">
+                      <a:solidFill>
+                        <a:srgbClr val="CBD5E1"/>
+                      </a:solidFill>
+                    </a:lnT>
+                    <a:lnB w="12700">
+                      <a:solidFill>
+                        <a:srgbClr val="CBD5E1"/>
+                      </a:solidFill>
+                    </a:lnB>
+                  </a:tcPr>
+                </a:tc>
+                <a:tc>
+                  <a:txBody>
+                    <a:bodyPr/>
+                    <a:lstStyle/>
+                    <a:p>
+                      <a:pPr algn="ctr">
+                        <a:spcBef>
+                          <a:spcPts val="100"/>
+                        </a:spcBef>
+                        <a:spcAft>
+                          <a:spcPts val="100"/>
+                        </a:spcAft>
+                      </a:pPr>
+                      <a:r>
+                        <a:rPr sz="1150" b="0">
+                          <a:solidFill>
+                            <a:srgbClr val="1E293B"/>
+                          </a:solidFill>
+                          <a:latin typeface="Calibri"/>
+                        </a:rPr>
+                        <a:t>◐ paid</a:t>
+                      </a:r>
+                    </a:p>
+                  </a:txBody>
+                  <a:tcPr anchor="ctr" marL="73152" marR="73152" marT="27432" marB="27432">
+                    <a:solidFill>
+                      <a:srgbClr val="FFFFFF"/>
+                    </a:solidFill>
+                    <a:lnL w="12700">
+                      <a:solidFill>
+                        <a:srgbClr val="CBD5E1"/>
+                      </a:solidFill>
+                    </a:lnL>
+                    <a:lnR w="12700">
+                      <a:solidFill>
+                        <a:srgbClr val="CBD5E1"/>
+                      </a:solidFill>
+                    </a:lnR>
+                    <a:lnT w="12700">
+                      <a:solidFill>
+                        <a:srgbClr val="CBD5E1"/>
+                      </a:solidFill>
+                    </a:lnT>
+                    <a:lnB w="12700">
+                      <a:solidFill>
+                        <a:srgbClr val="CBD5E1"/>
+                      </a:solidFill>
+                    </a:lnB>
+                  </a:tcPr>
+                </a:tc>
+                <a:tc>
+                  <a:txBody>
+                    <a:bodyPr/>
+                    <a:lstStyle/>
+                    <a:p>
+                      <a:pPr algn="ctr">
+                        <a:spcBef>
+                          <a:spcPts val="100"/>
+                        </a:spcBef>
+                        <a:spcAft>
+                          <a:spcPts val="100"/>
+                        </a:spcAft>
+                      </a:pPr>
+                      <a:r>
+                        <a:rPr sz="1150" b="0">
+                          <a:solidFill>
+                            <a:srgbClr val="1E293B"/>
+                          </a:solidFill>
+                          <a:latin typeface="Calibri"/>
+                        </a:rPr>
+                        <a:t>✔ free</a:t>
+                      </a:r>
+                    </a:p>
+                  </a:txBody>
+                  <a:tcPr anchor="ctr" marL="73152" marR="73152" marT="27432" marB="27432">
+                    <a:solidFill>
+                      <a:srgbClr val="FFFFFF"/>
+                    </a:solidFill>
+                    <a:lnL w="12700">
+                      <a:solidFill>
+                        <a:srgbClr val="CBD5E1"/>
+                      </a:solidFill>
+                    </a:lnL>
+                    <a:lnR w="12700">
+                      <a:solidFill>
+                        <a:srgbClr val="CBD5E1"/>
+                      </a:solidFill>
+                    </a:lnR>
+                    <a:lnT w="12700">
+                      <a:solidFill>
+                        <a:srgbClr val="CBD5E1"/>
+                      </a:solidFill>
+                    </a:lnT>
+                    <a:lnB w="12700">
+                      <a:solidFill>
+                        <a:srgbClr val="CBD5E1"/>
+                      </a:solidFill>
+                    </a:lnB>
+                  </a:tcPr>
+                </a:tc>
+              </a:tr>
+              <a:tr h="472440">
+                <a:tc>
+                  <a:txBody>
+                    <a:bodyPr/>
+                    <a:lstStyle/>
+                    <a:p>
+                      <a:pPr algn="ctr">
+                        <a:spcBef>
+                          <a:spcPts val="100"/>
+                        </a:spcBef>
+                        <a:spcAft>
+                          <a:spcPts val="100"/>
+                        </a:spcAft>
+                      </a:pPr>
+                      <a:r>
+                        <a:rPr sz="1150" b="0">
+                          <a:solidFill>
+                            <a:srgbClr val="1E293B"/>
+                          </a:solidFill>
+                          <a:latin typeface="Calibri"/>
+                        </a:rPr>
+                        <a:t>Department analytics</a:t>
+                      </a:r>
+                    </a:p>
+                  </a:txBody>
+                  <a:tcPr anchor="ctr" marL="73152" marR="73152" marT="27432" marB="27432">
+                    <a:solidFill>
+                      <a:srgbClr val="EEF2FF"/>
+                    </a:solidFill>
+                    <a:lnL w="12700">
+                      <a:solidFill>
+                        <a:srgbClr val="CBD5E1"/>
+                      </a:solidFill>
+                    </a:lnL>
+                    <a:lnR w="12700">
+                      <a:solidFill>
+                        <a:srgbClr val="CBD5E1"/>
+                      </a:solidFill>
+                    </a:lnR>
+                    <a:lnT w="12700">
+                      <a:solidFill>
+                        <a:srgbClr val="CBD5E1"/>
+                      </a:solidFill>
+                    </a:lnT>
+                    <a:lnB w="12700">
+                      <a:solidFill>
+                        <a:srgbClr val="CBD5E1"/>
+                      </a:solidFill>
+                    </a:lnB>
+                  </a:tcPr>
+                </a:tc>
+                <a:tc>
+                  <a:txBody>
+                    <a:bodyPr/>
+                    <a:lstStyle/>
+                    <a:p>
+                      <a:pPr algn="ctr">
+                        <a:spcBef>
+                          <a:spcPts val="100"/>
+                        </a:spcBef>
+                        <a:spcAft>
+                          <a:spcPts val="100"/>
+                        </a:spcAft>
+                      </a:pPr>
+                      <a:r>
+                        <a:rPr sz="1150" b="0">
+                          <a:solidFill>
+                            <a:srgbClr val="1E293B"/>
+                          </a:solidFill>
+                          <a:latin typeface="Calibri"/>
+                        </a:rPr>
+                        <a:t>✖</a:t>
+                      </a:r>
+                    </a:p>
+                  </a:txBody>
+                  <a:tcPr anchor="ctr" marL="73152" marR="73152" marT="27432" marB="27432">
+                    <a:solidFill>
+                      <a:srgbClr val="EEF2FF"/>
+                    </a:solidFill>
+                    <a:lnL w="12700">
+                      <a:solidFill>
+                        <a:srgbClr val="CBD5E1"/>
+                      </a:solidFill>
+                    </a:lnL>
+                    <a:lnR w="12700">
+                      <a:solidFill>
+                        <a:srgbClr val="CBD5E1"/>
+                      </a:solidFill>
+                    </a:lnR>
+                    <a:lnT w="12700">
+                      <a:solidFill>
+                        <a:srgbClr val="CBD5E1"/>
+                      </a:solidFill>
+                    </a:lnT>
+                    <a:lnB w="12700">
+                      <a:solidFill>
+                        <a:srgbClr val="CBD5E1"/>
+                      </a:solidFill>
+                    </a:lnB>
+                  </a:tcPr>
+                </a:tc>
+                <a:tc>
+                  <a:txBody>
+                    <a:bodyPr/>
+                    <a:lstStyle/>
+                    <a:p>
+                      <a:pPr algn="ctr">
+                        <a:spcBef>
+                          <a:spcPts val="100"/>
+                        </a:spcBef>
+                        <a:spcAft>
+                          <a:spcPts val="100"/>
+                        </a:spcAft>
+                      </a:pPr>
+                      <a:r>
+                        <a:rPr sz="1150" b="0">
+                          <a:solidFill>
+                            <a:srgbClr val="1E293B"/>
+                          </a:solidFill>
+                          <a:latin typeface="Calibri"/>
+                        </a:rPr>
+                        <a:t>◐</a:t>
+                      </a:r>
+                    </a:p>
+                  </a:txBody>
+                  <a:tcPr anchor="ctr" marL="73152" marR="73152" marT="27432" marB="27432">
+                    <a:solidFill>
+                      <a:srgbClr val="EEF2FF"/>
+                    </a:solidFill>
+                    <a:lnL w="12700">
+                      <a:solidFill>
+                        <a:srgbClr val="CBD5E1"/>
+                      </a:solidFill>
+                    </a:lnL>
+                    <a:lnR w="12700">
+                      <a:solidFill>
+                        <a:srgbClr val="CBD5E1"/>
+                      </a:solidFill>
+                    </a:lnR>
+                    <a:lnT w="12700">
+                      <a:solidFill>
+                        <a:srgbClr val="CBD5E1"/>
+                      </a:solidFill>
+                    </a:lnT>
+                    <a:lnB w="12700">
+                      <a:solidFill>
+                        <a:srgbClr val="CBD5E1"/>
+                      </a:solidFill>
+                    </a:lnB>
+                  </a:tcPr>
+                </a:tc>
+                <a:tc>
+                  <a:txBody>
+                    <a:bodyPr/>
+                    <a:lstStyle/>
+                    <a:p>
+                      <a:pPr algn="ctr">
+                        <a:spcBef>
+                          <a:spcPts val="100"/>
+                        </a:spcBef>
+                        <a:spcAft>
+                          <a:spcPts val="100"/>
+                        </a:spcAft>
+                      </a:pPr>
+                      <a:r>
+                        <a:rPr sz="1150" b="0">
+                          <a:solidFill>
+                            <a:srgbClr val="1E293B"/>
+                          </a:solidFill>
+                          <a:latin typeface="Calibri"/>
+                        </a:rPr>
+                        <a:t>◐ generic</a:t>
+                      </a:r>
+                    </a:p>
+                  </a:txBody>
+                  <a:tcPr anchor="ctr" marL="73152" marR="73152" marT="27432" marB="27432">
+                    <a:solidFill>
+                      <a:srgbClr val="EEF2FF"/>
+                    </a:solidFill>
+                    <a:lnL w="12700">
+                      <a:solidFill>
+                        <a:srgbClr val="CBD5E1"/>
+                      </a:solidFill>
+                    </a:lnL>
+                    <a:lnR w="12700">
+                      <a:solidFill>
+                        <a:srgbClr val="CBD5E1"/>
+                      </a:solidFill>
+                    </a:lnR>
+                    <a:lnT w="12700">
+                      <a:solidFill>
+                        <a:srgbClr val="CBD5E1"/>
+                      </a:solidFill>
+                    </a:lnT>
+                    <a:lnB w="12700">
+                      <a:solidFill>
+                        <a:srgbClr val="CBD5E1"/>
+                      </a:solidFill>
+                    </a:lnB>
+                  </a:tcPr>
+                </a:tc>
+                <a:tc>
+                  <a:txBody>
+                    <a:bodyPr/>
+                    <a:lstStyle/>
+                    <a:p>
+                      <a:pPr algn="ctr">
+                        <a:spcBef>
+                          <a:spcPts val="100"/>
+                        </a:spcBef>
+                        <a:spcAft>
+                          <a:spcPts val="100"/>
+                        </a:spcAft>
+                      </a:pPr>
+                      <a:r>
+                        <a:rPr sz="1150" b="0">
+                          <a:solidFill>
+                            <a:srgbClr val="1E293B"/>
+                          </a:solidFill>
+                          <a:latin typeface="Calibri"/>
+                        </a:rPr>
+                        <a:t>✔ academic</a:t>
+                      </a:r>
+                    </a:p>
+                  </a:txBody>
+                  <a:tcPr anchor="ctr" marL="73152" marR="73152" marT="27432" marB="27432">
+                    <a:solidFill>
+                      <a:srgbClr val="EEF2FF"/>
+                    </a:solidFill>
+                    <a:lnL w="12700">
+                      <a:solidFill>
+                        <a:srgbClr val="CBD5E1"/>
+                      </a:solidFill>
+                    </a:lnL>
+                    <a:lnR w="12700">
+                      <a:solidFill>
+                        <a:srgbClr val="CBD5E1"/>
+                      </a:solidFill>
+                    </a:lnR>
+                    <a:lnT w="12700">
+                      <a:solidFill>
+                        <a:srgbClr val="CBD5E1"/>
+                      </a:solidFill>
+                    </a:lnT>
+                    <a:lnB w="12700">
+                      <a:solidFill>
+                        <a:srgbClr val="CBD5E1"/>
+                      </a:solidFill>
+                    </a:lnB>
+                  </a:tcPr>
+                </a:tc>
+              </a:tr>
+              <a:tr h="472440">
+                <a:tc>
+                  <a:txBody>
+                    <a:bodyPr/>
+                    <a:lstStyle/>
+                    <a:p>
+                      <a:pPr algn="ctr">
+                        <a:spcBef>
+                          <a:spcPts val="100"/>
+                        </a:spcBef>
+                        <a:spcAft>
+                          <a:spcPts val="100"/>
+                        </a:spcAft>
+                      </a:pPr>
+                      <a:r>
+                        <a:rPr sz="1150" b="0">
+                          <a:solidFill>
+                            <a:srgbClr val="1E293B"/>
+                          </a:solidFill>
+                          <a:latin typeface="Calibri"/>
+                        </a:rPr>
+                        <a:t>Zero per-seat AI cost</a:t>
+                      </a:r>
+                    </a:p>
+                  </a:txBody>
+                  <a:tcPr anchor="ctr" marL="73152" marR="73152" marT="27432" marB="27432">
+                    <a:solidFill>
+                      <a:srgbClr val="FFFFFF"/>
+                    </a:solidFill>
+                    <a:lnL w="12700">
+                      <a:solidFill>
+                        <a:srgbClr val="CBD5E1"/>
+                      </a:solidFill>
+                    </a:lnL>
+                    <a:lnR w="12700">
+                      <a:solidFill>
+                        <a:srgbClr val="CBD5E1"/>
+                      </a:solidFill>
+                    </a:lnR>
+                    <a:lnT w="12700">
+                      <a:solidFill>
+                        <a:srgbClr val="CBD5E1"/>
+                      </a:solidFill>
+                    </a:lnT>
+                    <a:lnB w="12700">
+                      <a:solidFill>
+                        <a:srgbClr val="CBD5E1"/>
+                      </a:solidFill>
+                    </a:lnB>
+                  </a:tcPr>
+                </a:tc>
+                <a:tc>
+                  <a:txBody>
+                    <a:bodyPr/>
+                    <a:lstStyle/>
+                    <a:p>
+                      <a:pPr algn="ctr">
+                        <a:spcBef>
+                          <a:spcPts val="100"/>
+                        </a:spcBef>
+                        <a:spcAft>
+                          <a:spcPts val="100"/>
+                        </a:spcAft>
+                      </a:pPr>
+                      <a:r>
+                        <a:rPr sz="1150" b="0">
+                          <a:solidFill>
+                            <a:srgbClr val="1E293B"/>
+                          </a:solidFill>
+                          <a:latin typeface="Calibri"/>
+                        </a:rPr>
+                        <a:t>✔</a:t>
+                      </a:r>
+                    </a:p>
+                  </a:txBody>
+                  <a:tcPr anchor="ctr" marL="73152" marR="73152" marT="27432" marB="27432">
+                    <a:solidFill>
+                      <a:srgbClr val="FFFFFF"/>
+                    </a:solidFill>
+                    <a:lnL w="12700">
+                      <a:solidFill>
+                        <a:srgbClr val="CBD5E1"/>
+                      </a:solidFill>
+                    </a:lnL>
+                    <a:lnR w="12700">
+                      <a:solidFill>
+                        <a:srgbClr val="CBD5E1"/>
+                      </a:solidFill>
+                    </a:lnR>
+                    <a:lnT w="12700">
+                      <a:solidFill>
+                        <a:srgbClr val="CBD5E1"/>
+                      </a:solidFill>
+                    </a:lnT>
+                    <a:lnB w="12700">
+                      <a:solidFill>
+                        <a:srgbClr val="CBD5E1"/>
+                      </a:solidFill>
+                    </a:lnB>
+                  </a:tcPr>
+                </a:tc>
+                <a:tc>
+                  <a:txBody>
+                    <a:bodyPr/>
+                    <a:lstStyle/>
+                    <a:p>
+                      <a:pPr algn="ctr">
+                        <a:spcBef>
+                          <a:spcPts val="100"/>
+                        </a:spcBef>
+                        <a:spcAft>
+                          <a:spcPts val="100"/>
+                        </a:spcAft>
+                      </a:pPr>
+                      <a:r>
+                        <a:rPr sz="1150" b="0">
+                          <a:solidFill>
+                            <a:srgbClr val="1E293B"/>
+                          </a:solidFill>
+                          <a:latin typeface="Calibri"/>
+                        </a:rPr>
+                        <a:t>✖</a:t>
+                      </a:r>
+                    </a:p>
+                  </a:txBody>
+                  <a:tcPr anchor="ctr" marL="73152" marR="73152" marT="27432" marB="27432">
+                    <a:solidFill>
+                      <a:srgbClr val="FFFFFF"/>
+                    </a:solidFill>
+                    <a:lnL w="12700">
+                      <a:solidFill>
+                        <a:srgbClr val="CBD5E1"/>
+                      </a:solidFill>
+                    </a:lnL>
+                    <a:lnR w="12700">
+                      <a:solidFill>
+                        <a:srgbClr val="CBD5E1"/>
+                      </a:solidFill>
+                    </a:lnR>
+                    <a:lnT w="12700">
+                      <a:solidFill>
+                        <a:srgbClr val="CBD5E1"/>
+                      </a:solidFill>
+                    </a:lnT>
+                    <a:lnB w="12700">
+                      <a:solidFill>
+                        <a:srgbClr val="CBD5E1"/>
+                      </a:solidFill>
+                    </a:lnB>
+                  </a:tcPr>
+                </a:tc>
+                <a:tc>
+                  <a:txBody>
+                    <a:bodyPr/>
+                    <a:lstStyle/>
+                    <a:p>
+                      <a:pPr algn="ctr">
+                        <a:spcBef>
+                          <a:spcPts val="100"/>
+                        </a:spcBef>
+                        <a:spcAft>
+                          <a:spcPts val="100"/>
+                        </a:spcAft>
+                      </a:pPr>
+                      <a:r>
+                        <a:rPr sz="1150" b="0">
+                          <a:solidFill>
+                            <a:srgbClr val="1E293B"/>
+                          </a:solidFill>
+                          <a:latin typeface="Calibri"/>
+                        </a:rPr>
+                        <a:t>✖</a:t>
+                      </a:r>
+                    </a:p>
+                  </a:txBody>
+                  <a:tcPr anchor="ctr" marL="73152" marR="73152" marT="27432" marB="27432">
+                    <a:solidFill>
+                      <a:srgbClr val="FFFFFF"/>
+                    </a:solidFill>
+                    <a:lnL w="12700">
+                      <a:solidFill>
+                        <a:srgbClr val="CBD5E1"/>
+                      </a:solidFill>
+                    </a:lnL>
+                    <a:lnR w="12700">
+                      <a:solidFill>
+                        <a:srgbClr val="CBD5E1"/>
+                      </a:solidFill>
+                    </a:lnR>
+                    <a:lnT w="12700">
+                      <a:solidFill>
+                        <a:srgbClr val="CBD5E1"/>
+                      </a:solidFill>
+                    </a:lnT>
+                    <a:lnB w="12700">
+                      <a:solidFill>
+                        <a:srgbClr val="CBD5E1"/>
+                      </a:solidFill>
+                    </a:lnB>
+                  </a:tcPr>
+                </a:tc>
+                <a:tc>
+                  <a:txBody>
+                    <a:bodyPr/>
+                    <a:lstStyle/>
+                    <a:p>
+                      <a:pPr algn="ctr">
+                        <a:spcBef>
+                          <a:spcPts val="100"/>
+                        </a:spcBef>
+                        <a:spcAft>
+                          <a:spcPts val="100"/>
+                        </a:spcAft>
+                      </a:pPr>
+                      <a:r>
+                        <a:rPr sz="1150" b="0">
+                          <a:solidFill>
+                            <a:srgbClr val="1E293B"/>
+                          </a:solidFill>
+                          <a:latin typeface="Calibri"/>
+                        </a:rPr>
+                        <a:t>✔</a:t>
+                      </a:r>
+                    </a:p>
+                  </a:txBody>
+                  <a:tcPr anchor="ctr" marL="73152" marR="73152" marT="27432" marB="27432">
+                    <a:solidFill>
+                      <a:srgbClr val="FFFFFF"/>
+                    </a:solidFill>
+                    <a:lnL w="12700">
+                      <a:solidFill>
+                        <a:srgbClr val="CBD5E1"/>
+                      </a:solidFill>
+                    </a:lnL>
+                    <a:lnR w="12700">
+                      <a:solidFill>
+                        <a:srgbClr val="CBD5E1"/>
+                      </a:solidFill>
+                    </a:lnR>
+                    <a:lnT w="12700">
+                      <a:solidFill>
+                        <a:srgbClr val="CBD5E1"/>
+                      </a:solidFill>
+                    </a:lnT>
+                    <a:lnB w="12700">
+                      <a:solidFill>
+                        <a:srgbClr val="CBD5E1"/>
+                      </a:solidFill>
+                    </a:lnB>
+                  </a:tcPr>
+                </a:tc>
+              </a:tr>
+              <a:tr h="472440">
+                <a:tc>
+                  <a:txBody>
+                    <a:bodyPr/>
+                    <a:lstStyle/>
+                    <a:p>
+                      <a:pPr algn="ctr">
+                        <a:spcBef>
+                          <a:spcPts val="100"/>
+                        </a:spcBef>
+                        <a:spcAft>
+                          <a:spcPts val="100"/>
+                        </a:spcAft>
+                      </a:pPr>
+                      <a:r>
+                        <a:rPr sz="1150" b="0">
+                          <a:solidFill>
+                            <a:srgbClr val="1E293B"/>
+                          </a:solidFill>
+                          <a:latin typeface="Calibri"/>
+                        </a:rPr>
+                        <a:t>Tasks + events unified</a:t>
+                      </a:r>
+                    </a:p>
+                  </a:txBody>
+                  <a:tcPr anchor="ctr" marL="73152" marR="73152" marT="27432" marB="27432">
+                    <a:solidFill>
+                      <a:srgbClr val="EEF2FF"/>
+                    </a:solidFill>
+                    <a:lnL w="12700">
+                      <a:solidFill>
+                        <a:srgbClr val="CBD5E1"/>
+                      </a:solidFill>
+                    </a:lnL>
+                    <a:lnR w="12700">
+                      <a:solidFill>
+                        <a:srgbClr val="CBD5E1"/>
+                      </a:solidFill>
+                    </a:lnR>
+                    <a:lnT w="12700">
+                      <a:solidFill>
+                        <a:srgbClr val="CBD5E1"/>
+                      </a:solidFill>
+                    </a:lnT>
+                    <a:lnB w="12700">
+                      <a:solidFill>
+                        <a:srgbClr val="CBD5E1"/>
+                      </a:solidFill>
+                    </a:lnB>
+                  </a:tcPr>
+                </a:tc>
+                <a:tc>
+                  <a:txBody>
+                    <a:bodyPr/>
+                    <a:lstStyle/>
+                    <a:p>
+                      <a:pPr algn="ctr">
+                        <a:spcBef>
+                          <a:spcPts val="100"/>
+                        </a:spcBef>
+                        <a:spcAft>
+                          <a:spcPts val="100"/>
+                        </a:spcAft>
+                      </a:pPr>
+                      <a:r>
+                        <a:rPr sz="1150" b="0">
+                          <a:solidFill>
+                            <a:srgbClr val="1E293B"/>
+                          </a:solidFill>
+                          <a:latin typeface="Calibri"/>
+                        </a:rPr>
+                        <a:t>✖</a:t>
+                      </a:r>
+                    </a:p>
+                  </a:txBody>
+                  <a:tcPr anchor="ctr" marL="73152" marR="73152" marT="27432" marB="27432">
+                    <a:solidFill>
+                      <a:srgbClr val="EEF2FF"/>
+                    </a:solidFill>
+                    <a:lnL w="12700">
+                      <a:solidFill>
+                        <a:srgbClr val="CBD5E1"/>
+                      </a:solidFill>
+                    </a:lnL>
+                    <a:lnR w="12700">
+                      <a:solidFill>
+                        <a:srgbClr val="CBD5E1"/>
+                      </a:solidFill>
+                    </a:lnR>
+                    <a:lnT w="12700">
+                      <a:solidFill>
+                        <a:srgbClr val="CBD5E1"/>
+                      </a:solidFill>
+                    </a:lnT>
+                    <a:lnB w="12700">
+                      <a:solidFill>
+                        <a:srgbClr val="CBD5E1"/>
+                      </a:solidFill>
+                    </a:lnB>
+                  </a:tcPr>
+                </a:tc>
+                <a:tc>
+                  <a:txBody>
+                    <a:bodyPr/>
+                    <a:lstStyle/>
+                    <a:p>
+                      <a:pPr algn="ctr">
+                        <a:spcBef>
+                          <a:spcPts val="100"/>
+                        </a:spcBef>
+                        <a:spcAft>
+                          <a:spcPts val="100"/>
+                        </a:spcAft>
+                      </a:pPr>
+                      <a:r>
+                        <a:rPr sz="1150" b="0">
+                          <a:solidFill>
+                            <a:srgbClr val="1E293B"/>
+                          </a:solidFill>
+                          <a:latin typeface="Calibri"/>
+                        </a:rPr>
+                        <a:t>◐</a:t>
+                      </a:r>
+                    </a:p>
+                  </a:txBody>
+                  <a:tcPr anchor="ctr" marL="73152" marR="73152" marT="27432" marB="27432">
+                    <a:solidFill>
+                      <a:srgbClr val="EEF2FF"/>
+                    </a:solidFill>
+                    <a:lnL w="12700">
+                      <a:solidFill>
+                        <a:srgbClr val="CBD5E1"/>
+                      </a:solidFill>
+                    </a:lnL>
+                    <a:lnR w="12700">
+                      <a:solidFill>
+                        <a:srgbClr val="CBD5E1"/>
+                      </a:solidFill>
+                    </a:lnR>
+                    <a:lnT w="12700">
+                      <a:solidFill>
+                        <a:srgbClr val="CBD5E1"/>
+                      </a:solidFill>
+                    </a:lnT>
+                    <a:lnB w="12700">
+                      <a:solidFill>
+                        <a:srgbClr val="CBD5E1"/>
+                      </a:solidFill>
+                    </a:lnB>
+                  </a:tcPr>
+                </a:tc>
+                <a:tc>
+                  <a:txBody>
+                    <a:bodyPr/>
+                    <a:lstStyle/>
+                    <a:p>
+                      <a:pPr algn="ctr">
+                        <a:spcBef>
+                          <a:spcPts val="100"/>
+                        </a:spcBef>
+                        <a:spcAft>
+                          <a:spcPts val="100"/>
+                        </a:spcAft>
+                      </a:pPr>
+                      <a:r>
+                        <a:rPr sz="1150" b="0">
+                          <a:solidFill>
+                            <a:srgbClr val="1E293B"/>
+                          </a:solidFill>
+                          <a:latin typeface="Calibri"/>
+                        </a:rPr>
+                        <a:t>◐</a:t>
+                      </a:r>
+                    </a:p>
+                  </a:txBody>
+                  <a:tcPr anchor="ctr" marL="73152" marR="73152" marT="27432" marB="27432">
+                    <a:solidFill>
+                      <a:srgbClr val="EEF2FF"/>
+                    </a:solidFill>
+                    <a:lnL w="12700">
+                      <a:solidFill>
+                        <a:srgbClr val="CBD5E1"/>
+                      </a:solidFill>
+                    </a:lnL>
+                    <a:lnR w="12700">
+                      <a:solidFill>
+                        <a:srgbClr val="CBD5E1"/>
+                      </a:solidFill>
+                    </a:lnR>
+                    <a:lnT w="12700">
+                      <a:solidFill>
+                        <a:srgbClr val="CBD5E1"/>
+                      </a:solidFill>
+                    </a:lnT>
+                    <a:lnB w="12700">
+                      <a:solidFill>
+                        <a:srgbClr val="CBD5E1"/>
+                      </a:solidFill>
+                    </a:lnB>
+                  </a:tcPr>
+                </a:tc>
+                <a:tc>
+                  <a:txBody>
+                    <a:bodyPr/>
+                    <a:lstStyle/>
+                    <a:p>
+                      <a:pPr algn="ctr">
+                        <a:spcBef>
+                          <a:spcPts val="100"/>
+                        </a:spcBef>
+                        <a:spcAft>
+                          <a:spcPts val="100"/>
+                        </a:spcAft>
+                      </a:pPr>
+                      <a:r>
+                        <a:rPr sz="1150" b="0">
+                          <a:solidFill>
+                            <a:srgbClr val="1E293B"/>
+                          </a:solidFill>
+                          <a:latin typeface="Calibri"/>
+                        </a:rPr>
+                        <a:t>✔</a:t>
+                      </a:r>
+                    </a:p>
+                  </a:txBody>
+                  <a:tcPr anchor="ctr" marL="73152" marR="73152" marT="27432" marB="27432">
+                    <a:solidFill>
+                      <a:srgbClr val="EEF2FF"/>
+                    </a:solidFill>
+                    <a:lnL w="12700">
+                      <a:solidFill>
+                        <a:srgbClr val="CBD5E1"/>
+                      </a:solidFill>
+                    </a:lnL>
+                    <a:lnR w="12700">
+                      <a:solidFill>
+                        <a:srgbClr val="CBD5E1"/>
+                      </a:solidFill>
+                    </a:lnR>
+                    <a:lnT w="12700">
+                      <a:solidFill>
+                        <a:srgbClr val="CBD5E1"/>
+                      </a:solidFill>
+                    </a:lnT>
+                    <a:lnB w="12700">
+                      <a:solidFill>
+                        <a:srgbClr val="CBD5E1"/>
+                      </a:solidFill>
+                    </a:lnB>
+                  </a:tcPr>
+                </a:tc>
+              </a:tr>
+              <a:tr h="472440">
+                <a:tc>
+                  <a:txBody>
+                    <a:bodyPr/>
+                    <a:lstStyle/>
+                    <a:p>
+                      <a:pPr algn="ctr">
+                        <a:spcBef>
+                          <a:spcPts val="100"/>
+                        </a:spcBef>
+                        <a:spcAft>
+                          <a:spcPts val="100"/>
+                        </a:spcAft>
+                      </a:pPr>
+                      <a:r>
+                        <a:rPr sz="1150" b="0">
+                          <a:solidFill>
+                            <a:srgbClr val="1E293B"/>
+                          </a:solidFill>
+                          <a:latin typeface="Calibri"/>
+                        </a:rPr>
+                        <a:t>Full audit trail</a:t>
+                      </a:r>
+                    </a:p>
+                  </a:txBody>
+                  <a:tcPr anchor="ctr" marL="73152" marR="73152" marT="27432" marB="27432">
+                    <a:solidFill>
+                      <a:srgbClr val="FFFFFF"/>
+                    </a:solidFill>
+                    <a:lnL w="12700">
+                      <a:solidFill>
+                        <a:srgbClr val="CBD5E1"/>
+                      </a:solidFill>
+                    </a:lnL>
+                    <a:lnR w="12700">
+                      <a:solidFill>
+                        <a:srgbClr val="CBD5E1"/>
+                      </a:solidFill>
+                    </a:lnR>
+                    <a:lnT w="12700">
+                      <a:solidFill>
+                        <a:srgbClr val="CBD5E1"/>
+                      </a:solidFill>
+                    </a:lnT>
+                    <a:lnB w="12700">
+                      <a:solidFill>
+                        <a:srgbClr val="CBD5E1"/>
+                      </a:solidFill>
+                    </a:lnB>
+                  </a:tcPr>
+                </a:tc>
+                <a:tc>
+                  <a:txBody>
+                    <a:bodyPr/>
+                    <a:lstStyle/>
+                    <a:p>
+                      <a:pPr algn="ctr">
+                        <a:spcBef>
+                          <a:spcPts val="100"/>
+                        </a:spcBef>
+                        <a:spcAft>
+                          <a:spcPts val="100"/>
+                        </a:spcAft>
+                      </a:pPr>
+                      <a:r>
+                        <a:rPr sz="1150" b="0">
+                          <a:solidFill>
+                            <a:srgbClr val="1E293B"/>
+                          </a:solidFill>
+                          <a:latin typeface="Calibri"/>
+                        </a:rPr>
+                        <a:t>✖</a:t>
+                      </a:r>
+                    </a:p>
+                  </a:txBody>
+                  <a:tcPr anchor="ctr" marL="73152" marR="73152" marT="27432" marB="27432">
+                    <a:solidFill>
+                      <a:srgbClr val="FFFFFF"/>
+                    </a:solidFill>
+                    <a:lnL w="12700">
+                      <a:solidFill>
+                        <a:srgbClr val="CBD5E1"/>
+                      </a:solidFill>
+                    </a:lnL>
+                    <a:lnR w="12700">
+                      <a:solidFill>
+                        <a:srgbClr val="CBD5E1"/>
+                      </a:solidFill>
+                    </a:lnR>
+                    <a:lnT w="12700">
+                      <a:solidFill>
+                        <a:srgbClr val="CBD5E1"/>
+                      </a:solidFill>
+                    </a:lnT>
+                    <a:lnB w="12700">
+                      <a:solidFill>
+                        <a:srgbClr val="CBD5E1"/>
+                      </a:solidFill>
+                    </a:lnB>
+                  </a:tcPr>
+                </a:tc>
+                <a:tc>
+                  <a:txBody>
+                    <a:bodyPr/>
+                    <a:lstStyle/>
+                    <a:p>
+                      <a:pPr algn="ctr">
+                        <a:spcBef>
+                          <a:spcPts val="100"/>
+                        </a:spcBef>
+                        <a:spcAft>
+                          <a:spcPts val="100"/>
+                        </a:spcAft>
+                      </a:pPr>
+                      <a:r>
+                        <a:rPr sz="1150" b="0">
+                          <a:solidFill>
+                            <a:srgbClr val="1E293B"/>
+                          </a:solidFill>
+                          <a:latin typeface="Calibri"/>
+                        </a:rPr>
+                        <a:t>✔</a:t>
+                      </a:r>
+                    </a:p>
+                  </a:txBody>
+                  <a:tcPr anchor="ctr" marL="73152" marR="73152" marT="27432" marB="27432">
+                    <a:solidFill>
+                      <a:srgbClr val="FFFFFF"/>
+                    </a:solidFill>
+                    <a:lnL w="12700">
+                      <a:solidFill>
+                        <a:srgbClr val="CBD5E1"/>
+                      </a:solidFill>
+                    </a:lnL>
+                    <a:lnR w="12700">
+                      <a:solidFill>
+                        <a:srgbClr val="CBD5E1"/>
+                      </a:solidFill>
+                    </a:lnR>
+                    <a:lnT w="12700">
+                      <a:solidFill>
+                        <a:srgbClr val="CBD5E1"/>
+                      </a:solidFill>
+                    </a:lnT>
+                    <a:lnB w="12700">
+                      <a:solidFill>
+                        <a:srgbClr val="CBD5E1"/>
+                      </a:solidFill>
+                    </a:lnB>
+                  </a:tcPr>
+                </a:tc>
+                <a:tc>
+                  <a:txBody>
+                    <a:bodyPr/>
+                    <a:lstStyle/>
+                    <a:p>
+                      <a:pPr algn="ctr">
+                        <a:spcBef>
+                          <a:spcPts val="100"/>
+                        </a:spcBef>
+                        <a:spcAft>
+                          <a:spcPts val="100"/>
+                        </a:spcAft>
+                      </a:pPr>
+                      <a:r>
+                        <a:rPr sz="1150" b="0">
+                          <a:solidFill>
+                            <a:srgbClr val="1E293B"/>
+                          </a:solidFill>
+                          <a:latin typeface="Calibri"/>
+                        </a:rPr>
+                        <a:t>✔</a:t>
+                      </a:r>
+                    </a:p>
+                  </a:txBody>
+                  <a:tcPr anchor="ctr" marL="73152" marR="73152" marT="27432" marB="27432">
+                    <a:solidFill>
+                      <a:srgbClr val="FFFFFF"/>
+                    </a:solidFill>
+                    <a:lnL w="12700">
+                      <a:solidFill>
+                        <a:srgbClr val="CBD5E1"/>
+                      </a:solidFill>
+                    </a:lnL>
+                    <a:lnR w="12700">
+                      <a:solidFill>
+                        <a:srgbClr val="CBD5E1"/>
+                      </a:solidFill>
+                    </a:lnR>
+                    <a:lnT w="12700">
+                      <a:solidFill>
+                        <a:srgbClr val="CBD5E1"/>
+                      </a:solidFill>
+                    </a:lnT>
+                    <a:lnB w="12700">
+                      <a:solidFill>
+                        <a:srgbClr val="CBD5E1"/>
+                      </a:solidFill>
+                    </a:lnB>
+                  </a:tcPr>
+                </a:tc>
+                <a:tc>
+                  <a:txBody>
+                    <a:bodyPr/>
+                    <a:lstStyle/>
+                    <a:p>
+                      <a:pPr algn="ctr">
+                        <a:spcBef>
+                          <a:spcPts val="100"/>
+                        </a:spcBef>
+                        <a:spcAft>
+                          <a:spcPts val="100"/>
+                        </a:spcAft>
+                      </a:pPr>
+                      <a:r>
+                        <a:rPr sz="1150" b="0">
+                          <a:solidFill>
+                            <a:srgbClr val="1E293B"/>
+                          </a:solidFill>
+                          <a:latin typeface="Calibri"/>
+                        </a:rPr>
+                        <a:t>✔</a:t>
+                      </a:r>
+                    </a:p>
+                  </a:txBody>
+                  <a:tcPr anchor="ctr" marL="73152" marR="73152" marT="27432" marB="27432">
+                    <a:solidFill>
+                      <a:srgbClr val="FFFFFF"/>
+                    </a:solidFill>
+                    <a:lnL w="12700">
+                      <a:solidFill>
+                        <a:srgbClr val="CBD5E1"/>
+                      </a:solidFill>
+                    </a:lnL>
+                    <a:lnR w="12700">
+                      <a:solidFill>
+                        <a:srgbClr val="CBD5E1"/>
+                      </a:solidFill>
+                    </a:lnR>
+                    <a:lnT w="12700">
+                      <a:solidFill>
+                        <a:srgbClr val="CBD5E1"/>
+                      </a:solidFill>
+                    </a:lnT>
+                    <a:lnB w="12700">
+                      <a:solidFill>
+                        <a:srgbClr val="CBD5E1"/>
+                      </a:solidFill>
+                    </a:lnB>
+                  </a:tcPr>
+                </a:tc>
+              </a:tr>
+              <a:tr h="472440">
+                <a:tc>
+                  <a:txBody>
+                    <a:bodyPr/>
+                    <a:lstStyle/>
+                    <a:p>
+                      <a:pPr algn="ctr">
+                        <a:spcBef>
+                          <a:spcPts val="100"/>
+                        </a:spcBef>
+                        <a:spcAft>
+                          <a:spcPts val="100"/>
+                        </a:spcAft>
+                      </a:pPr>
+                      <a:r>
+                        <a:rPr sz="1150" b="0">
+                          <a:solidFill>
+                            <a:srgbClr val="1E293B"/>
+                          </a:solidFill>
+                          <a:latin typeface="Calibri"/>
+                        </a:rPr>
+                        <a:t>Open &amp; customizable</a:t>
+                      </a:r>
+                    </a:p>
+                  </a:txBody>
+                  <a:tcPr anchor="ctr" marL="73152" marR="73152" marT="27432" marB="27432">
+                    <a:solidFill>
+                      <a:srgbClr val="EEF2FF"/>
+                    </a:solidFill>
+                    <a:lnL w="12700">
+                      <a:solidFill>
+                        <a:srgbClr val="CBD5E1"/>
+                      </a:solidFill>
+                    </a:lnL>
+                    <a:lnR w="12700">
+                      <a:solidFill>
+                        <a:srgbClr val="CBD5E1"/>
+                      </a:solidFill>
+                    </a:lnR>
+                    <a:lnT w="12700">
+                      <a:solidFill>
+                        <a:srgbClr val="CBD5E1"/>
+                      </a:solidFill>
+                    </a:lnT>
+                    <a:lnB w="12700">
+                      <a:solidFill>
+                        <a:srgbClr val="CBD5E1"/>
+                      </a:solidFill>
+                    </a:lnB>
+                  </a:tcPr>
+                </a:tc>
+                <a:tc>
+                  <a:txBody>
+                    <a:bodyPr/>
+                    <a:lstStyle/>
+                    <a:p>
+                      <a:pPr algn="ctr">
+                        <a:spcBef>
+                          <a:spcPts val="100"/>
+                        </a:spcBef>
+                        <a:spcAft>
+                          <a:spcPts val="100"/>
+                        </a:spcAft>
+                      </a:pPr>
+                      <a:r>
+                        <a:rPr sz="1150" b="0">
+                          <a:solidFill>
+                            <a:srgbClr val="1E293B"/>
+                          </a:solidFill>
+                          <a:latin typeface="Calibri"/>
+                        </a:rPr>
+                        <a:t>—</a:t>
+                      </a:r>
+                    </a:p>
+                  </a:txBody>
+                  <a:tcPr anchor="ctr" marL="73152" marR="73152" marT="27432" marB="27432">
+                    <a:solidFill>
+                      <a:srgbClr val="EEF2FF"/>
+                    </a:solidFill>
+                    <a:lnL w="12700">
+                      <a:solidFill>
+                        <a:srgbClr val="CBD5E1"/>
+                      </a:solidFill>
+                    </a:lnL>
+                    <a:lnR w="12700">
+                      <a:solidFill>
+                        <a:srgbClr val="CBD5E1"/>
+                      </a:solidFill>
+                    </a:lnR>
+                    <a:lnT w="12700">
+                      <a:solidFill>
+                        <a:srgbClr val="CBD5E1"/>
+                      </a:solidFill>
+                    </a:lnT>
+                    <a:lnB w="12700">
+                      <a:solidFill>
+                        <a:srgbClr val="CBD5E1"/>
+                      </a:solidFill>
+                    </a:lnB>
+                  </a:tcPr>
+                </a:tc>
+                <a:tc>
+                  <a:txBody>
+                    <a:bodyPr/>
+                    <a:lstStyle/>
+                    <a:p>
+                      <a:pPr algn="ctr">
+                        <a:spcBef>
+                          <a:spcPts val="100"/>
+                        </a:spcBef>
+                        <a:spcAft>
+                          <a:spcPts val="100"/>
+                        </a:spcAft>
+                      </a:pPr>
+                      <a:r>
+                        <a:rPr sz="1150" b="0">
+                          <a:solidFill>
+                            <a:srgbClr val="1E293B"/>
+                          </a:solidFill>
+                          <a:latin typeface="Calibri"/>
+                        </a:rPr>
+                        <a:t>✖</a:t>
+                      </a:r>
+                    </a:p>
+                  </a:txBody>
+                  <a:tcPr anchor="ctr" marL="73152" marR="73152" marT="27432" marB="27432">
+                    <a:solidFill>
+                      <a:srgbClr val="EEF2FF"/>
+                    </a:solidFill>
+                    <a:lnL w="12700">
+                      <a:solidFill>
+                        <a:srgbClr val="CBD5E1"/>
+                      </a:solidFill>
+                    </a:lnL>
+                    <a:lnR w="12700">
+                      <a:solidFill>
+                        <a:srgbClr val="CBD5E1"/>
+                      </a:solidFill>
+                    </a:lnR>
+                    <a:lnT w="12700">
+                      <a:solidFill>
+                        <a:srgbClr val="CBD5E1"/>
+                      </a:solidFill>
+                    </a:lnT>
+                    <a:lnB w="12700">
+                      <a:solidFill>
+                        <a:srgbClr val="CBD5E1"/>
+                      </a:solidFill>
+                    </a:lnB>
+                  </a:tcPr>
+                </a:tc>
+                <a:tc>
+                  <a:txBody>
+                    <a:bodyPr/>
+                    <a:lstStyle/>
+                    <a:p>
+                      <a:pPr algn="ctr">
+                        <a:spcBef>
+                          <a:spcPts val="100"/>
+                        </a:spcBef>
+                        <a:spcAft>
+                          <a:spcPts val="100"/>
+                        </a:spcAft>
+                      </a:pPr>
+                      <a:r>
+                        <a:rPr sz="1150" b="0">
+                          <a:solidFill>
+                            <a:srgbClr val="1E293B"/>
+                          </a:solidFill>
+                          <a:latin typeface="Calibri"/>
+                        </a:rPr>
+                        <a:t>✖</a:t>
+                      </a:r>
+                    </a:p>
+                  </a:txBody>
+                  <a:tcPr anchor="ctr" marL="73152" marR="73152" marT="27432" marB="27432">
+                    <a:solidFill>
+                      <a:srgbClr val="EEF2FF"/>
+                    </a:solidFill>
+                    <a:lnL w="12700">
+                      <a:solidFill>
+                        <a:srgbClr val="CBD5E1"/>
+                      </a:solidFill>
+                    </a:lnL>
+                    <a:lnR w="12700">
+                      <a:solidFill>
+                        <a:srgbClr val="CBD5E1"/>
+                      </a:solidFill>
+                    </a:lnR>
+                    <a:lnT w="12700">
+                      <a:solidFill>
+                        <a:srgbClr val="CBD5E1"/>
+                      </a:solidFill>
+                    </a:lnT>
+                    <a:lnB w="12700">
+                      <a:solidFill>
+                        <a:srgbClr val="CBD5E1"/>
+                      </a:solidFill>
+                    </a:lnB>
+                  </a:tcPr>
+                </a:tc>
+                <a:tc>
+                  <a:txBody>
+                    <a:bodyPr/>
+                    <a:lstStyle/>
+                    <a:p>
+                      <a:pPr algn="ctr">
+                        <a:spcBef>
+                          <a:spcPts val="100"/>
+                        </a:spcBef>
+                        <a:spcAft>
+                          <a:spcPts val="100"/>
+                        </a:spcAft>
+                      </a:pPr>
+                      <a:r>
+                        <a:rPr sz="1150" b="0">
+                          <a:solidFill>
+                            <a:srgbClr val="1E293B"/>
+                          </a:solidFill>
+                          <a:latin typeface="Calibri"/>
+                        </a:rPr>
+                        <a:t>✔</a:t>
+                      </a:r>
+                    </a:p>
+                  </a:txBody>
+                  <a:tcPr anchor="ctr" marL="73152" marR="73152" marT="27432" marB="27432">
+                    <a:solidFill>
+                      <a:srgbClr val="EEF2FF"/>
+                    </a:solidFill>
+                    <a:lnL w="12700">
+                      <a:solidFill>
+                        <a:srgbClr val="CBD5E1"/>
+                      </a:solidFill>
+                    </a:lnL>
+                    <a:lnR w="12700">
+                      <a:solidFill>
+                        <a:srgbClr val="CBD5E1"/>
+                      </a:solidFill>
+                    </a:lnR>
+                    <a:lnT w="12700">
+                      <a:solidFill>
+                        <a:srgbClr val="CBD5E1"/>
+                      </a:solidFill>
+                    </a:lnT>
+                    <a:lnB w="12700">
+                      <a:solidFill>
+                        <a:srgbClr val="CBD5E1"/>
+                      </a:solidFill>
+                    </a:lnB>
+                  </a:tcPr>
+                </a:tc>
+              </a:tr>
+            </a:tbl>
+          </a:graphicData>
+        </a:graphic>
+      </p:graphicFrame>
+      <p:sp>
+        <p:nvSpPr>
+          <p:cNvPr id="8" name="Rounded Rectangle 7"/>
+          <p:cNvSpPr/>
+          <p:nvPr/>
+        </p:nvSpPr>
+        <p:spPr>
+          <a:xfrm>
+            <a:off x="411480" y="5806440"/>
+            <a:ext cx="11365992" cy="457200"/>
+          </a:xfrm>
+          <a:prstGeom prst="roundRect">
+            <a:avLst/>
+          </a:prstGeom>
+          <a:solidFill>
+            <a:srgbClr val="FEF3C7"/>
+          </a:solidFill>
+          <a:ln>
+            <a:noFill/>
+          </a:ln>
+          <a:effectLst/>
+        </p:spPr>
+        <p:style>
+          <a:lnRef idx="1">
+            <a:schemeClr val="accent1"/>
+          </a:lnRef>
+          <a:fillRef idx="3">
+            <a:schemeClr val="accent1"/>
+          </a:fillRef>
+          <a:effectRef idx="2">
+            <a:schemeClr val="accent1"/>
+          </a:effectRef>
+          <a:fontRef idx="minor">
+            <a:schemeClr val="lt1"/>
+          </a:fontRef>
+        </p:style>
+        <p:txBody>
+          <a:bodyPr rtlCol="0" anchor="ctr" wrap="square" lIns="27432" rIns="27432" tIns="36576" bIns="36576"/>
+          <a:lstStyle/>
+          <a:p>
+            <a:pPr algn="ctr">
+              <a:spcBef>
+                <a:spcPts val="0"/>
+              </a:spcBef>
+              <a:spcAft>
+                <a:spcPts val="0"/>
+              </a:spcAft>
+            </a:pPr>
+            <a:r>
+              <a:rPr sz="1100" b="1" i="0">
+                <a:solidFill>
+                  <a:srgbClr val="0B1E3B"/>
+                </a:solidFill>
+                <a:latin typeface="Calibri"/>
+              </a:rPr>
+              <a:t>✔ full   •   ◐ partial   •   ✖ missing        →   Only HieraSync combines hierarchy + approvals + free AI risk + academic analytics</a:t>
             </a:r>
           </a:p>
         </p:txBody>
@@ -27312,6 +35849,407 @@
           <a:lstStyle/>
           <a:p>
             <a:pPr algn="ctr"/>
+          </a:p>
+        </p:txBody>
+      </p:sp>
+    </p:spTree>
+  </p:cSld>
+  <p:clrMapOvr>
+    <a:masterClrMapping/>
+  </p:clrMapOvr>
+</p:sld>
+</file>
+
+<file path=ppt/slides/slide30.xml><?xml version="1.0" encoding="utf-8"?>
+<p:sld xmlns:a="http://schemas.openxmlformats.org/drawingml/2006/main" xmlns:p="http://schemas.openxmlformats.org/presentationml/2006/main" xmlns:r="http://schemas.openxmlformats.org/officeDocument/2006/relationships">
+  <p:cSld>
+    <p:bg>
+      <p:bgPr>
+        <a:solidFill>
+          <a:srgbClr val="F3F6FC"/>
+        </a:solidFill>
+        <a:effectLst/>
+      </p:bgPr>
+    </p:bg>
+    <p:spTree>
+      <p:nvGrpSpPr>
+        <p:cNvPr id="1" name=""/>
+        <p:cNvGrpSpPr/>
+        <p:nvPr/>
+      </p:nvGrpSpPr>
+      <p:grpSpPr/>
+      <p:sp>
+        <p:nvSpPr>
+          <p:cNvPr id="2" name="Rectangle 1"/>
+          <p:cNvSpPr/>
+          <p:nvPr/>
+        </p:nvSpPr>
+        <p:spPr>
+          <a:xfrm>
+            <a:off x="0" y="0"/>
+            <a:ext cx="12191695" cy="1115568"/>
+          </a:xfrm>
+          <a:prstGeom prst="rect">
+            <a:avLst/>
+          </a:prstGeom>
+          <a:solidFill>
+            <a:srgbClr val="0B1E3B"/>
+          </a:solidFill>
+          <a:ln>
+            <a:noFill/>
+          </a:ln>
+          <a:effectLst/>
+        </p:spPr>
+        <p:style>
+          <a:lnRef idx="1">
+            <a:schemeClr val="accent1"/>
+          </a:lnRef>
+          <a:fillRef idx="3">
+            <a:schemeClr val="accent1"/>
+          </a:fillRef>
+          <a:effectRef idx="2">
+            <a:schemeClr val="accent1"/>
+          </a:effectRef>
+          <a:fontRef idx="minor">
+            <a:schemeClr val="lt1"/>
+          </a:fontRef>
+        </p:style>
+        <p:txBody>
+          <a:bodyPr rtlCol="0" anchor="ctr"/>
+          <a:lstStyle/>
+          <a:p>
+            <a:pPr algn="ctr"/>
+          </a:p>
+        </p:txBody>
+      </p:sp>
+      <p:sp>
+        <p:nvSpPr>
+          <p:cNvPr id="3" name="Rectangle 2"/>
+          <p:cNvSpPr/>
+          <p:nvPr/>
+        </p:nvSpPr>
+        <p:spPr>
+          <a:xfrm>
+            <a:off x="0" y="1115568"/>
+            <a:ext cx="12191695" cy="41148"/>
+          </a:xfrm>
+          <a:prstGeom prst="rect">
+            <a:avLst/>
+          </a:prstGeom>
+          <a:solidFill>
+            <a:srgbClr val="F59E0B"/>
+          </a:solidFill>
+          <a:ln>
+            <a:noFill/>
+          </a:ln>
+          <a:effectLst/>
+        </p:spPr>
+        <p:style>
+          <a:lnRef idx="1">
+            <a:schemeClr val="accent1"/>
+          </a:lnRef>
+          <a:fillRef idx="3">
+            <a:schemeClr val="accent1"/>
+          </a:fillRef>
+          <a:effectRef idx="2">
+            <a:schemeClr val="accent1"/>
+          </a:effectRef>
+          <a:fontRef idx="minor">
+            <a:schemeClr val="lt1"/>
+          </a:fontRef>
+        </p:style>
+        <p:txBody>
+          <a:bodyPr rtlCol="0" anchor="ctr"/>
+          <a:lstStyle/>
+          <a:p>
+            <a:pPr algn="ctr"/>
+          </a:p>
+        </p:txBody>
+      </p:sp>
+      <p:sp>
+        <p:nvSpPr>
+          <p:cNvPr id="4" name="Rectangle 3"/>
+          <p:cNvSpPr/>
+          <p:nvPr/>
+        </p:nvSpPr>
+        <p:spPr>
+          <a:xfrm>
+            <a:off x="411480" y="109728"/>
+            <a:ext cx="10058400" cy="914400"/>
+          </a:xfrm>
+          <a:prstGeom prst="rect">
+            <a:avLst/>
+          </a:prstGeom>
+          <a:noFill/>
+          <a:ln>
+            <a:noFill/>
+          </a:ln>
+          <a:effectLst/>
+        </p:spPr>
+        <p:style>
+          <a:lnRef idx="1">
+            <a:schemeClr val="accent1"/>
+          </a:lnRef>
+          <a:fillRef idx="3">
+            <a:schemeClr val="accent1"/>
+          </a:fillRef>
+          <a:effectRef idx="2">
+            <a:schemeClr val="accent1"/>
+          </a:effectRef>
+          <a:fontRef idx="minor">
+            <a:schemeClr val="lt1"/>
+          </a:fontRef>
+        </p:style>
+        <p:txBody>
+          <a:bodyPr rtlCol="0" anchor="t" wrap="square" lIns="0" rIns="0" tIns="36576" bIns="36576"/>
+          <a:lstStyle/>
+          <a:p>
+            <a:pPr algn="l">
+              <a:spcBef>
+                <a:spcPts val="0"/>
+              </a:spcBef>
+              <a:spcAft>
+                <a:spcPts val="100"/>
+              </a:spcAft>
+            </a:pPr>
+            <a:r>
+              <a:rPr sz="1050" b="1" i="0">
+                <a:solidFill>
+                  <a:srgbClr val="06B6D4"/>
+                </a:solidFill>
+                <a:latin typeface="Calibri"/>
+              </a:rPr>
+              <a:t>APPENDIX · BACKUP FOR Q&amp;A</a:t>
+            </a:r>
+          </a:p>
+          <a:p>
+            <a:pPr algn="l">
+              <a:spcBef>
+                <a:spcPts val="0"/>
+              </a:spcBef>
+              <a:spcAft>
+                <a:spcPts val="0"/>
+              </a:spcAft>
+            </a:pPr>
+            <a:r>
+              <a:rPr sz="2500" b="1" i="0">
+                <a:solidFill>
+                  <a:srgbClr val="FFFFFF"/>
+                </a:solidFill>
+                <a:latin typeface="Calibri"/>
+              </a:rPr>
+              <a:t>Appendix E — Project Timeline (Gantt)</a:t>
+            </a:r>
+          </a:p>
+        </p:txBody>
+      </p:sp>
+      <p:sp>
+        <p:nvSpPr>
+          <p:cNvPr id="5" name="Rounded Rectangle 4"/>
+          <p:cNvSpPr/>
+          <p:nvPr/>
+        </p:nvSpPr>
+        <p:spPr>
+          <a:xfrm>
+            <a:off x="11018520" y="292608"/>
+            <a:ext cx="777240" cy="502920"/>
+          </a:xfrm>
+          <a:prstGeom prst="roundRect">
+            <a:avLst/>
+          </a:prstGeom>
+          <a:solidFill>
+            <a:srgbClr val="143363"/>
+          </a:solidFill>
+          <a:ln w="15875">
+            <a:solidFill>
+              <a:srgbClr val="06B6D4"/>
+            </a:solidFill>
+          </a:ln>
+          <a:effectLst/>
+        </p:spPr>
+        <p:style>
+          <a:lnRef idx="1">
+            <a:schemeClr val="accent1"/>
+          </a:lnRef>
+          <a:fillRef idx="3">
+            <a:schemeClr val="accent1"/>
+          </a:fillRef>
+          <a:effectRef idx="2">
+            <a:schemeClr val="accent1"/>
+          </a:effectRef>
+          <a:fontRef idx="minor">
+            <a:schemeClr val="lt1"/>
+          </a:fontRef>
+        </p:style>
+        <p:txBody>
+          <a:bodyPr rtlCol="0" anchor="ctr" wrap="square" lIns="18288" rIns="18288" tIns="36576" bIns="36576"/>
+          <a:lstStyle/>
+          <a:p>
+            <a:pPr algn="ctr">
+              <a:spcBef>
+                <a:spcPts val="0"/>
+              </a:spcBef>
+              <a:spcAft>
+                <a:spcPts val="0"/>
+              </a:spcAft>
+            </a:pPr>
+            <a:r>
+              <a:rPr sz="1500" b="1" i="0">
+                <a:solidFill>
+                  <a:srgbClr val="FFFFFF"/>
+                </a:solidFill>
+                <a:latin typeface="Calibri"/>
+              </a:rPr>
+              <a:t>30</a:t>
+            </a:r>
+          </a:p>
+        </p:txBody>
+      </p:sp>
+      <p:sp>
+        <p:nvSpPr>
+          <p:cNvPr id="6" name="Rectangle 5"/>
+          <p:cNvSpPr/>
+          <p:nvPr/>
+        </p:nvSpPr>
+        <p:spPr>
+          <a:xfrm>
+            <a:off x="411480" y="6455664"/>
+            <a:ext cx="11365992" cy="320040"/>
+          </a:xfrm>
+          <a:prstGeom prst="rect">
+            <a:avLst/>
+          </a:prstGeom>
+          <a:noFill/>
+          <a:ln>
+            <a:noFill/>
+          </a:ln>
+          <a:effectLst/>
+        </p:spPr>
+        <p:style>
+          <a:lnRef idx="1">
+            <a:schemeClr val="accent1"/>
+          </a:lnRef>
+          <a:fillRef idx="3">
+            <a:schemeClr val="accent1"/>
+          </a:fillRef>
+          <a:effectRef idx="2">
+            <a:schemeClr val="accent1"/>
+          </a:effectRef>
+          <a:fontRef idx="minor">
+            <a:schemeClr val="lt1"/>
+          </a:fontRef>
+        </p:style>
+        <p:txBody>
+          <a:bodyPr rtlCol="0" anchor="t" wrap="square" lIns="0" rIns="0" tIns="36576" bIns="36576"/>
+          <a:lstStyle/>
+          <a:p>
+            <a:pPr algn="ctr">
+              <a:spcAft>
+                <a:spcPts val="0"/>
+              </a:spcAft>
+            </a:pPr>
+            <a:r>
+              <a:rPr sz="850" b="0">
+                <a:solidFill>
+                  <a:srgbClr val="64748B"/>
+                </a:solidFill>
+                <a:latin typeface="Calibri"/>
+              </a:rPr>
+              <a:t>HieraSync AI  •  Review Seminar – I      </a:t>
+            </a:r>
+            <a:r>
+              <a:rPr sz="850" b="0">
+                <a:solidFill>
+                  <a:srgbClr val="64748B"/>
+                </a:solidFill>
+                <a:latin typeface="Calibri"/>
+              </a:rPr>
+              <a:t>CSE (AI &amp; ML), SBJIT Nagpur</a:t>
+            </a:r>
+          </a:p>
+        </p:txBody>
+      </p:sp>
+      <p:pic>
+        <p:nvPicPr>
+          <p:cNvPr id="7" name="Picture 6" descr="gantt.png"/>
+          <p:cNvPicPr>
+            <a:picLocks noChangeAspect="1"/>
+          </p:cNvPicPr>
+          <p:nvPr/>
+        </p:nvPicPr>
+        <p:blipFill>
+          <a:blip r:embed="rId2"/>
+          <a:stretch>
+            <a:fillRect/>
+          </a:stretch>
+        </p:blipFill>
+        <p:spPr>
+          <a:xfrm>
+            <a:off x="411480" y="1371600"/>
+            <a:ext cx="11365992" cy="3754923"/>
+          </a:xfrm>
+          <a:prstGeom prst="rect">
+            <a:avLst/>
+          </a:prstGeom>
+        </p:spPr>
+      </p:pic>
+      <p:sp>
+        <p:nvSpPr>
+          <p:cNvPr id="8" name="Rounded Rectangle 7"/>
+          <p:cNvSpPr/>
+          <p:nvPr/>
+        </p:nvSpPr>
+        <p:spPr>
+          <a:xfrm>
+            <a:off x="411480" y="5532120"/>
+            <a:ext cx="11365992" cy="548640"/>
+          </a:xfrm>
+          <a:prstGeom prst="roundRect">
+            <a:avLst/>
+          </a:prstGeom>
+          <a:solidFill>
+            <a:srgbClr val="0B1E3B"/>
+          </a:solidFill>
+          <a:ln>
+            <a:noFill/>
+          </a:ln>
+          <a:effectLst/>
+        </p:spPr>
+        <p:style>
+          <a:lnRef idx="1">
+            <a:schemeClr val="accent1"/>
+          </a:lnRef>
+          <a:fillRef idx="3">
+            <a:schemeClr val="accent1"/>
+          </a:fillRef>
+          <a:effectRef idx="2">
+            <a:schemeClr val="accent1"/>
+          </a:effectRef>
+          <a:fontRef idx="minor">
+            <a:schemeClr val="lt1"/>
+          </a:fontRef>
+        </p:style>
+        <p:txBody>
+          <a:bodyPr rtlCol="0" anchor="ctr" wrap="square" lIns="27432" rIns="27432" tIns="36576" bIns="36576"/>
+          <a:lstStyle/>
+          <a:p>
+            <a:pPr algn="ctr">
+              <a:spcBef>
+                <a:spcPts val="0"/>
+              </a:spcBef>
+              <a:spcAft>
+                <a:spcPts val="0"/>
+              </a:spcAft>
+            </a:pPr>
+            <a:r>
+              <a:rPr sz="1050" b="1" i="0">
+                <a:solidFill>
+                  <a:srgbClr val="FFFFFF"/>
+                </a:solidFill>
+                <a:latin typeface="Calibri"/>
+              </a:rPr>
+              <a:t>TARGET DEPLOYMENT:   Browser → Vercel / Firebase Hosting (SPA) → Cloud Run (FastAPI) → Firestore + Auth + Storage   •   env-based config   •   HTTPS everywhere</a:t>
+            </a:r>
           </a:p>
         </p:txBody>
       </p:sp>
